--- a/slides/Bao_ve_RandomForest_HPO.pptx
+++ b/slides/Bao_ve_RandomForest_HPO.pptx
@@ -13,7 +13,7 @@
     <p:sldId id="261" r:id="rId12"/>
     <p:sldId id="262" r:id="rId13"/>
   </p:sldIdLst>
-  <p:sldSz cx="12188952" cy="6858000" type="screen4x3"/>
+  <p:sldSz cx="12191695" cy="6858000" type="screen4x3"/>
   <p:notesSz cx="6858000" cy="9144000"/>
   <p:defaultTextStyle>
     <a:defPPr>
@@ -3087,14 +3087,6 @@
 <file path=ppt/slides/slide1.xml><?xml version="1.0" encoding="utf-8"?>
 <p:sld xmlns:a="http://schemas.openxmlformats.org/drawingml/2006/main" xmlns:p="http://schemas.openxmlformats.org/presentationml/2006/main" xmlns:r="http://schemas.openxmlformats.org/officeDocument/2006/relationships">
   <p:cSld>
-    <p:bg>
-      <p:bgPr>
-        <a:solidFill>
-          <a:srgbClr val="F7FAFC"/>
-        </a:solidFill>
-        <a:effectLst/>
-      </p:bgPr>
-    </p:bg>
     <p:spTree>
       <p:nvGrpSpPr>
         <p:cNvPr id="1" name=""/>
@@ -3104,153 +3096,435 @@
       <p:grpSpPr/>
       <p:sp>
         <p:nvSpPr>
-          <p:cNvPr id="2" name="TextBox 1"/>
+          <p:cNvPr id="2" name="Rectangle 1"/>
+          <p:cNvSpPr/>
+          <p:nvPr/>
+        </p:nvSpPr>
+        <p:spPr>
+          <a:xfrm>
+            <a:off x="0" y="0"/>
+            <a:ext cx="12191695" cy="6858000"/>
+          </a:xfrm>
+          <a:prstGeom prst="rect">
+            <a:avLst/>
+          </a:prstGeom>
+          <a:solidFill>
+            <a:srgbClr val="F8F8FA"/>
+          </a:solidFill>
+          <a:ln>
+            <a:noFill/>
+          </a:ln>
+        </p:spPr>
+        <p:style>
+          <a:lnRef idx="1">
+            <a:schemeClr val="accent1"/>
+          </a:lnRef>
+          <a:fillRef idx="3">
+            <a:schemeClr val="accent1"/>
+          </a:fillRef>
+          <a:effectRef idx="2">
+            <a:schemeClr val="accent1"/>
+          </a:effectRef>
+          <a:fontRef idx="minor">
+            <a:schemeClr val="lt1"/>
+          </a:fontRef>
+        </p:style>
+        <p:txBody>
+          <a:bodyPr rtlCol="0" anchor="ctr"/>
+          <a:lstStyle/>
+          <a:p>
+            <a:pPr algn="ctr"/>
+          </a:p>
+        </p:txBody>
+      </p:sp>
+      <p:sp>
+        <p:nvSpPr>
+          <p:cNvPr id="3" name="Rectangle 2"/>
+          <p:cNvSpPr/>
+          <p:nvPr/>
+        </p:nvSpPr>
+        <p:spPr>
+          <a:xfrm>
+            <a:off x="0" y="0"/>
+            <a:ext cx="12191695" cy="411480"/>
+          </a:xfrm>
+          <a:prstGeom prst="rect">
+            <a:avLst/>
+          </a:prstGeom>
+          <a:solidFill>
+            <a:srgbClr val="B1192A"/>
+          </a:solidFill>
+          <a:ln>
+            <a:noFill/>
+          </a:ln>
+        </p:spPr>
+        <p:style>
+          <a:lnRef idx="1">
+            <a:schemeClr val="accent1"/>
+          </a:lnRef>
+          <a:fillRef idx="3">
+            <a:schemeClr val="accent1"/>
+          </a:fillRef>
+          <a:effectRef idx="2">
+            <a:schemeClr val="accent1"/>
+          </a:effectRef>
+          <a:fontRef idx="minor">
+            <a:schemeClr val="lt1"/>
+          </a:fontRef>
+        </p:style>
+        <p:txBody>
+          <a:bodyPr rtlCol="0" anchor="ctr"/>
+          <a:lstStyle/>
+          <a:p>
+            <a:pPr algn="ctr"/>
+          </a:p>
+        </p:txBody>
+      </p:sp>
+      <p:sp>
+        <p:nvSpPr>
+          <p:cNvPr id="4" name="Rounded Rectangle 3"/>
+          <p:cNvSpPr/>
+          <p:nvPr/>
+        </p:nvSpPr>
+        <p:spPr>
+          <a:xfrm>
+            <a:off x="502920" y="1005840"/>
+            <a:ext cx="11155680" cy="4937760"/>
+          </a:xfrm>
+          <a:prstGeom prst="roundRect">
+            <a:avLst/>
+          </a:prstGeom>
+          <a:solidFill>
+            <a:srgbClr val="FFFFFF"/>
+          </a:solidFill>
+          <a:ln>
+            <a:solidFill>
+              <a:srgbClr val="EBEEF2"/>
+            </a:solidFill>
+          </a:ln>
+        </p:spPr>
+        <p:style>
+          <a:lnRef idx="1">
+            <a:schemeClr val="accent1"/>
+          </a:lnRef>
+          <a:fillRef idx="3">
+            <a:schemeClr val="accent1"/>
+          </a:fillRef>
+          <a:effectRef idx="2">
+            <a:schemeClr val="accent1"/>
+          </a:effectRef>
+          <a:fontRef idx="minor">
+            <a:schemeClr val="lt1"/>
+          </a:fontRef>
+        </p:style>
+        <p:txBody>
+          <a:bodyPr rtlCol="0" anchor="ctr"/>
+          <a:lstStyle/>
+          <a:p>
+            <a:pPr algn="ctr"/>
+          </a:p>
+        </p:txBody>
+      </p:sp>
+      <p:pic>
+        <p:nvPicPr>
+          <p:cNvPr id="5" name="Picture 4" descr="image1.png"/>
+          <p:cNvPicPr>
+            <a:picLocks noChangeAspect="1"/>
+          </p:cNvPicPr>
+          <p:nvPr/>
+        </p:nvPicPr>
+        <p:blipFill>
+          <a:blip r:embed="rId2"/>
+          <a:stretch>
+            <a:fillRect/>
+          </a:stretch>
+        </p:blipFill>
+        <p:spPr>
+          <a:xfrm>
+            <a:off x="777240" y="1325880"/>
+            <a:ext cx="768096" cy="914400"/>
+          </a:xfrm>
+          <a:prstGeom prst="rect">
+            <a:avLst/>
+          </a:prstGeom>
+        </p:spPr>
+      </p:pic>
+      <p:sp>
+        <p:nvSpPr>
+          <p:cNvPr id="6" name="TextBox 5"/>
           <p:cNvSpPr txBox="1"/>
           <p:nvPr/>
         </p:nvSpPr>
         <p:spPr>
           <a:xfrm>
-            <a:off x="548640" y="347472"/>
-            <a:ext cx="11247120" cy="640080"/>
+            <a:off x="1828800" y="1234440"/>
+            <a:ext cx="8869680" cy="914400"/>
           </a:xfrm>
           <a:prstGeom prst="rect">
             <a:avLst/>
           </a:prstGeom>
           <a:noFill/>
-        </p:spPr>
-        <p:txBody>
-          <a:bodyPr wrap="none">
+          <a:ln>
+            <a:noFill/>
+          </a:ln>
+        </p:spPr>
+        <p:txBody>
+          <a:bodyPr wrap="square" lIns="45720" rIns="45720">
             <a:spAutoFit/>
           </a:bodyPr>
           <a:lstStyle/>
           <a:p>
-            <a:pPr>
-              <a:defRPr sz="3000" b="1">
-                <a:solidFill>
-                  <a:srgbClr val="0E5C67"/>
+            <a:pPr algn="l">
+              <a:defRPr sz="2400" b="1">
+                <a:solidFill>
+                  <a:srgbClr val="2B2B2B"/>
                 </a:solidFill>
               </a:defRPr>
             </a:pPr>
             <a:r>
-              <a:t>Random Forest Hyperparameter Optimization</a:t>
-            </a:r>
-          </a:p>
-        </p:txBody>
-      </p:sp>
-      <p:sp>
-        <p:nvSpPr>
-          <p:cNvPr id="3" name="TextBox 2"/>
+              <a:t>RANDOM FOREST</a:t>
+            </a:r>
+            <a:br/>
+            <a:r>
+              <a:t>HYPERPARAMETER OPTIMIZATION</a:t>
+            </a:r>
+          </a:p>
+        </p:txBody>
+      </p:sp>
+      <p:sp>
+        <p:nvSpPr>
+          <p:cNvPr id="7" name="TextBox 6"/>
           <p:cNvSpPr txBox="1"/>
           <p:nvPr/>
         </p:nvSpPr>
         <p:spPr>
           <a:xfrm>
-            <a:off x="731520" y="1234440"/>
-            <a:ext cx="10789920" cy="5120640"/>
+            <a:off x="1874519" y="2240280"/>
+            <a:ext cx="8778240" cy="411480"/>
           </a:xfrm>
           <a:prstGeom prst="rect">
             <a:avLst/>
           </a:prstGeom>
           <a:noFill/>
-        </p:spPr>
-        <p:txBody>
-          <a:bodyPr wrap="square">
+          <a:ln>
+            <a:noFill/>
+          </a:ln>
+        </p:spPr>
+        <p:txBody>
+          <a:bodyPr wrap="square" lIns="45720" rIns="45720">
             <a:spAutoFit/>
           </a:bodyPr>
           <a:lstStyle/>
           <a:p>
-            <a:pPr>
-              <a:spcAft>
-                <a:spcPts val="1900"/>
-              </a:spcAft>
-              <a:defRPr sz="2200">
-                <a:solidFill>
-                  <a:srgbClr val="253744"/>
+            <a:pPr algn="l">
+              <a:defRPr sz="1800" b="1">
+                <a:solidFill>
+                  <a:srgbClr val="B1192A"/>
                 </a:solidFill>
               </a:defRPr>
             </a:pPr>
             <a:r>
-              <a:t>Đề tài bài tập lớn cá nhân – 5 tuần</a:t>
-            </a:r>
-          </a:p>
-          <a:p>
-            <a:pPr>
-              <a:spcAft>
-                <a:spcPts val="1900"/>
-              </a:spcAft>
-              <a:defRPr sz="2200">
-                <a:solidFill>
-                  <a:srgbClr val="253744"/>
-                </a:solidFill>
-              </a:defRPr>
-            </a:pPr>
-            <a:r>
-              <a:t>Phương pháp: Random Search (30 trials)</a:t>
-            </a:r>
-          </a:p>
-          <a:p>
-            <a:pPr>
-              <a:spcAft>
-                <a:spcPts val="1900"/>
-              </a:spcAft>
-              <a:defRPr sz="2200">
-                <a:solidFill>
-                  <a:srgbClr val="253744"/>
-                </a:solidFill>
-              </a:defRPr>
-            </a:pPr>
-            <a:r>
-              <a:t>Bộ dữ liệu: Breast Cancer Wisconsin (Diagnostic)</a:t>
-            </a:r>
-          </a:p>
-          <a:p>
-            <a:pPr>
-              <a:spcAft>
-                <a:spcPts val="1900"/>
-              </a:spcAft>
-              <a:defRPr sz="2200">
-                <a:solidFill>
-                  <a:srgbClr val="253744"/>
-                </a:solidFill>
-              </a:defRPr>
-            </a:pPr>
-            <a:r>
-              <a:t>Sinh viên: [Điền họ tên – MSSV]</a:t>
-            </a:r>
-          </a:p>
-        </p:txBody>
-      </p:sp>
-      <p:sp>
-        <p:nvSpPr>
-          <p:cNvPr id="4" name="TextBox 3"/>
+              <a:t>Tối ưu siêu tham số Random Forest bằng Random Search</a:t>
+            </a:r>
+          </a:p>
+        </p:txBody>
+      </p:sp>
+      <p:sp>
+        <p:nvSpPr>
+          <p:cNvPr id="8" name="Rounded Rectangle 7"/>
+          <p:cNvSpPr/>
+          <p:nvPr/>
+        </p:nvSpPr>
+        <p:spPr>
+          <a:xfrm>
+            <a:off x="914400" y="2880360"/>
+            <a:ext cx="10332720" cy="1920240"/>
+          </a:xfrm>
+          <a:prstGeom prst="roundRect">
+            <a:avLst/>
+          </a:prstGeom>
+          <a:solidFill>
+            <a:srgbClr val="F7F7F7"/>
+          </a:solidFill>
+          <a:ln>
+            <a:solidFill>
+              <a:srgbClr val="EBEEF2"/>
+            </a:solidFill>
+          </a:ln>
+        </p:spPr>
+        <p:style>
+          <a:lnRef idx="1">
+            <a:schemeClr val="accent1"/>
+          </a:lnRef>
+          <a:fillRef idx="3">
+            <a:schemeClr val="accent1"/>
+          </a:fillRef>
+          <a:effectRef idx="2">
+            <a:schemeClr val="accent1"/>
+          </a:effectRef>
+          <a:fontRef idx="minor">
+            <a:schemeClr val="lt1"/>
+          </a:fontRef>
+        </p:style>
+        <p:txBody>
+          <a:bodyPr rtlCol="0" anchor="ctr"/>
+          <a:lstStyle/>
+          <a:p>
+            <a:pPr algn="ctr"/>
+          </a:p>
+        </p:txBody>
+      </p:sp>
+      <p:sp>
+        <p:nvSpPr>
+          <p:cNvPr id="9" name="TextBox 8"/>
           <p:cNvSpPr txBox="1"/>
           <p:nvPr/>
         </p:nvSpPr>
         <p:spPr>
           <a:xfrm>
-            <a:off x="548640" y="6464808"/>
-            <a:ext cx="11064240" cy="182880"/>
+            <a:off x="1143000" y="3127248"/>
+            <a:ext cx="9875520" cy="1417320"/>
           </a:xfrm>
           <a:prstGeom prst="rect">
             <a:avLst/>
           </a:prstGeom>
           <a:noFill/>
-        </p:spPr>
-        <p:txBody>
-          <a:bodyPr wrap="none">
+          <a:ln>
+            <a:noFill/>
+          </a:ln>
+        </p:spPr>
+        <p:txBody>
+          <a:bodyPr wrap="square" lIns="45720" rIns="45720">
             <a:spAutoFit/>
           </a:bodyPr>
           <a:lstStyle/>
           <a:p>
-            <a:pPr>
-              <a:defRPr sz="900">
-                <a:solidFill>
-                  <a:srgbClr val="647378"/>
+            <a:pPr algn="l">
+              <a:defRPr sz="1700" b="0">
+                <a:solidFill>
+                  <a:srgbClr val="2B2B2B"/>
                 </a:solidFill>
               </a:defRPr>
             </a:pPr>
             <a:r>
-              <a:t>Nhập môn Tối ưu hóa  •  GitHub Portfolio  •  Kết quả từ Python logs</a:t>
+              <a:t>Sinh viên thực hiện: Phạm Phú Vĩnh  |  MSSV: 2474802010441</a:t>
+            </a:r>
+          </a:p>
+          <a:p>
+            <a:pPr algn="l">
+              <a:defRPr sz="1700" b="0">
+                <a:solidFill>
+                  <a:srgbClr val="2B2B2B"/>
+                </a:solidFill>
+              </a:defRPr>
+            </a:pPr>
+            <a:r>
+              <a:t>Lớp: 261_71ITAI51403_02  |  GVHD: Nguyễn Thị Diễm Anh</a:t>
+            </a:r>
+          </a:p>
+          <a:p>
+            <a:pPr algn="l">
+              <a:defRPr sz="1700" b="0">
+                <a:solidFill>
+                  <a:srgbClr val="2B2B2B"/>
+                </a:solidFill>
+              </a:defRPr>
+            </a:pPr>
+            <a:r>
+              <a:t>Môn học: Nhập môn Tối ưu hóa  |  Dataset: Breast Cancer Wisconsin (Diagnostic)</a:t>
+            </a:r>
+          </a:p>
+          <a:p>
+            <a:pPr algn="l">
+              <a:defRPr sz="1700" b="0">
+                <a:solidFill>
+                  <a:srgbClr val="2B2B2B"/>
+                </a:solidFill>
+              </a:defRPr>
+            </a:pPr>
+            <a:r>
+              <a:t>Phương pháp: Baseline Random Forest vs Random Search (30 trials)</a:t>
+            </a:r>
+          </a:p>
+        </p:txBody>
+      </p:sp>
+      <p:sp>
+        <p:nvSpPr>
+          <p:cNvPr id="10" name="Rounded Rectangle 9"/>
+          <p:cNvSpPr/>
+          <p:nvPr/>
+        </p:nvSpPr>
+        <p:spPr>
+          <a:xfrm>
+            <a:off x="914400" y="5120640"/>
+            <a:ext cx="10332720" cy="502920"/>
+          </a:xfrm>
+          <a:prstGeom prst="roundRect">
+            <a:avLst/>
+          </a:prstGeom>
+          <a:solidFill>
+            <a:srgbClr val="B1192A"/>
+          </a:solidFill>
+          <a:ln>
+            <a:noFill/>
+          </a:ln>
+        </p:spPr>
+        <p:style>
+          <a:lnRef idx="1">
+            <a:schemeClr val="accent1"/>
+          </a:lnRef>
+          <a:fillRef idx="3">
+            <a:schemeClr val="accent1"/>
+          </a:fillRef>
+          <a:effectRef idx="2">
+            <a:schemeClr val="accent1"/>
+          </a:effectRef>
+          <a:fontRef idx="minor">
+            <a:schemeClr val="lt1"/>
+          </a:fontRef>
+        </p:style>
+        <p:txBody>
+          <a:bodyPr rtlCol="0" anchor="ctr"/>
+          <a:lstStyle/>
+          <a:p>
+            <a:pPr algn="ctr"/>
+          </a:p>
+        </p:txBody>
+      </p:sp>
+      <p:sp>
+        <p:nvSpPr>
+          <p:cNvPr id="11" name="TextBox 10"/>
+          <p:cNvSpPr txBox="1"/>
+          <p:nvPr/>
+        </p:nvSpPr>
+        <p:spPr>
+          <a:xfrm>
+            <a:off x="1051560" y="5230368"/>
+            <a:ext cx="10058400" cy="219456"/>
+          </a:xfrm>
+          <a:prstGeom prst="rect">
+            <a:avLst/>
+          </a:prstGeom>
+          <a:noFill/>
+          <a:ln>
+            <a:noFill/>
+          </a:ln>
+        </p:spPr>
+        <p:txBody>
+          <a:bodyPr wrap="square" lIns="45720" rIns="45720">
+            <a:spAutoFit/>
+          </a:bodyPr>
+          <a:lstStyle/>
+          <a:p>
+            <a:pPr algn="ctr">
+              <a:defRPr sz="1300" b="0">
+                <a:solidFill>
+                  <a:srgbClr val="FFFFFF"/>
+                </a:solidFill>
+              </a:defRPr>
+            </a:pPr>
+            <a:r>
+              <a:t>GitHub: https://github.com/PhuVinh206/random-forest-hyperparameter-optimization</a:t>
             </a:r>
           </a:p>
         </p:txBody>
@@ -3266,14 +3540,6 @@
 <file path=ppt/slides/slide2.xml><?xml version="1.0" encoding="utf-8"?>
 <p:sld xmlns:a="http://schemas.openxmlformats.org/drawingml/2006/main" xmlns:p="http://schemas.openxmlformats.org/presentationml/2006/main" xmlns:r="http://schemas.openxmlformats.org/officeDocument/2006/relationships">
   <p:cSld>
-    <p:bg>
-      <p:bgPr>
-        <a:solidFill>
-          <a:srgbClr val="F7FAFC"/>
-        </a:solidFill>
-        <a:effectLst/>
-      </p:bgPr>
-    </p:bg>
     <p:spTree>
       <p:nvGrpSpPr>
         <p:cNvPr id="1" name=""/>
@@ -3283,14 +3549,176 @@
       <p:grpSpPr/>
       <p:sp>
         <p:nvSpPr>
-          <p:cNvPr id="2" name="TextBox 1"/>
+          <p:cNvPr id="2" name="Rectangle 1"/>
+          <p:cNvSpPr/>
+          <p:nvPr/>
+        </p:nvSpPr>
+        <p:spPr>
+          <a:xfrm>
+            <a:off x="0" y="0"/>
+            <a:ext cx="12191695" cy="6858000"/>
+          </a:xfrm>
+          <a:prstGeom prst="rect">
+            <a:avLst/>
+          </a:prstGeom>
+          <a:solidFill>
+            <a:srgbClr val="FFFFFF"/>
+          </a:solidFill>
+          <a:ln>
+            <a:noFill/>
+          </a:ln>
+        </p:spPr>
+        <p:style>
+          <a:lnRef idx="1">
+            <a:schemeClr val="accent1"/>
+          </a:lnRef>
+          <a:fillRef idx="3">
+            <a:schemeClr val="accent1"/>
+          </a:fillRef>
+          <a:effectRef idx="2">
+            <a:schemeClr val="accent1"/>
+          </a:effectRef>
+          <a:fontRef idx="minor">
+            <a:schemeClr val="lt1"/>
+          </a:fontRef>
+        </p:style>
+        <p:txBody>
+          <a:bodyPr rtlCol="0" anchor="ctr"/>
+          <a:lstStyle/>
+          <a:p>
+            <a:pPr algn="ctr"/>
+          </a:p>
+        </p:txBody>
+      </p:sp>
+      <p:sp>
+        <p:nvSpPr>
+          <p:cNvPr id="3" name="Rectangle 2"/>
+          <p:cNvSpPr/>
+          <p:nvPr/>
+        </p:nvSpPr>
+        <p:spPr>
+          <a:xfrm>
+            <a:off x="0" y="0"/>
+            <a:ext cx="12191695" cy="320040"/>
+          </a:xfrm>
+          <a:prstGeom prst="rect">
+            <a:avLst/>
+          </a:prstGeom>
+          <a:solidFill>
+            <a:srgbClr val="B1192A"/>
+          </a:solidFill>
+          <a:ln>
+            <a:noFill/>
+          </a:ln>
+        </p:spPr>
+        <p:style>
+          <a:lnRef idx="1">
+            <a:schemeClr val="accent1"/>
+          </a:lnRef>
+          <a:fillRef idx="3">
+            <a:schemeClr val="accent1"/>
+          </a:fillRef>
+          <a:effectRef idx="2">
+            <a:schemeClr val="accent1"/>
+          </a:effectRef>
+          <a:fontRef idx="minor">
+            <a:schemeClr val="lt1"/>
+          </a:fontRef>
+        </p:style>
+        <p:txBody>
+          <a:bodyPr rtlCol="0" anchor="ctr"/>
+          <a:lstStyle/>
+          <a:p>
+            <a:pPr algn="ctr"/>
+          </a:p>
+        </p:txBody>
+      </p:sp>
+      <p:pic>
+        <p:nvPicPr>
+          <p:cNvPr id="4" name="Picture 3" descr="image1.png"/>
+          <p:cNvPicPr>
+            <a:picLocks noChangeAspect="1"/>
+          </p:cNvPicPr>
+          <p:nvPr/>
+        </p:nvPicPr>
+        <p:blipFill>
+          <a:blip r:embed="rId2"/>
+          <a:stretch>
+            <a:fillRect/>
+          </a:stretch>
+        </p:blipFill>
+        <p:spPr>
+          <a:xfrm>
+            <a:off x="228600" y="411480"/>
+            <a:ext cx="384048" cy="457200"/>
+          </a:xfrm>
+          <a:prstGeom prst="rect">
+            <a:avLst/>
+          </a:prstGeom>
+        </p:spPr>
+      </p:pic>
+      <p:sp>
+        <p:nvSpPr>
+          <p:cNvPr id="5" name="Rectangle 4"/>
+          <p:cNvSpPr/>
+          <p:nvPr/>
+        </p:nvSpPr>
+        <p:spPr>
+          <a:xfrm>
+            <a:off x="0" y="6537960"/>
+            <a:ext cx="12191695" cy="320040"/>
+          </a:xfrm>
+          <a:prstGeom prst="rect">
+            <a:avLst/>
+          </a:prstGeom>
+          <a:solidFill>
+            <a:srgbClr val="B1192A"/>
+          </a:solidFill>
+          <a:ln>
+            <a:noFill/>
+          </a:ln>
+        </p:spPr>
+        <p:style>
+          <a:lnRef idx="1">
+            <a:schemeClr val="accent1"/>
+          </a:lnRef>
+          <a:fillRef idx="3">
+            <a:schemeClr val="accent1"/>
+          </a:fillRef>
+          <a:effectRef idx="2">
+            <a:schemeClr val="accent1"/>
+          </a:effectRef>
+          <a:fontRef idx="minor">
+            <a:schemeClr val="lt1"/>
+          </a:fontRef>
+        </p:style>
+        <p:txBody>
+          <a:bodyPr rtlCol="0" anchor="ctr"/>
+          <a:lstStyle/>
+          <a:p>
+            <a:pPr algn="ctr">
+              <a:defRPr sz="1200">
+                <a:solidFill>
+                  <a:srgbClr val="FFFFFF"/>
+                </a:solidFill>
+              </a:defRPr>
+            </a:pPr>
+            <a:r>
+              <a:t>Nhập môn Tối ưu hóa  •  Bài tập lớn cá nhân  •  Phạm Phú Vĩnh</a:t>
+            </a:r>
+          </a:p>
+        </p:txBody>
+      </p:sp>
+      <p:sp>
+        <p:nvSpPr>
+          <p:cNvPr id="6" name="TextBox 5"/>
           <p:cNvSpPr txBox="1"/>
           <p:nvPr/>
         </p:nvSpPr>
         <p:spPr>
           <a:xfrm>
-            <a:off x="548640" y="347472"/>
-            <a:ext cx="11247120" cy="640080"/>
+            <a:off x="822960" y="502920"/>
+            <a:ext cx="8686800" cy="502920"/>
           </a:xfrm>
           <a:prstGeom prst="rect">
             <a:avLst/>
@@ -3304,111 +3732,28 @@
           <a:lstStyle/>
           <a:p>
             <a:pPr>
-              <a:defRPr sz="3000" b="1">
-                <a:solidFill>
-                  <a:srgbClr val="0E5C67"/>
+              <a:defRPr sz="2400" b="1">
+                <a:solidFill>
+                  <a:srgbClr val="2B2B2B"/>
                 </a:solidFill>
               </a:defRPr>
             </a:pPr>
             <a:r>
-              <a:t>Bài toán &amp; mô hình hóa</a:t>
-            </a:r>
-          </a:p>
-        </p:txBody>
-      </p:sp>
-      <p:sp>
-        <p:nvSpPr>
-          <p:cNvPr id="3" name="TextBox 2"/>
+              <a:t>1. Bài toán &amp; mô hình hóa</a:t>
+            </a:r>
+          </a:p>
+        </p:txBody>
+      </p:sp>
+      <p:sp>
+        <p:nvSpPr>
+          <p:cNvPr id="7" name="TextBox 6"/>
           <p:cNvSpPr txBox="1"/>
           <p:nvPr/>
         </p:nvSpPr>
         <p:spPr>
           <a:xfrm>
-            <a:off x="731520" y="1234440"/>
-            <a:ext cx="10789920" cy="5120640"/>
-          </a:xfrm>
-          <a:prstGeom prst="rect">
-            <a:avLst/>
-          </a:prstGeom>
-          <a:noFill/>
-        </p:spPr>
-        <p:txBody>
-          <a:bodyPr wrap="square">
-            <a:spAutoFit/>
-          </a:bodyPr>
-          <a:lstStyle/>
-          <a:p>
-            <a:pPr>
-              <a:spcAft>
-                <a:spcPts val="1900"/>
-              </a:spcAft>
-              <a:defRPr sz="2200">
-                <a:solidFill>
-                  <a:srgbClr val="253744"/>
-                </a:solidFill>
-              </a:defRPr>
-            </a:pPr>
-            <a:r>
-              <a:t>Biến quyết định: số cây, max_depth, min_samples_split, min_samples_leaf</a:t>
-            </a:r>
-          </a:p>
-          <a:p>
-            <a:pPr>
-              <a:spcAft>
-                <a:spcPts val="1900"/>
-              </a:spcAft>
-              <a:defRPr sz="2200">
-                <a:solidFill>
-                  <a:srgbClr val="253744"/>
-                </a:solidFill>
-              </a:defRPr>
-            </a:pPr>
-            <a:r>
-              <a:t>Mục tiêu: max trung bình CV macro-F1 qua 5 folds</a:t>
-            </a:r>
-          </a:p>
-          <a:p>
-            <a:pPr>
-              <a:spcAft>
-                <a:spcPts val="1900"/>
-              </a:spcAft>
-              <a:defRPr sz="2200">
-                <a:solidFill>
-                  <a:srgbClr val="253744"/>
-                </a:solidFill>
-              </a:defRPr>
-            </a:pPr>
-            <a:r>
-              <a:t>Ràng buộc: miền tham số rời rạc, budget 30 trials</a:t>
-            </a:r>
-          </a:p>
-          <a:p>
-            <a:pPr>
-              <a:spcAft>
-                <a:spcPts val="1900"/>
-              </a:spcAft>
-              <a:defRPr sz="2200">
-                <a:solidFill>
-                  <a:srgbClr val="253744"/>
-                </a:solidFill>
-              </a:defRPr>
-            </a:pPr>
-            <a:r>
-              <a:t>Trade-off: chất lượng dự đoán và chi phí tìm kiếm</a:t>
-            </a:r>
-          </a:p>
-        </p:txBody>
-      </p:sp>
-      <p:sp>
-        <p:nvSpPr>
-          <p:cNvPr id="4" name="TextBox 3"/>
-          <p:cNvSpPr txBox="1"/>
-          <p:nvPr/>
-        </p:nvSpPr>
-        <p:spPr>
-          <a:xfrm>
-            <a:off x="548640" y="6464808"/>
-            <a:ext cx="11064240" cy="182880"/>
+            <a:off x="868680" y="941832"/>
+            <a:ext cx="8686800" cy="274320"/>
           </a:xfrm>
           <a:prstGeom prst="rect">
             <a:avLst/>
@@ -3422,14 +3767,1256 @@
           <a:lstStyle/>
           <a:p>
             <a:pPr>
-              <a:defRPr sz="900">
-                <a:solidFill>
-                  <a:srgbClr val="647378"/>
+              <a:defRPr sz="1100">
+                <a:solidFill>
+                  <a:srgbClr val="5A5A5A"/>
                 </a:solidFill>
               </a:defRPr>
             </a:pPr>
             <a:r>
-              <a:t>Nhập môn Tối ưu hóa  •  GitHub Portfolio  •  Kết quả từ Python logs</a:t>
+              <a:t>Xác định biến quyết định, hàm mục tiêu và ràng buộc tối ưu hóa</a:t>
+            </a:r>
+          </a:p>
+        </p:txBody>
+      </p:sp>
+      <p:sp>
+        <p:nvSpPr>
+          <p:cNvPr id="8" name="Rounded Rectangle 7"/>
+          <p:cNvSpPr/>
+          <p:nvPr/>
+        </p:nvSpPr>
+        <p:spPr>
+          <a:xfrm>
+            <a:off x="548640" y="1325880"/>
+            <a:ext cx="2743200" cy="1143000"/>
+          </a:xfrm>
+          <a:prstGeom prst="roundRect">
+            <a:avLst/>
+          </a:prstGeom>
+          <a:solidFill>
+            <a:srgbClr val="FFFFFF"/>
+          </a:solidFill>
+          <a:ln>
+            <a:solidFill>
+              <a:srgbClr val="EBEEF2"/>
+            </a:solidFill>
+          </a:ln>
+        </p:spPr>
+        <p:style>
+          <a:lnRef idx="1">
+            <a:schemeClr val="accent1"/>
+          </a:lnRef>
+          <a:fillRef idx="3">
+            <a:schemeClr val="accent1"/>
+          </a:fillRef>
+          <a:effectRef idx="2">
+            <a:schemeClr val="accent1"/>
+          </a:effectRef>
+          <a:fontRef idx="minor">
+            <a:schemeClr val="lt1"/>
+          </a:fontRef>
+        </p:style>
+        <p:txBody>
+          <a:bodyPr rtlCol="0" anchor="ctr"/>
+          <a:lstStyle/>
+          <a:p>
+            <a:pPr algn="ctr"/>
+          </a:p>
+        </p:txBody>
+      </p:sp>
+      <p:sp>
+        <p:nvSpPr>
+          <p:cNvPr id="9" name="Rectangle 8"/>
+          <p:cNvSpPr/>
+          <p:nvPr/>
+        </p:nvSpPr>
+        <p:spPr>
+          <a:xfrm>
+            <a:off x="548640" y="1325880"/>
+            <a:ext cx="109728" cy="1143000"/>
+          </a:xfrm>
+          <a:prstGeom prst="rect">
+            <a:avLst/>
+          </a:prstGeom>
+          <a:solidFill>
+            <a:srgbClr val="2C5D86"/>
+          </a:solidFill>
+          <a:ln>
+            <a:noFill/>
+          </a:ln>
+        </p:spPr>
+        <p:style>
+          <a:lnRef idx="1">
+            <a:schemeClr val="accent1"/>
+          </a:lnRef>
+          <a:fillRef idx="3">
+            <a:schemeClr val="accent1"/>
+          </a:fillRef>
+          <a:effectRef idx="2">
+            <a:schemeClr val="accent1"/>
+          </a:effectRef>
+          <a:fontRef idx="minor">
+            <a:schemeClr val="lt1"/>
+          </a:fontRef>
+        </p:style>
+        <p:txBody>
+          <a:bodyPr rtlCol="0" anchor="ctr"/>
+          <a:lstStyle/>
+          <a:p>
+            <a:pPr algn="ctr"/>
+          </a:p>
+        </p:txBody>
+      </p:sp>
+      <p:sp>
+        <p:nvSpPr>
+          <p:cNvPr id="10" name="TextBox 9"/>
+          <p:cNvSpPr txBox="1"/>
+          <p:nvPr/>
+        </p:nvSpPr>
+        <p:spPr>
+          <a:xfrm>
+            <a:off x="713232" y="1399032"/>
+            <a:ext cx="2514600" cy="228600"/>
+          </a:xfrm>
+          <a:prstGeom prst="rect">
+            <a:avLst/>
+          </a:prstGeom>
+          <a:noFill/>
+          <a:ln>
+            <a:noFill/>
+          </a:ln>
+        </p:spPr>
+        <p:txBody>
+          <a:bodyPr wrap="square" lIns="45720" rIns="45720">
+            <a:spAutoFit/>
+          </a:bodyPr>
+          <a:lstStyle/>
+          <a:p>
+            <a:pPr algn="l">
+              <a:defRPr sz="1600" b="1">
+                <a:solidFill>
+                  <a:srgbClr val="2B2B2B"/>
+                </a:solidFill>
+              </a:defRPr>
+            </a:pPr>
+            <a:r>
+              <a:t>Câu hỏi nghiên cứu</a:t>
+            </a:r>
+          </a:p>
+        </p:txBody>
+      </p:sp>
+      <p:sp>
+        <p:nvSpPr>
+          <p:cNvPr id="11" name="TextBox 10"/>
+          <p:cNvSpPr txBox="1"/>
+          <p:nvPr/>
+        </p:nvSpPr>
+        <p:spPr>
+          <a:xfrm>
+            <a:off x="713232" y="1664208"/>
+            <a:ext cx="2487168" cy="758952"/>
+          </a:xfrm>
+          <a:prstGeom prst="rect">
+            <a:avLst/>
+          </a:prstGeom>
+          <a:noFill/>
+          <a:ln>
+            <a:noFill/>
+          </a:ln>
+        </p:spPr>
+        <p:txBody>
+          <a:bodyPr wrap="square" lIns="45720" rIns="45720">
+            <a:spAutoFit/>
+          </a:bodyPr>
+          <a:lstStyle/>
+          <a:p>
+            <a:pPr algn="l">
+              <a:defRPr sz="1300" b="0">
+                <a:solidFill>
+                  <a:srgbClr val="5A5A5A"/>
+                </a:solidFill>
+              </a:defRPr>
+            </a:pPr>
+            <a:r>
+              <a:t>Trong budget 30 cấu hình, Random Search có cải thiện Macro-F1 so với Random Forest mặc định hay không?</a:t>
+            </a:r>
+          </a:p>
+        </p:txBody>
+      </p:sp>
+      <p:sp>
+        <p:nvSpPr>
+          <p:cNvPr id="12" name="Rounded Rectangle 11"/>
+          <p:cNvSpPr/>
+          <p:nvPr/>
+        </p:nvSpPr>
+        <p:spPr>
+          <a:xfrm>
+            <a:off x="548640" y="2606040"/>
+            <a:ext cx="2743200" cy="1188720"/>
+          </a:xfrm>
+          <a:prstGeom prst="roundRect">
+            <a:avLst/>
+          </a:prstGeom>
+          <a:solidFill>
+            <a:srgbClr val="FFFFFF"/>
+          </a:solidFill>
+          <a:ln>
+            <a:solidFill>
+              <a:srgbClr val="EBEEF2"/>
+            </a:solidFill>
+          </a:ln>
+        </p:spPr>
+        <p:style>
+          <a:lnRef idx="1">
+            <a:schemeClr val="accent1"/>
+          </a:lnRef>
+          <a:fillRef idx="3">
+            <a:schemeClr val="accent1"/>
+          </a:fillRef>
+          <a:effectRef idx="2">
+            <a:schemeClr val="accent1"/>
+          </a:effectRef>
+          <a:fontRef idx="minor">
+            <a:schemeClr val="lt1"/>
+          </a:fontRef>
+        </p:style>
+        <p:txBody>
+          <a:bodyPr rtlCol="0" anchor="ctr"/>
+          <a:lstStyle/>
+          <a:p>
+            <a:pPr algn="ctr"/>
+          </a:p>
+        </p:txBody>
+      </p:sp>
+      <p:sp>
+        <p:nvSpPr>
+          <p:cNvPr id="13" name="Rectangle 12"/>
+          <p:cNvSpPr/>
+          <p:nvPr/>
+        </p:nvSpPr>
+        <p:spPr>
+          <a:xfrm>
+            <a:off x="548640" y="2606040"/>
+            <a:ext cx="109728" cy="1188720"/>
+          </a:xfrm>
+          <a:prstGeom prst="rect">
+            <a:avLst/>
+          </a:prstGeom>
+          <a:solidFill>
+            <a:srgbClr val="B1192A"/>
+          </a:solidFill>
+          <a:ln>
+            <a:noFill/>
+          </a:ln>
+        </p:spPr>
+        <p:style>
+          <a:lnRef idx="1">
+            <a:schemeClr val="accent1"/>
+          </a:lnRef>
+          <a:fillRef idx="3">
+            <a:schemeClr val="accent1"/>
+          </a:fillRef>
+          <a:effectRef idx="2">
+            <a:schemeClr val="accent1"/>
+          </a:effectRef>
+          <a:fontRef idx="minor">
+            <a:schemeClr val="lt1"/>
+          </a:fontRef>
+        </p:style>
+        <p:txBody>
+          <a:bodyPr rtlCol="0" anchor="ctr"/>
+          <a:lstStyle/>
+          <a:p>
+            <a:pPr algn="ctr"/>
+          </a:p>
+        </p:txBody>
+      </p:sp>
+      <p:sp>
+        <p:nvSpPr>
+          <p:cNvPr id="14" name="TextBox 13"/>
+          <p:cNvSpPr txBox="1"/>
+          <p:nvPr/>
+        </p:nvSpPr>
+        <p:spPr>
+          <a:xfrm>
+            <a:off x="713232" y="2679192"/>
+            <a:ext cx="2514600" cy="228600"/>
+          </a:xfrm>
+          <a:prstGeom prst="rect">
+            <a:avLst/>
+          </a:prstGeom>
+          <a:noFill/>
+          <a:ln>
+            <a:noFill/>
+          </a:ln>
+        </p:spPr>
+        <p:txBody>
+          <a:bodyPr wrap="square" lIns="45720" rIns="45720">
+            <a:spAutoFit/>
+          </a:bodyPr>
+          <a:lstStyle/>
+          <a:p>
+            <a:pPr algn="l">
+              <a:defRPr sz="1600" b="1">
+                <a:solidFill>
+                  <a:srgbClr val="2B2B2B"/>
+                </a:solidFill>
+              </a:defRPr>
+            </a:pPr>
+            <a:r>
+              <a:t>Biến quyết định</a:t>
+            </a:r>
+          </a:p>
+        </p:txBody>
+      </p:sp>
+      <p:sp>
+        <p:nvSpPr>
+          <p:cNvPr id="15" name="TextBox 14"/>
+          <p:cNvSpPr txBox="1"/>
+          <p:nvPr/>
+        </p:nvSpPr>
+        <p:spPr>
+          <a:xfrm>
+            <a:off x="713232" y="2944368"/>
+            <a:ext cx="2487168" cy="804672"/>
+          </a:xfrm>
+          <a:prstGeom prst="rect">
+            <a:avLst/>
+          </a:prstGeom>
+          <a:noFill/>
+          <a:ln>
+            <a:noFill/>
+          </a:ln>
+        </p:spPr>
+        <p:txBody>
+          <a:bodyPr wrap="square" lIns="45720" rIns="45720">
+            <a:spAutoFit/>
+          </a:bodyPr>
+          <a:lstStyle/>
+          <a:p>
+            <a:pPr algn="l">
+              <a:defRPr sz="1300" b="0">
+                <a:solidFill>
+                  <a:srgbClr val="5A5A5A"/>
+                </a:solidFill>
+              </a:defRPr>
+            </a:pPr>
+            <a:r>
+              <a:t>n_estimators, max_depth,</a:t>
+            </a:r>
+            <a:br/>
+            <a:r>
+              <a:t>min_samples_split, min_samples_leaf</a:t>
+            </a:r>
+          </a:p>
+        </p:txBody>
+      </p:sp>
+      <p:sp>
+        <p:nvSpPr>
+          <p:cNvPr id="16" name="Rounded Rectangle 15"/>
+          <p:cNvSpPr/>
+          <p:nvPr/>
+        </p:nvSpPr>
+        <p:spPr>
+          <a:xfrm>
+            <a:off x="548640" y="3886200"/>
+            <a:ext cx="2743200" cy="1234440"/>
+          </a:xfrm>
+          <a:prstGeom prst="roundRect">
+            <a:avLst/>
+          </a:prstGeom>
+          <a:solidFill>
+            <a:srgbClr val="FFFFFF"/>
+          </a:solidFill>
+          <a:ln>
+            <a:solidFill>
+              <a:srgbClr val="EBEEF2"/>
+            </a:solidFill>
+          </a:ln>
+        </p:spPr>
+        <p:style>
+          <a:lnRef idx="1">
+            <a:schemeClr val="accent1"/>
+          </a:lnRef>
+          <a:fillRef idx="3">
+            <a:schemeClr val="accent1"/>
+          </a:fillRef>
+          <a:effectRef idx="2">
+            <a:schemeClr val="accent1"/>
+          </a:effectRef>
+          <a:fontRef idx="minor">
+            <a:schemeClr val="lt1"/>
+          </a:fontRef>
+        </p:style>
+        <p:txBody>
+          <a:bodyPr rtlCol="0" anchor="ctr"/>
+          <a:lstStyle/>
+          <a:p>
+            <a:pPr algn="ctr"/>
+          </a:p>
+        </p:txBody>
+      </p:sp>
+      <p:sp>
+        <p:nvSpPr>
+          <p:cNvPr id="17" name="Rectangle 16"/>
+          <p:cNvSpPr/>
+          <p:nvPr/>
+        </p:nvSpPr>
+        <p:spPr>
+          <a:xfrm>
+            <a:off x="548640" y="3886200"/>
+            <a:ext cx="109728" cy="1234440"/>
+          </a:xfrm>
+          <a:prstGeom prst="rect">
+            <a:avLst/>
+          </a:prstGeom>
+          <a:solidFill>
+            <a:srgbClr val="3A8A5E"/>
+          </a:solidFill>
+          <a:ln>
+            <a:noFill/>
+          </a:ln>
+        </p:spPr>
+        <p:style>
+          <a:lnRef idx="1">
+            <a:schemeClr val="accent1"/>
+          </a:lnRef>
+          <a:fillRef idx="3">
+            <a:schemeClr val="accent1"/>
+          </a:fillRef>
+          <a:effectRef idx="2">
+            <a:schemeClr val="accent1"/>
+          </a:effectRef>
+          <a:fontRef idx="minor">
+            <a:schemeClr val="lt1"/>
+          </a:fontRef>
+        </p:style>
+        <p:txBody>
+          <a:bodyPr rtlCol="0" anchor="ctr"/>
+          <a:lstStyle/>
+          <a:p>
+            <a:pPr algn="ctr"/>
+          </a:p>
+        </p:txBody>
+      </p:sp>
+      <p:sp>
+        <p:nvSpPr>
+          <p:cNvPr id="18" name="TextBox 17"/>
+          <p:cNvSpPr txBox="1"/>
+          <p:nvPr/>
+        </p:nvSpPr>
+        <p:spPr>
+          <a:xfrm>
+            <a:off x="713232" y="3959352"/>
+            <a:ext cx="2514600" cy="228600"/>
+          </a:xfrm>
+          <a:prstGeom prst="rect">
+            <a:avLst/>
+          </a:prstGeom>
+          <a:noFill/>
+          <a:ln>
+            <a:noFill/>
+          </a:ln>
+        </p:spPr>
+        <p:txBody>
+          <a:bodyPr wrap="square" lIns="45720" rIns="45720">
+            <a:spAutoFit/>
+          </a:bodyPr>
+          <a:lstStyle/>
+          <a:p>
+            <a:pPr algn="l">
+              <a:defRPr sz="1600" b="1">
+                <a:solidFill>
+                  <a:srgbClr val="2B2B2B"/>
+                </a:solidFill>
+              </a:defRPr>
+            </a:pPr>
+            <a:r>
+              <a:t>Hàm mục tiêu</a:t>
+            </a:r>
+          </a:p>
+        </p:txBody>
+      </p:sp>
+      <p:sp>
+        <p:nvSpPr>
+          <p:cNvPr id="19" name="TextBox 18"/>
+          <p:cNvSpPr txBox="1"/>
+          <p:nvPr/>
+        </p:nvSpPr>
+        <p:spPr>
+          <a:xfrm>
+            <a:off x="713232" y="4224528"/>
+            <a:ext cx="2487168" cy="850392"/>
+          </a:xfrm>
+          <a:prstGeom prst="rect">
+            <a:avLst/>
+          </a:prstGeom>
+          <a:noFill/>
+          <a:ln>
+            <a:noFill/>
+          </a:ln>
+        </p:spPr>
+        <p:txBody>
+          <a:bodyPr wrap="square" lIns="45720" rIns="45720">
+            <a:spAutoFit/>
+          </a:bodyPr>
+          <a:lstStyle/>
+          <a:p>
+            <a:pPr algn="l">
+              <a:defRPr sz="1300" b="0">
+                <a:solidFill>
+                  <a:srgbClr val="5A5A5A"/>
+                </a:solidFill>
+              </a:defRPr>
+            </a:pPr>
+            <a:r>
+              <a:t>Tối đa hóa trung bình CV Macro-F1</a:t>
+            </a:r>
+            <a:br/>
+            <a:r>
+              <a:t>trên 5 fold của tập huấn luyện.</a:t>
+            </a:r>
+          </a:p>
+        </p:txBody>
+      </p:sp>
+      <p:sp>
+        <p:nvSpPr>
+          <p:cNvPr id="20" name="TextBox 19"/>
+          <p:cNvSpPr txBox="1"/>
+          <p:nvPr/>
+        </p:nvSpPr>
+        <p:spPr>
+          <a:xfrm>
+            <a:off x="3611880" y="1325880"/>
+            <a:ext cx="7772400" cy="320040"/>
+          </a:xfrm>
+          <a:prstGeom prst="rect">
+            <a:avLst/>
+          </a:prstGeom>
+          <a:noFill/>
+          <a:ln>
+            <a:noFill/>
+          </a:ln>
+        </p:spPr>
+        <p:txBody>
+          <a:bodyPr wrap="square" lIns="45720" rIns="45720">
+            <a:spAutoFit/>
+          </a:bodyPr>
+          <a:lstStyle/>
+          <a:p>
+            <a:pPr algn="l">
+              <a:defRPr sz="1800" b="1">
+                <a:solidFill>
+                  <a:srgbClr val="2B2B2B"/>
+                </a:solidFill>
+              </a:defRPr>
+            </a:pPr>
+            <a:r>
+              <a:t>Miền tìm kiếm siêu tham số</a:t>
+            </a:r>
+          </a:p>
+        </p:txBody>
+      </p:sp>
+      <p:sp>
+        <p:nvSpPr>
+          <p:cNvPr id="21" name="Rectangle 20"/>
+          <p:cNvSpPr/>
+          <p:nvPr/>
+        </p:nvSpPr>
+        <p:spPr>
+          <a:xfrm>
+            <a:off x="3611880" y="1691640"/>
+            <a:ext cx="2103120" cy="502920"/>
+          </a:xfrm>
+          <a:prstGeom prst="rect">
+            <a:avLst/>
+          </a:prstGeom>
+          <a:solidFill>
+            <a:srgbClr val="B1192A"/>
+          </a:solidFill>
+          <a:ln>
+            <a:solidFill>
+              <a:srgbClr val="CDCDCD"/>
+            </a:solidFill>
+          </a:ln>
+        </p:spPr>
+        <p:style>
+          <a:lnRef idx="1">
+            <a:schemeClr val="accent1"/>
+          </a:lnRef>
+          <a:fillRef idx="3">
+            <a:schemeClr val="accent1"/>
+          </a:fillRef>
+          <a:effectRef idx="2">
+            <a:schemeClr val="accent1"/>
+          </a:effectRef>
+          <a:fontRef idx="minor">
+            <a:schemeClr val="lt1"/>
+          </a:fontRef>
+        </p:style>
+        <p:txBody>
+          <a:bodyPr rtlCol="0" anchor="ctr"/>
+          <a:lstStyle/>
+          <a:p>
+            <a:pPr algn="ctr">
+              <a:defRPr sz="1300" b="1">
+                <a:solidFill>
+                  <a:srgbClr val="FFFFFF"/>
+                </a:solidFill>
+              </a:defRPr>
+            </a:pPr>
+            <a:r>
+              <a:t>Thành phần</a:t>
+            </a:r>
+          </a:p>
+        </p:txBody>
+      </p:sp>
+      <p:sp>
+        <p:nvSpPr>
+          <p:cNvPr id="22" name="Rectangle 21"/>
+          <p:cNvSpPr/>
+          <p:nvPr/>
+        </p:nvSpPr>
+        <p:spPr>
+          <a:xfrm>
+            <a:off x="5715000" y="1691640"/>
+            <a:ext cx="4023360" cy="502920"/>
+          </a:xfrm>
+          <a:prstGeom prst="rect">
+            <a:avLst/>
+          </a:prstGeom>
+          <a:solidFill>
+            <a:srgbClr val="B1192A"/>
+          </a:solidFill>
+          <a:ln>
+            <a:solidFill>
+              <a:srgbClr val="CDCDCD"/>
+            </a:solidFill>
+          </a:ln>
+        </p:spPr>
+        <p:style>
+          <a:lnRef idx="1">
+            <a:schemeClr val="accent1"/>
+          </a:lnRef>
+          <a:fillRef idx="3">
+            <a:schemeClr val="accent1"/>
+          </a:fillRef>
+          <a:effectRef idx="2">
+            <a:schemeClr val="accent1"/>
+          </a:effectRef>
+          <a:fontRef idx="minor">
+            <a:schemeClr val="lt1"/>
+          </a:fontRef>
+        </p:style>
+        <p:txBody>
+          <a:bodyPr rtlCol="0" anchor="ctr"/>
+          <a:lstStyle/>
+          <a:p>
+            <a:pPr algn="ctr">
+              <a:defRPr sz="1300" b="1">
+                <a:solidFill>
+                  <a:srgbClr val="FFFFFF"/>
+                </a:solidFill>
+              </a:defRPr>
+            </a:pPr>
+            <a:r>
+              <a:t>Miền giá trị</a:t>
+            </a:r>
+          </a:p>
+        </p:txBody>
+      </p:sp>
+      <p:sp>
+        <p:nvSpPr>
+          <p:cNvPr id="23" name="Rectangle 22"/>
+          <p:cNvSpPr/>
+          <p:nvPr/>
+        </p:nvSpPr>
+        <p:spPr>
+          <a:xfrm>
+            <a:off x="3611880" y="2194560"/>
+            <a:ext cx="2103120" cy="502920"/>
+          </a:xfrm>
+          <a:prstGeom prst="rect">
+            <a:avLst/>
+          </a:prstGeom>
+          <a:solidFill>
+            <a:srgbClr val="EBEEF2"/>
+          </a:solidFill>
+          <a:ln>
+            <a:solidFill>
+              <a:srgbClr val="CDCDCD"/>
+            </a:solidFill>
+          </a:ln>
+        </p:spPr>
+        <p:style>
+          <a:lnRef idx="1">
+            <a:schemeClr val="accent1"/>
+          </a:lnRef>
+          <a:fillRef idx="3">
+            <a:schemeClr val="accent1"/>
+          </a:fillRef>
+          <a:effectRef idx="2">
+            <a:schemeClr val="accent1"/>
+          </a:effectRef>
+          <a:fontRef idx="minor">
+            <a:schemeClr val="lt1"/>
+          </a:fontRef>
+        </p:style>
+        <p:txBody>
+          <a:bodyPr rtlCol="0" anchor="ctr"/>
+          <a:lstStyle/>
+          <a:p>
+            <a:pPr algn="ctr">
+              <a:defRPr sz="1300" b="0">
+                <a:solidFill>
+                  <a:srgbClr val="2B2B2B"/>
+                </a:solidFill>
+              </a:defRPr>
+            </a:pPr>
+            <a:r>
+              <a:t>n_estimators</a:t>
+            </a:r>
+          </a:p>
+        </p:txBody>
+      </p:sp>
+      <p:sp>
+        <p:nvSpPr>
+          <p:cNvPr id="24" name="Rectangle 23"/>
+          <p:cNvSpPr/>
+          <p:nvPr/>
+        </p:nvSpPr>
+        <p:spPr>
+          <a:xfrm>
+            <a:off x="5715000" y="2194560"/>
+            <a:ext cx="4023360" cy="502920"/>
+          </a:xfrm>
+          <a:prstGeom prst="rect">
+            <a:avLst/>
+          </a:prstGeom>
+          <a:solidFill>
+            <a:srgbClr val="EBEEF2"/>
+          </a:solidFill>
+          <a:ln>
+            <a:solidFill>
+              <a:srgbClr val="CDCDCD"/>
+            </a:solidFill>
+          </a:ln>
+        </p:spPr>
+        <p:style>
+          <a:lnRef idx="1">
+            <a:schemeClr val="accent1"/>
+          </a:lnRef>
+          <a:fillRef idx="3">
+            <a:schemeClr val="accent1"/>
+          </a:fillRef>
+          <a:effectRef idx="2">
+            <a:schemeClr val="accent1"/>
+          </a:effectRef>
+          <a:fontRef idx="minor">
+            <a:schemeClr val="lt1"/>
+          </a:fontRef>
+        </p:style>
+        <p:txBody>
+          <a:bodyPr rtlCol="0" anchor="ctr"/>
+          <a:lstStyle/>
+          <a:p>
+            <a:pPr algn="ctr">
+              <a:defRPr sz="1300" b="0">
+                <a:solidFill>
+                  <a:srgbClr val="2B2B2B"/>
+                </a:solidFill>
+              </a:defRPr>
+            </a:pPr>
+            <a:r>
+              <a:t>20, 40, 60, 80, 100</a:t>
+            </a:r>
+          </a:p>
+        </p:txBody>
+      </p:sp>
+      <p:sp>
+        <p:nvSpPr>
+          <p:cNvPr id="25" name="Rectangle 24"/>
+          <p:cNvSpPr/>
+          <p:nvPr/>
+        </p:nvSpPr>
+        <p:spPr>
+          <a:xfrm>
+            <a:off x="3611880" y="2697480"/>
+            <a:ext cx="2103120" cy="502920"/>
+          </a:xfrm>
+          <a:prstGeom prst="rect">
+            <a:avLst/>
+          </a:prstGeom>
+          <a:solidFill>
+            <a:srgbClr val="FFFFFF"/>
+          </a:solidFill>
+          <a:ln>
+            <a:solidFill>
+              <a:srgbClr val="CDCDCD"/>
+            </a:solidFill>
+          </a:ln>
+        </p:spPr>
+        <p:style>
+          <a:lnRef idx="1">
+            <a:schemeClr val="accent1"/>
+          </a:lnRef>
+          <a:fillRef idx="3">
+            <a:schemeClr val="accent1"/>
+          </a:fillRef>
+          <a:effectRef idx="2">
+            <a:schemeClr val="accent1"/>
+          </a:effectRef>
+          <a:fontRef idx="minor">
+            <a:schemeClr val="lt1"/>
+          </a:fontRef>
+        </p:style>
+        <p:txBody>
+          <a:bodyPr rtlCol="0" anchor="ctr"/>
+          <a:lstStyle/>
+          <a:p>
+            <a:pPr algn="ctr">
+              <a:defRPr sz="1300" b="0">
+                <a:solidFill>
+                  <a:srgbClr val="2B2B2B"/>
+                </a:solidFill>
+              </a:defRPr>
+            </a:pPr>
+            <a:r>
+              <a:t>max_depth</a:t>
+            </a:r>
+          </a:p>
+        </p:txBody>
+      </p:sp>
+      <p:sp>
+        <p:nvSpPr>
+          <p:cNvPr id="26" name="Rectangle 25"/>
+          <p:cNvSpPr/>
+          <p:nvPr/>
+        </p:nvSpPr>
+        <p:spPr>
+          <a:xfrm>
+            <a:off x="5715000" y="2697480"/>
+            <a:ext cx="4023360" cy="502920"/>
+          </a:xfrm>
+          <a:prstGeom prst="rect">
+            <a:avLst/>
+          </a:prstGeom>
+          <a:solidFill>
+            <a:srgbClr val="FFFFFF"/>
+          </a:solidFill>
+          <a:ln>
+            <a:solidFill>
+              <a:srgbClr val="CDCDCD"/>
+            </a:solidFill>
+          </a:ln>
+        </p:spPr>
+        <p:style>
+          <a:lnRef idx="1">
+            <a:schemeClr val="accent1"/>
+          </a:lnRef>
+          <a:fillRef idx="3">
+            <a:schemeClr val="accent1"/>
+          </a:fillRef>
+          <a:effectRef idx="2">
+            <a:schemeClr val="accent1"/>
+          </a:effectRef>
+          <a:fontRef idx="minor">
+            <a:schemeClr val="lt1"/>
+          </a:fontRef>
+        </p:style>
+        <p:txBody>
+          <a:bodyPr rtlCol="0" anchor="ctr"/>
+          <a:lstStyle/>
+          <a:p>
+            <a:pPr algn="ctr">
+              <a:defRPr sz="1300" b="0">
+                <a:solidFill>
+                  <a:srgbClr val="2B2B2B"/>
+                </a:solidFill>
+              </a:defRPr>
+            </a:pPr>
+            <a:r>
+              <a:t>None, 3, 5, 10, 15, 20, 30</a:t>
+            </a:r>
+          </a:p>
+        </p:txBody>
+      </p:sp>
+      <p:sp>
+        <p:nvSpPr>
+          <p:cNvPr id="27" name="Rectangle 26"/>
+          <p:cNvSpPr/>
+          <p:nvPr/>
+        </p:nvSpPr>
+        <p:spPr>
+          <a:xfrm>
+            <a:off x="3611880" y="3200400"/>
+            <a:ext cx="2103120" cy="502920"/>
+          </a:xfrm>
+          <a:prstGeom prst="rect">
+            <a:avLst/>
+          </a:prstGeom>
+          <a:solidFill>
+            <a:srgbClr val="EBEEF2"/>
+          </a:solidFill>
+          <a:ln>
+            <a:solidFill>
+              <a:srgbClr val="CDCDCD"/>
+            </a:solidFill>
+          </a:ln>
+        </p:spPr>
+        <p:style>
+          <a:lnRef idx="1">
+            <a:schemeClr val="accent1"/>
+          </a:lnRef>
+          <a:fillRef idx="3">
+            <a:schemeClr val="accent1"/>
+          </a:fillRef>
+          <a:effectRef idx="2">
+            <a:schemeClr val="accent1"/>
+          </a:effectRef>
+          <a:fontRef idx="minor">
+            <a:schemeClr val="lt1"/>
+          </a:fontRef>
+        </p:style>
+        <p:txBody>
+          <a:bodyPr rtlCol="0" anchor="ctr"/>
+          <a:lstStyle/>
+          <a:p>
+            <a:pPr algn="ctr">
+              <a:defRPr sz="1300" b="0">
+                <a:solidFill>
+                  <a:srgbClr val="2B2B2B"/>
+                </a:solidFill>
+              </a:defRPr>
+            </a:pPr>
+            <a:r>
+              <a:t>min_samples_split</a:t>
+            </a:r>
+          </a:p>
+        </p:txBody>
+      </p:sp>
+      <p:sp>
+        <p:nvSpPr>
+          <p:cNvPr id="28" name="Rectangle 27"/>
+          <p:cNvSpPr/>
+          <p:nvPr/>
+        </p:nvSpPr>
+        <p:spPr>
+          <a:xfrm>
+            <a:off x="5715000" y="3200400"/>
+            <a:ext cx="4023360" cy="502920"/>
+          </a:xfrm>
+          <a:prstGeom prst="rect">
+            <a:avLst/>
+          </a:prstGeom>
+          <a:solidFill>
+            <a:srgbClr val="EBEEF2"/>
+          </a:solidFill>
+          <a:ln>
+            <a:solidFill>
+              <a:srgbClr val="CDCDCD"/>
+            </a:solidFill>
+          </a:ln>
+        </p:spPr>
+        <p:style>
+          <a:lnRef idx="1">
+            <a:schemeClr val="accent1"/>
+          </a:lnRef>
+          <a:fillRef idx="3">
+            <a:schemeClr val="accent1"/>
+          </a:fillRef>
+          <a:effectRef idx="2">
+            <a:schemeClr val="accent1"/>
+          </a:effectRef>
+          <a:fontRef idx="minor">
+            <a:schemeClr val="lt1"/>
+          </a:fontRef>
+        </p:style>
+        <p:txBody>
+          <a:bodyPr rtlCol="0" anchor="ctr"/>
+          <a:lstStyle/>
+          <a:p>
+            <a:pPr algn="ctr">
+              <a:defRPr sz="1300" b="0">
+                <a:solidFill>
+                  <a:srgbClr val="2B2B2B"/>
+                </a:solidFill>
+              </a:defRPr>
+            </a:pPr>
+            <a:r>
+              <a:t>2, 4, 6, 10, 15, 20</a:t>
+            </a:r>
+          </a:p>
+        </p:txBody>
+      </p:sp>
+      <p:sp>
+        <p:nvSpPr>
+          <p:cNvPr id="29" name="Rectangle 28"/>
+          <p:cNvSpPr/>
+          <p:nvPr/>
+        </p:nvSpPr>
+        <p:spPr>
+          <a:xfrm>
+            <a:off x="3611880" y="3703320"/>
+            <a:ext cx="2103120" cy="502920"/>
+          </a:xfrm>
+          <a:prstGeom prst="rect">
+            <a:avLst/>
+          </a:prstGeom>
+          <a:solidFill>
+            <a:srgbClr val="FFFFFF"/>
+          </a:solidFill>
+          <a:ln>
+            <a:solidFill>
+              <a:srgbClr val="CDCDCD"/>
+            </a:solidFill>
+          </a:ln>
+        </p:spPr>
+        <p:style>
+          <a:lnRef idx="1">
+            <a:schemeClr val="accent1"/>
+          </a:lnRef>
+          <a:fillRef idx="3">
+            <a:schemeClr val="accent1"/>
+          </a:fillRef>
+          <a:effectRef idx="2">
+            <a:schemeClr val="accent1"/>
+          </a:effectRef>
+          <a:fontRef idx="minor">
+            <a:schemeClr val="lt1"/>
+          </a:fontRef>
+        </p:style>
+        <p:txBody>
+          <a:bodyPr rtlCol="0" anchor="ctr"/>
+          <a:lstStyle/>
+          <a:p>
+            <a:pPr algn="ctr">
+              <a:defRPr sz="1300" b="0">
+                <a:solidFill>
+                  <a:srgbClr val="2B2B2B"/>
+                </a:solidFill>
+              </a:defRPr>
+            </a:pPr>
+            <a:r>
+              <a:t>min_samples_leaf</a:t>
+            </a:r>
+          </a:p>
+        </p:txBody>
+      </p:sp>
+      <p:sp>
+        <p:nvSpPr>
+          <p:cNvPr id="30" name="Rectangle 29"/>
+          <p:cNvSpPr/>
+          <p:nvPr/>
+        </p:nvSpPr>
+        <p:spPr>
+          <a:xfrm>
+            <a:off x="5715000" y="3703320"/>
+            <a:ext cx="4023360" cy="502920"/>
+          </a:xfrm>
+          <a:prstGeom prst="rect">
+            <a:avLst/>
+          </a:prstGeom>
+          <a:solidFill>
+            <a:srgbClr val="FFFFFF"/>
+          </a:solidFill>
+          <a:ln>
+            <a:solidFill>
+              <a:srgbClr val="CDCDCD"/>
+            </a:solidFill>
+          </a:ln>
+        </p:spPr>
+        <p:style>
+          <a:lnRef idx="1">
+            <a:schemeClr val="accent1"/>
+          </a:lnRef>
+          <a:fillRef idx="3">
+            <a:schemeClr val="accent1"/>
+          </a:fillRef>
+          <a:effectRef idx="2">
+            <a:schemeClr val="accent1"/>
+          </a:effectRef>
+          <a:fontRef idx="minor">
+            <a:schemeClr val="lt1"/>
+          </a:fontRef>
+        </p:style>
+        <p:txBody>
+          <a:bodyPr rtlCol="0" anchor="ctr"/>
+          <a:lstStyle/>
+          <a:p>
+            <a:pPr algn="ctr">
+              <a:defRPr sz="1300" b="0">
+                <a:solidFill>
+                  <a:srgbClr val="2B2B2B"/>
+                </a:solidFill>
+              </a:defRPr>
+            </a:pPr>
+            <a:r>
+              <a:t>1, 2, 3, 5, 7, 10</a:t>
+            </a:r>
+          </a:p>
+        </p:txBody>
+      </p:sp>
+      <p:sp>
+        <p:nvSpPr>
+          <p:cNvPr id="31" name="Rounded Rectangle 30"/>
+          <p:cNvSpPr/>
+          <p:nvPr/>
+        </p:nvSpPr>
+        <p:spPr>
+          <a:xfrm>
+            <a:off x="3611880" y="4434840"/>
+            <a:ext cx="7726679" cy="822960"/>
+          </a:xfrm>
+          <a:prstGeom prst="roundRect">
+            <a:avLst/>
+          </a:prstGeom>
+          <a:solidFill>
+            <a:srgbClr val="FFFFFF"/>
+          </a:solidFill>
+          <a:ln>
+            <a:solidFill>
+              <a:srgbClr val="EBEEF2"/>
+            </a:solidFill>
+          </a:ln>
+        </p:spPr>
+        <p:style>
+          <a:lnRef idx="1">
+            <a:schemeClr val="accent1"/>
+          </a:lnRef>
+          <a:fillRef idx="3">
+            <a:schemeClr val="accent1"/>
+          </a:fillRef>
+          <a:effectRef idx="2">
+            <a:schemeClr val="accent1"/>
+          </a:effectRef>
+          <a:fontRef idx="minor">
+            <a:schemeClr val="lt1"/>
+          </a:fontRef>
+        </p:style>
+        <p:txBody>
+          <a:bodyPr rtlCol="0" anchor="ctr"/>
+          <a:lstStyle/>
+          <a:p>
+            <a:pPr algn="ctr"/>
+          </a:p>
+        </p:txBody>
+      </p:sp>
+      <p:sp>
+        <p:nvSpPr>
+          <p:cNvPr id="32" name="Rectangle 31"/>
+          <p:cNvSpPr/>
+          <p:nvPr/>
+        </p:nvSpPr>
+        <p:spPr>
+          <a:xfrm>
+            <a:off x="3611880" y="4434840"/>
+            <a:ext cx="109728" cy="822960"/>
+          </a:xfrm>
+          <a:prstGeom prst="rect">
+            <a:avLst/>
+          </a:prstGeom>
+          <a:solidFill>
+            <a:srgbClr val="2C5D86"/>
+          </a:solidFill>
+          <a:ln>
+            <a:noFill/>
+          </a:ln>
+        </p:spPr>
+        <p:style>
+          <a:lnRef idx="1">
+            <a:schemeClr val="accent1"/>
+          </a:lnRef>
+          <a:fillRef idx="3">
+            <a:schemeClr val="accent1"/>
+          </a:fillRef>
+          <a:effectRef idx="2">
+            <a:schemeClr val="accent1"/>
+          </a:effectRef>
+          <a:fontRef idx="minor">
+            <a:schemeClr val="lt1"/>
+          </a:fontRef>
+        </p:style>
+        <p:txBody>
+          <a:bodyPr rtlCol="0" anchor="ctr"/>
+          <a:lstStyle/>
+          <a:p>
+            <a:pPr algn="ctr"/>
+          </a:p>
+        </p:txBody>
+      </p:sp>
+      <p:sp>
+        <p:nvSpPr>
+          <p:cNvPr id="33" name="TextBox 32"/>
+          <p:cNvSpPr txBox="1"/>
+          <p:nvPr/>
+        </p:nvSpPr>
+        <p:spPr>
+          <a:xfrm>
+            <a:off x="3776472" y="4507992"/>
+            <a:ext cx="7498079" cy="228600"/>
+          </a:xfrm>
+          <a:prstGeom prst="rect">
+            <a:avLst/>
+          </a:prstGeom>
+          <a:noFill/>
+          <a:ln>
+            <a:noFill/>
+          </a:ln>
+        </p:spPr>
+        <p:txBody>
+          <a:bodyPr wrap="square" lIns="45720" rIns="45720">
+            <a:spAutoFit/>
+          </a:bodyPr>
+          <a:lstStyle/>
+          <a:p>
+            <a:pPr algn="l">
+              <a:defRPr sz="1600" b="1">
+                <a:solidFill>
+                  <a:srgbClr val="2B2B2B"/>
+                </a:solidFill>
+              </a:defRPr>
+            </a:pPr>
+            <a:r>
+              <a:t>Ràng buộc &amp; điều kiện dừng</a:t>
+            </a:r>
+          </a:p>
+        </p:txBody>
+      </p:sp>
+      <p:sp>
+        <p:nvSpPr>
+          <p:cNvPr id="34" name="TextBox 33"/>
+          <p:cNvSpPr txBox="1"/>
+          <p:nvPr/>
+        </p:nvSpPr>
+        <p:spPr>
+          <a:xfrm>
+            <a:off x="3776472" y="4773168"/>
+            <a:ext cx="7470647" cy="438912"/>
+          </a:xfrm>
+          <a:prstGeom prst="rect">
+            <a:avLst/>
+          </a:prstGeom>
+          <a:noFill/>
+          <a:ln>
+            <a:noFill/>
+          </a:ln>
+        </p:spPr>
+        <p:txBody>
+          <a:bodyPr wrap="square" lIns="45720" rIns="45720">
+            <a:spAutoFit/>
+          </a:bodyPr>
+          <a:lstStyle/>
+          <a:p>
+            <a:pPr algn="l">
+              <a:defRPr sz="1300" b="0">
+                <a:solidFill>
+                  <a:srgbClr val="5A5A5A"/>
+                </a:solidFill>
+              </a:defRPr>
+            </a:pPr>
+            <a:r>
+              <a:t>x ∈ Ω, test set không tham gia tuning, dùng cùng split/folds/metric/seed và dừng sau 30 trials.</a:t>
             </a:r>
           </a:p>
         </p:txBody>
@@ -3445,14 +5032,6 @@
 <file path=ppt/slides/slide3.xml><?xml version="1.0" encoding="utf-8"?>
 <p:sld xmlns:a="http://schemas.openxmlformats.org/drawingml/2006/main" xmlns:p="http://schemas.openxmlformats.org/presentationml/2006/main" xmlns:r="http://schemas.openxmlformats.org/officeDocument/2006/relationships">
   <p:cSld>
-    <p:bg>
-      <p:bgPr>
-        <a:solidFill>
-          <a:srgbClr val="F7FAFC"/>
-        </a:solidFill>
-        <a:effectLst/>
-      </p:bgPr>
-    </p:bg>
     <p:spTree>
       <p:nvGrpSpPr>
         <p:cNvPr id="1" name=""/>
@@ -3462,14 +5041,176 @@
       <p:grpSpPr/>
       <p:sp>
         <p:nvSpPr>
-          <p:cNvPr id="2" name="TextBox 1"/>
+          <p:cNvPr id="2" name="Rectangle 1"/>
+          <p:cNvSpPr/>
+          <p:nvPr/>
+        </p:nvSpPr>
+        <p:spPr>
+          <a:xfrm>
+            <a:off x="0" y="0"/>
+            <a:ext cx="12191695" cy="6858000"/>
+          </a:xfrm>
+          <a:prstGeom prst="rect">
+            <a:avLst/>
+          </a:prstGeom>
+          <a:solidFill>
+            <a:srgbClr val="FFFFFF"/>
+          </a:solidFill>
+          <a:ln>
+            <a:noFill/>
+          </a:ln>
+        </p:spPr>
+        <p:style>
+          <a:lnRef idx="1">
+            <a:schemeClr val="accent1"/>
+          </a:lnRef>
+          <a:fillRef idx="3">
+            <a:schemeClr val="accent1"/>
+          </a:fillRef>
+          <a:effectRef idx="2">
+            <a:schemeClr val="accent1"/>
+          </a:effectRef>
+          <a:fontRef idx="minor">
+            <a:schemeClr val="lt1"/>
+          </a:fontRef>
+        </p:style>
+        <p:txBody>
+          <a:bodyPr rtlCol="0" anchor="ctr"/>
+          <a:lstStyle/>
+          <a:p>
+            <a:pPr algn="ctr"/>
+          </a:p>
+        </p:txBody>
+      </p:sp>
+      <p:sp>
+        <p:nvSpPr>
+          <p:cNvPr id="3" name="Rectangle 2"/>
+          <p:cNvSpPr/>
+          <p:nvPr/>
+        </p:nvSpPr>
+        <p:spPr>
+          <a:xfrm>
+            <a:off x="0" y="0"/>
+            <a:ext cx="12191695" cy="320040"/>
+          </a:xfrm>
+          <a:prstGeom prst="rect">
+            <a:avLst/>
+          </a:prstGeom>
+          <a:solidFill>
+            <a:srgbClr val="B1192A"/>
+          </a:solidFill>
+          <a:ln>
+            <a:noFill/>
+          </a:ln>
+        </p:spPr>
+        <p:style>
+          <a:lnRef idx="1">
+            <a:schemeClr val="accent1"/>
+          </a:lnRef>
+          <a:fillRef idx="3">
+            <a:schemeClr val="accent1"/>
+          </a:fillRef>
+          <a:effectRef idx="2">
+            <a:schemeClr val="accent1"/>
+          </a:effectRef>
+          <a:fontRef idx="minor">
+            <a:schemeClr val="lt1"/>
+          </a:fontRef>
+        </p:style>
+        <p:txBody>
+          <a:bodyPr rtlCol="0" anchor="ctr"/>
+          <a:lstStyle/>
+          <a:p>
+            <a:pPr algn="ctr"/>
+          </a:p>
+        </p:txBody>
+      </p:sp>
+      <p:pic>
+        <p:nvPicPr>
+          <p:cNvPr id="4" name="Picture 3" descr="image1.png"/>
+          <p:cNvPicPr>
+            <a:picLocks noChangeAspect="1"/>
+          </p:cNvPicPr>
+          <p:nvPr/>
+        </p:nvPicPr>
+        <p:blipFill>
+          <a:blip r:embed="rId2"/>
+          <a:stretch>
+            <a:fillRect/>
+          </a:stretch>
+        </p:blipFill>
+        <p:spPr>
+          <a:xfrm>
+            <a:off x="228600" y="411480"/>
+            <a:ext cx="384048" cy="457200"/>
+          </a:xfrm>
+          <a:prstGeom prst="rect">
+            <a:avLst/>
+          </a:prstGeom>
+        </p:spPr>
+      </p:pic>
+      <p:sp>
+        <p:nvSpPr>
+          <p:cNvPr id="5" name="Rectangle 4"/>
+          <p:cNvSpPr/>
+          <p:nvPr/>
+        </p:nvSpPr>
+        <p:spPr>
+          <a:xfrm>
+            <a:off x="0" y="6537960"/>
+            <a:ext cx="12191695" cy="320040"/>
+          </a:xfrm>
+          <a:prstGeom prst="rect">
+            <a:avLst/>
+          </a:prstGeom>
+          <a:solidFill>
+            <a:srgbClr val="B1192A"/>
+          </a:solidFill>
+          <a:ln>
+            <a:noFill/>
+          </a:ln>
+        </p:spPr>
+        <p:style>
+          <a:lnRef idx="1">
+            <a:schemeClr val="accent1"/>
+          </a:lnRef>
+          <a:fillRef idx="3">
+            <a:schemeClr val="accent1"/>
+          </a:fillRef>
+          <a:effectRef idx="2">
+            <a:schemeClr val="accent1"/>
+          </a:effectRef>
+          <a:fontRef idx="minor">
+            <a:schemeClr val="lt1"/>
+          </a:fontRef>
+        </p:style>
+        <p:txBody>
+          <a:bodyPr rtlCol="0" anchor="ctr"/>
+          <a:lstStyle/>
+          <a:p>
+            <a:pPr algn="ctr">
+              <a:defRPr sz="1200">
+                <a:solidFill>
+                  <a:srgbClr val="FFFFFF"/>
+                </a:solidFill>
+              </a:defRPr>
+            </a:pPr>
+            <a:r>
+              <a:t>Nhập môn Tối ưu hóa  •  Bài tập lớn cá nhân  •  Phạm Phú Vĩnh</a:t>
+            </a:r>
+          </a:p>
+        </p:txBody>
+      </p:sp>
+      <p:sp>
+        <p:nvSpPr>
+          <p:cNvPr id="6" name="TextBox 5"/>
           <p:cNvSpPr txBox="1"/>
           <p:nvPr/>
         </p:nvSpPr>
         <p:spPr>
           <a:xfrm>
-            <a:off x="548640" y="347472"/>
-            <a:ext cx="11247120" cy="640080"/>
+            <a:off x="822960" y="502920"/>
+            <a:ext cx="8686800" cy="502920"/>
           </a:xfrm>
           <a:prstGeom prst="rect">
             <a:avLst/>
@@ -3483,111 +5224,28 @@
           <a:lstStyle/>
           <a:p>
             <a:pPr>
-              <a:defRPr sz="3000" b="1">
-                <a:solidFill>
-                  <a:srgbClr val="0E5C67"/>
+              <a:defRPr sz="2400" b="1">
+                <a:solidFill>
+                  <a:srgbClr val="2B2B2B"/>
                 </a:solidFill>
               </a:defRPr>
             </a:pPr>
             <a:r>
-              <a:t>Dữ liệu &amp; thiết kế thực nghiệm</a:t>
-            </a:r>
-          </a:p>
-        </p:txBody>
-      </p:sp>
-      <p:sp>
-        <p:nvSpPr>
-          <p:cNvPr id="3" name="TextBox 2"/>
+              <a:t>2. Dữ liệu &amp; thiết kế thực nghiệm</a:t>
+            </a:r>
+          </a:p>
+        </p:txBody>
+      </p:sp>
+      <p:sp>
+        <p:nvSpPr>
+          <p:cNvPr id="7" name="TextBox 6"/>
           <p:cNvSpPr txBox="1"/>
           <p:nvPr/>
         </p:nvSpPr>
         <p:spPr>
           <a:xfrm>
-            <a:off x="731520" y="1234440"/>
-            <a:ext cx="10789920" cy="5120640"/>
-          </a:xfrm>
-          <a:prstGeom prst="rect">
-            <a:avLst/>
-          </a:prstGeom>
-          <a:noFill/>
-        </p:spPr>
-        <p:txBody>
-          <a:bodyPr wrap="square">
-            <a:spAutoFit/>
-          </a:bodyPr>
-          <a:lstStyle/>
-          <a:p>
-            <a:pPr>
-              <a:spcAft>
-                <a:spcPts val="1900"/>
-              </a:spcAft>
-              <a:defRPr sz="2200">
-                <a:solidFill>
-                  <a:srgbClr val="253744"/>
-                </a:solidFill>
-              </a:defRPr>
-            </a:pPr>
-            <a:r>
-              <a:t>569 mẫu, 30 đặc trưng, 2 lớp</a:t>
-            </a:r>
-          </a:p>
-          <a:p>
-            <a:pPr>
-              <a:spcAft>
-                <a:spcPts val="1900"/>
-              </a:spcAft>
-              <a:defRPr sz="2200">
-                <a:solidFill>
-                  <a:srgbClr val="253744"/>
-                </a:solidFill>
-              </a:defRPr>
-            </a:pPr>
-            <a:r>
-              <a:t>Train/Test = 80/20, stratified, seed 42</a:t>
-            </a:r>
-          </a:p>
-          <a:p>
-            <a:pPr>
-              <a:spcAft>
-                <a:spcPts val="1900"/>
-              </a:spcAft>
-              <a:defRPr sz="2200">
-                <a:solidFill>
-                  <a:srgbClr val="253744"/>
-                </a:solidFill>
-              </a:defRPr>
-            </a:pPr>
-            <a:r>
-              <a:t>Giữ test set tách biệt khỏi tuning</a:t>
-            </a:r>
-          </a:p>
-          <a:p>
-            <a:pPr>
-              <a:spcAft>
-                <a:spcPts val="1900"/>
-              </a:spcAft>
-              <a:defRPr sz="2200">
-                <a:solidFill>
-                  <a:srgbClr val="253744"/>
-                </a:solidFill>
-              </a:defRPr>
-            </a:pPr>
-            <a:r>
-              <a:t>Baseline: Random Forest mặc định; Random Search: 30 trials</a:t>
-            </a:r>
-          </a:p>
-        </p:txBody>
-      </p:sp>
-      <p:sp>
-        <p:nvSpPr>
-          <p:cNvPr id="4" name="TextBox 3"/>
-          <p:cNvSpPr txBox="1"/>
-          <p:nvPr/>
-        </p:nvSpPr>
-        <p:spPr>
-          <a:xfrm>
-            <a:off x="548640" y="6464808"/>
-            <a:ext cx="11064240" cy="182880"/>
+            <a:off x="868680" y="941832"/>
+            <a:ext cx="8686800" cy="274320"/>
           </a:xfrm>
           <a:prstGeom prst="rect">
             <a:avLst/>
@@ -3601,14 +5259,1350 @@
           <a:lstStyle/>
           <a:p>
             <a:pPr>
-              <a:defRPr sz="900">
-                <a:solidFill>
-                  <a:srgbClr val="647378"/>
+              <a:defRPr sz="1100">
+                <a:solidFill>
+                  <a:srgbClr val="5A5A5A"/>
                 </a:solidFill>
               </a:defRPr>
             </a:pPr>
             <a:r>
-              <a:t>Nhập môn Tối ưu hóa  •  GitHub Portfolio  •  Kết quả từ Python logs</a:t>
+              <a:t>Thiết lập dữ liệu, cách chia tập và tiêu chí đánh giá</a:t>
+            </a:r>
+          </a:p>
+        </p:txBody>
+      </p:sp>
+      <p:sp>
+        <p:nvSpPr>
+          <p:cNvPr id="8" name="Rounded Rectangle 7"/>
+          <p:cNvSpPr/>
+          <p:nvPr/>
+        </p:nvSpPr>
+        <p:spPr>
+          <a:xfrm>
+            <a:off x="548640" y="1325880"/>
+            <a:ext cx="3017520" cy="2011680"/>
+          </a:xfrm>
+          <a:prstGeom prst="roundRect">
+            <a:avLst/>
+          </a:prstGeom>
+          <a:solidFill>
+            <a:srgbClr val="FFFFFF"/>
+          </a:solidFill>
+          <a:ln>
+            <a:solidFill>
+              <a:srgbClr val="EBEEF2"/>
+            </a:solidFill>
+          </a:ln>
+        </p:spPr>
+        <p:style>
+          <a:lnRef idx="1">
+            <a:schemeClr val="accent1"/>
+          </a:lnRef>
+          <a:fillRef idx="3">
+            <a:schemeClr val="accent1"/>
+          </a:fillRef>
+          <a:effectRef idx="2">
+            <a:schemeClr val="accent1"/>
+          </a:effectRef>
+          <a:fontRef idx="minor">
+            <a:schemeClr val="lt1"/>
+          </a:fontRef>
+        </p:style>
+        <p:txBody>
+          <a:bodyPr rtlCol="0" anchor="ctr"/>
+          <a:lstStyle/>
+          <a:p>
+            <a:pPr algn="ctr"/>
+          </a:p>
+        </p:txBody>
+      </p:sp>
+      <p:sp>
+        <p:nvSpPr>
+          <p:cNvPr id="9" name="Rectangle 8"/>
+          <p:cNvSpPr/>
+          <p:nvPr/>
+        </p:nvSpPr>
+        <p:spPr>
+          <a:xfrm>
+            <a:off x="548640" y="1325880"/>
+            <a:ext cx="109728" cy="2011680"/>
+          </a:xfrm>
+          <a:prstGeom prst="rect">
+            <a:avLst/>
+          </a:prstGeom>
+          <a:solidFill>
+            <a:srgbClr val="B1192A"/>
+          </a:solidFill>
+          <a:ln>
+            <a:noFill/>
+          </a:ln>
+        </p:spPr>
+        <p:style>
+          <a:lnRef idx="1">
+            <a:schemeClr val="accent1"/>
+          </a:lnRef>
+          <a:fillRef idx="3">
+            <a:schemeClr val="accent1"/>
+          </a:fillRef>
+          <a:effectRef idx="2">
+            <a:schemeClr val="accent1"/>
+          </a:effectRef>
+          <a:fontRef idx="minor">
+            <a:schemeClr val="lt1"/>
+          </a:fontRef>
+        </p:style>
+        <p:txBody>
+          <a:bodyPr rtlCol="0" anchor="ctr"/>
+          <a:lstStyle/>
+          <a:p>
+            <a:pPr algn="ctr"/>
+          </a:p>
+        </p:txBody>
+      </p:sp>
+      <p:sp>
+        <p:nvSpPr>
+          <p:cNvPr id="10" name="TextBox 9"/>
+          <p:cNvSpPr txBox="1"/>
+          <p:nvPr/>
+        </p:nvSpPr>
+        <p:spPr>
+          <a:xfrm>
+            <a:off x="713232" y="1399032"/>
+            <a:ext cx="2788920" cy="228600"/>
+          </a:xfrm>
+          <a:prstGeom prst="rect">
+            <a:avLst/>
+          </a:prstGeom>
+          <a:noFill/>
+          <a:ln>
+            <a:noFill/>
+          </a:ln>
+        </p:spPr>
+        <p:txBody>
+          <a:bodyPr wrap="square" lIns="45720" rIns="45720">
+            <a:spAutoFit/>
+          </a:bodyPr>
+          <a:lstStyle/>
+          <a:p>
+            <a:pPr algn="l">
+              <a:defRPr sz="1600" b="1">
+                <a:solidFill>
+                  <a:srgbClr val="2B2B2B"/>
+                </a:solidFill>
+              </a:defRPr>
+            </a:pPr>
+            <a:r>
+              <a:t>Bộ dữ liệu</a:t>
+            </a:r>
+          </a:p>
+        </p:txBody>
+      </p:sp>
+      <p:sp>
+        <p:nvSpPr>
+          <p:cNvPr id="11" name="TextBox 10"/>
+          <p:cNvSpPr txBox="1"/>
+          <p:nvPr/>
+        </p:nvSpPr>
+        <p:spPr>
+          <a:xfrm>
+            <a:off x="713232" y="1664208"/>
+            <a:ext cx="2761488" cy="1627632"/>
+          </a:xfrm>
+          <a:prstGeom prst="rect">
+            <a:avLst/>
+          </a:prstGeom>
+          <a:noFill/>
+          <a:ln>
+            <a:noFill/>
+          </a:ln>
+        </p:spPr>
+        <p:txBody>
+          <a:bodyPr wrap="square" lIns="45720" rIns="45720">
+            <a:spAutoFit/>
+          </a:bodyPr>
+          <a:lstStyle/>
+          <a:p>
+            <a:pPr algn="l">
+              <a:defRPr sz="1300" b="0">
+                <a:solidFill>
+                  <a:srgbClr val="5A5A5A"/>
+                </a:solidFill>
+              </a:defRPr>
+            </a:pPr>
+            <a:r>
+              <a:t>Breast Cancer Wisconsin</a:t>
+            </a:r>
+            <a:br/>
+            <a:r>
+              <a:t>(Diagnostic)</a:t>
+            </a:r>
+            <a:br/>
+            <a:br/>
+            <a:r>
+              <a:t>• 569 mẫu</a:t>
+            </a:r>
+            <a:br/>
+            <a:r>
+              <a:t>• 30 đặc trưng số</a:t>
+            </a:r>
+            <a:br/>
+            <a:r>
+              <a:t>• 2 lớp phân loại</a:t>
+            </a:r>
+          </a:p>
+        </p:txBody>
+      </p:sp>
+      <p:sp>
+        <p:nvSpPr>
+          <p:cNvPr id="12" name="Rounded Rectangle 11"/>
+          <p:cNvSpPr/>
+          <p:nvPr/>
+        </p:nvSpPr>
+        <p:spPr>
+          <a:xfrm>
+            <a:off x="548640" y="3566160"/>
+            <a:ext cx="3017520" cy="1554480"/>
+          </a:xfrm>
+          <a:prstGeom prst="roundRect">
+            <a:avLst/>
+          </a:prstGeom>
+          <a:solidFill>
+            <a:srgbClr val="FFFFFF"/>
+          </a:solidFill>
+          <a:ln>
+            <a:solidFill>
+              <a:srgbClr val="EBEEF2"/>
+            </a:solidFill>
+          </a:ln>
+        </p:spPr>
+        <p:style>
+          <a:lnRef idx="1">
+            <a:schemeClr val="accent1"/>
+          </a:lnRef>
+          <a:fillRef idx="3">
+            <a:schemeClr val="accent1"/>
+          </a:fillRef>
+          <a:effectRef idx="2">
+            <a:schemeClr val="accent1"/>
+          </a:effectRef>
+          <a:fontRef idx="minor">
+            <a:schemeClr val="lt1"/>
+          </a:fontRef>
+        </p:style>
+        <p:txBody>
+          <a:bodyPr rtlCol="0" anchor="ctr"/>
+          <a:lstStyle/>
+          <a:p>
+            <a:pPr algn="ctr"/>
+          </a:p>
+        </p:txBody>
+      </p:sp>
+      <p:sp>
+        <p:nvSpPr>
+          <p:cNvPr id="13" name="Rectangle 12"/>
+          <p:cNvSpPr/>
+          <p:nvPr/>
+        </p:nvSpPr>
+        <p:spPr>
+          <a:xfrm>
+            <a:off x="548640" y="3566160"/>
+            <a:ext cx="109728" cy="1554480"/>
+          </a:xfrm>
+          <a:prstGeom prst="rect">
+            <a:avLst/>
+          </a:prstGeom>
+          <a:solidFill>
+            <a:srgbClr val="3A8A5E"/>
+          </a:solidFill>
+          <a:ln>
+            <a:noFill/>
+          </a:ln>
+        </p:spPr>
+        <p:style>
+          <a:lnRef idx="1">
+            <a:schemeClr val="accent1"/>
+          </a:lnRef>
+          <a:fillRef idx="3">
+            <a:schemeClr val="accent1"/>
+          </a:fillRef>
+          <a:effectRef idx="2">
+            <a:schemeClr val="accent1"/>
+          </a:effectRef>
+          <a:fontRef idx="minor">
+            <a:schemeClr val="lt1"/>
+          </a:fontRef>
+        </p:style>
+        <p:txBody>
+          <a:bodyPr rtlCol="0" anchor="ctr"/>
+          <a:lstStyle/>
+          <a:p>
+            <a:pPr algn="ctr"/>
+          </a:p>
+        </p:txBody>
+      </p:sp>
+      <p:sp>
+        <p:nvSpPr>
+          <p:cNvPr id="14" name="TextBox 13"/>
+          <p:cNvSpPr txBox="1"/>
+          <p:nvPr/>
+        </p:nvSpPr>
+        <p:spPr>
+          <a:xfrm>
+            <a:off x="713232" y="3639312"/>
+            <a:ext cx="2788920" cy="228600"/>
+          </a:xfrm>
+          <a:prstGeom prst="rect">
+            <a:avLst/>
+          </a:prstGeom>
+          <a:noFill/>
+          <a:ln>
+            <a:noFill/>
+          </a:ln>
+        </p:spPr>
+        <p:txBody>
+          <a:bodyPr wrap="square" lIns="45720" rIns="45720">
+            <a:spAutoFit/>
+          </a:bodyPr>
+          <a:lstStyle/>
+          <a:p>
+            <a:pPr algn="l">
+              <a:defRPr sz="1600" b="1">
+                <a:solidFill>
+                  <a:srgbClr val="2B2B2B"/>
+                </a:solidFill>
+              </a:defRPr>
+            </a:pPr>
+            <a:r>
+              <a:t>Metric đánh giá</a:t>
+            </a:r>
+          </a:p>
+        </p:txBody>
+      </p:sp>
+      <p:sp>
+        <p:nvSpPr>
+          <p:cNvPr id="15" name="TextBox 14"/>
+          <p:cNvSpPr txBox="1"/>
+          <p:nvPr/>
+        </p:nvSpPr>
+        <p:spPr>
+          <a:xfrm>
+            <a:off x="713232" y="3904488"/>
+            <a:ext cx="2761488" cy="1170432"/>
+          </a:xfrm>
+          <a:prstGeom prst="rect">
+            <a:avLst/>
+          </a:prstGeom>
+          <a:noFill/>
+          <a:ln>
+            <a:noFill/>
+          </a:ln>
+        </p:spPr>
+        <p:txBody>
+          <a:bodyPr wrap="square" lIns="45720" rIns="45720">
+            <a:spAutoFit/>
+          </a:bodyPr>
+          <a:lstStyle/>
+          <a:p>
+            <a:pPr algn="l">
+              <a:defRPr sz="1300" b="0">
+                <a:solidFill>
+                  <a:srgbClr val="5A5A5A"/>
+                </a:solidFill>
+              </a:defRPr>
+            </a:pPr>
+            <a:r>
+              <a:t>• CV Macro-F1 (chính)</a:t>
+            </a:r>
+            <a:br/>
+            <a:r>
+              <a:t>• Test Macro-F1</a:t>
+            </a:r>
+            <a:br/>
+            <a:r>
+              <a:t>• Test Accuracy</a:t>
+            </a:r>
+            <a:br/>
+            <a:r>
+              <a:t>• Runtime và độ lệch chuẩn</a:t>
+            </a:r>
+          </a:p>
+        </p:txBody>
+      </p:sp>
+      <p:sp>
+        <p:nvSpPr>
+          <p:cNvPr id="16" name="TextBox 15"/>
+          <p:cNvSpPr txBox="1"/>
+          <p:nvPr/>
+        </p:nvSpPr>
+        <p:spPr>
+          <a:xfrm>
+            <a:off x="3840480" y="1325880"/>
+            <a:ext cx="7498079" cy="274320"/>
+          </a:xfrm>
+          <a:prstGeom prst="rect">
+            <a:avLst/>
+          </a:prstGeom>
+          <a:noFill/>
+          <a:ln>
+            <a:noFill/>
+          </a:ln>
+        </p:spPr>
+        <p:txBody>
+          <a:bodyPr wrap="square" lIns="45720" rIns="45720">
+            <a:spAutoFit/>
+          </a:bodyPr>
+          <a:lstStyle/>
+          <a:p>
+            <a:pPr algn="l">
+              <a:defRPr sz="1800" b="1">
+                <a:solidFill>
+                  <a:srgbClr val="2B2B2B"/>
+                </a:solidFill>
+              </a:defRPr>
+            </a:pPr>
+            <a:r>
+              <a:t>Quy trình thực nghiệm</a:t>
+            </a:r>
+          </a:p>
+        </p:txBody>
+      </p:sp>
+      <p:sp>
+        <p:nvSpPr>
+          <p:cNvPr id="17" name="Rounded Rectangle 16"/>
+          <p:cNvSpPr/>
+          <p:nvPr/>
+        </p:nvSpPr>
+        <p:spPr>
+          <a:xfrm>
+            <a:off x="3840480" y="1783080"/>
+            <a:ext cx="2240280" cy="822960"/>
+          </a:xfrm>
+          <a:prstGeom prst="roundRect">
+            <a:avLst/>
+          </a:prstGeom>
+          <a:solidFill>
+            <a:srgbClr val="FFFFFF"/>
+          </a:solidFill>
+          <a:ln>
+            <a:solidFill>
+              <a:srgbClr val="EBEEF2"/>
+            </a:solidFill>
+          </a:ln>
+        </p:spPr>
+        <p:style>
+          <a:lnRef idx="1">
+            <a:schemeClr val="accent1"/>
+          </a:lnRef>
+          <a:fillRef idx="3">
+            <a:schemeClr val="accent1"/>
+          </a:fillRef>
+          <a:effectRef idx="2">
+            <a:schemeClr val="accent1"/>
+          </a:effectRef>
+          <a:fontRef idx="minor">
+            <a:schemeClr val="lt1"/>
+          </a:fontRef>
+        </p:style>
+        <p:txBody>
+          <a:bodyPr rtlCol="0" anchor="ctr"/>
+          <a:lstStyle/>
+          <a:p>
+            <a:pPr algn="ctr"/>
+          </a:p>
+        </p:txBody>
+      </p:sp>
+      <p:sp>
+        <p:nvSpPr>
+          <p:cNvPr id="18" name="TextBox 17"/>
+          <p:cNvSpPr txBox="1"/>
+          <p:nvPr/>
+        </p:nvSpPr>
+        <p:spPr>
+          <a:xfrm>
+            <a:off x="3913632" y="1856232"/>
+            <a:ext cx="2093976" cy="182880"/>
+          </a:xfrm>
+          <a:prstGeom prst="rect">
+            <a:avLst/>
+          </a:prstGeom>
+          <a:noFill/>
+          <a:ln>
+            <a:noFill/>
+          </a:ln>
+        </p:spPr>
+        <p:txBody>
+          <a:bodyPr wrap="square" lIns="45720" rIns="45720">
+            <a:spAutoFit/>
+          </a:bodyPr>
+          <a:lstStyle/>
+          <a:p>
+            <a:pPr algn="l">
+              <a:defRPr sz="1400" b="1">
+                <a:solidFill>
+                  <a:srgbClr val="B1192A"/>
+                </a:solidFill>
+              </a:defRPr>
+            </a:pPr>
+            <a:r>
+              <a:t>Train/Test Split</a:t>
+            </a:r>
+          </a:p>
+        </p:txBody>
+      </p:sp>
+      <p:sp>
+        <p:nvSpPr>
+          <p:cNvPr id="19" name="TextBox 18"/>
+          <p:cNvSpPr txBox="1"/>
+          <p:nvPr/>
+        </p:nvSpPr>
+        <p:spPr>
+          <a:xfrm>
+            <a:off x="3913632" y="2103120"/>
+            <a:ext cx="2093976" cy="365760"/>
+          </a:xfrm>
+          <a:prstGeom prst="rect">
+            <a:avLst/>
+          </a:prstGeom>
+          <a:noFill/>
+          <a:ln>
+            <a:noFill/>
+          </a:ln>
+        </p:spPr>
+        <p:txBody>
+          <a:bodyPr wrap="square" lIns="45720" rIns="45720">
+            <a:spAutoFit/>
+          </a:bodyPr>
+          <a:lstStyle/>
+          <a:p>
+            <a:pPr algn="l">
+              <a:defRPr sz="1100" b="0">
+                <a:solidFill>
+                  <a:srgbClr val="5A5A5A"/>
+                </a:solidFill>
+              </a:defRPr>
+            </a:pPr>
+            <a:r>
+              <a:t>80% / 20% stratified, random_state=42</a:t>
+            </a:r>
+          </a:p>
+        </p:txBody>
+      </p:sp>
+      <p:sp>
+        <p:nvSpPr>
+          <p:cNvPr id="20" name="Chevron 19"/>
+          <p:cNvSpPr/>
+          <p:nvPr/>
+        </p:nvSpPr>
+        <p:spPr>
+          <a:xfrm>
+            <a:off x="6126480" y="1984248"/>
+            <a:ext cx="320040" cy="411480"/>
+          </a:xfrm>
+          <a:prstGeom prst="chevron">
+            <a:avLst/>
+          </a:prstGeom>
+          <a:solidFill>
+            <a:srgbClr val="B1192A"/>
+          </a:solidFill>
+          <a:ln>
+            <a:noFill/>
+          </a:ln>
+        </p:spPr>
+        <p:style>
+          <a:lnRef idx="1">
+            <a:schemeClr val="accent1"/>
+          </a:lnRef>
+          <a:fillRef idx="3">
+            <a:schemeClr val="accent1"/>
+          </a:fillRef>
+          <a:effectRef idx="2">
+            <a:schemeClr val="accent1"/>
+          </a:effectRef>
+          <a:fontRef idx="minor">
+            <a:schemeClr val="lt1"/>
+          </a:fontRef>
+        </p:style>
+        <p:txBody>
+          <a:bodyPr rtlCol="0" anchor="ctr"/>
+          <a:lstStyle/>
+          <a:p>
+            <a:pPr algn="ctr"/>
+          </a:p>
+        </p:txBody>
+      </p:sp>
+      <p:sp>
+        <p:nvSpPr>
+          <p:cNvPr id="21" name="Rounded Rectangle 20"/>
+          <p:cNvSpPr/>
+          <p:nvPr/>
+        </p:nvSpPr>
+        <p:spPr>
+          <a:xfrm>
+            <a:off x="6583680" y="1783080"/>
+            <a:ext cx="2240280" cy="822960"/>
+          </a:xfrm>
+          <a:prstGeom prst="roundRect">
+            <a:avLst/>
+          </a:prstGeom>
+          <a:solidFill>
+            <a:srgbClr val="FFFFFF"/>
+          </a:solidFill>
+          <a:ln>
+            <a:solidFill>
+              <a:srgbClr val="EBEEF2"/>
+            </a:solidFill>
+          </a:ln>
+        </p:spPr>
+        <p:style>
+          <a:lnRef idx="1">
+            <a:schemeClr val="accent1"/>
+          </a:lnRef>
+          <a:fillRef idx="3">
+            <a:schemeClr val="accent1"/>
+          </a:fillRef>
+          <a:effectRef idx="2">
+            <a:schemeClr val="accent1"/>
+          </a:effectRef>
+          <a:fontRef idx="minor">
+            <a:schemeClr val="lt1"/>
+          </a:fontRef>
+        </p:style>
+        <p:txBody>
+          <a:bodyPr rtlCol="0" anchor="ctr"/>
+          <a:lstStyle/>
+          <a:p>
+            <a:pPr algn="ctr"/>
+          </a:p>
+        </p:txBody>
+      </p:sp>
+      <p:sp>
+        <p:nvSpPr>
+          <p:cNvPr id="22" name="TextBox 21"/>
+          <p:cNvSpPr txBox="1"/>
+          <p:nvPr/>
+        </p:nvSpPr>
+        <p:spPr>
+          <a:xfrm>
+            <a:off x="6656832" y="1856232"/>
+            <a:ext cx="2093976" cy="182880"/>
+          </a:xfrm>
+          <a:prstGeom prst="rect">
+            <a:avLst/>
+          </a:prstGeom>
+          <a:noFill/>
+          <a:ln>
+            <a:noFill/>
+          </a:ln>
+        </p:spPr>
+        <p:txBody>
+          <a:bodyPr wrap="square" lIns="45720" rIns="45720">
+            <a:spAutoFit/>
+          </a:bodyPr>
+          <a:lstStyle/>
+          <a:p>
+            <a:pPr algn="l">
+              <a:defRPr sz="1400" b="1">
+                <a:solidFill>
+                  <a:srgbClr val="B1192A"/>
+                </a:solidFill>
+              </a:defRPr>
+            </a:pPr>
+            <a:r>
+              <a:t>Baseline</a:t>
+            </a:r>
+          </a:p>
+        </p:txBody>
+      </p:sp>
+      <p:sp>
+        <p:nvSpPr>
+          <p:cNvPr id="23" name="TextBox 22"/>
+          <p:cNvSpPr txBox="1"/>
+          <p:nvPr/>
+        </p:nvSpPr>
+        <p:spPr>
+          <a:xfrm>
+            <a:off x="6656832" y="2103120"/>
+            <a:ext cx="2093976" cy="365760"/>
+          </a:xfrm>
+          <a:prstGeom prst="rect">
+            <a:avLst/>
+          </a:prstGeom>
+          <a:noFill/>
+          <a:ln>
+            <a:noFill/>
+          </a:ln>
+        </p:spPr>
+        <p:txBody>
+          <a:bodyPr wrap="square" lIns="45720" rIns="45720">
+            <a:spAutoFit/>
+          </a:bodyPr>
+          <a:lstStyle/>
+          <a:p>
+            <a:pPr algn="l">
+              <a:defRPr sz="1100" b="0">
+                <a:solidFill>
+                  <a:srgbClr val="5A5A5A"/>
+                </a:solidFill>
+              </a:defRPr>
+            </a:pPr>
+            <a:r>
+              <a:t>RandomForestClassifier mặc định</a:t>
+            </a:r>
+          </a:p>
+        </p:txBody>
+      </p:sp>
+      <p:sp>
+        <p:nvSpPr>
+          <p:cNvPr id="24" name="Chevron 23"/>
+          <p:cNvSpPr/>
+          <p:nvPr/>
+        </p:nvSpPr>
+        <p:spPr>
+          <a:xfrm>
+            <a:off x="8869680" y="1984248"/>
+            <a:ext cx="320040" cy="411480"/>
+          </a:xfrm>
+          <a:prstGeom prst="chevron">
+            <a:avLst/>
+          </a:prstGeom>
+          <a:solidFill>
+            <a:srgbClr val="B1192A"/>
+          </a:solidFill>
+          <a:ln>
+            <a:noFill/>
+          </a:ln>
+        </p:spPr>
+        <p:style>
+          <a:lnRef idx="1">
+            <a:schemeClr val="accent1"/>
+          </a:lnRef>
+          <a:fillRef idx="3">
+            <a:schemeClr val="accent1"/>
+          </a:fillRef>
+          <a:effectRef idx="2">
+            <a:schemeClr val="accent1"/>
+          </a:effectRef>
+          <a:fontRef idx="minor">
+            <a:schemeClr val="lt1"/>
+          </a:fontRef>
+        </p:style>
+        <p:txBody>
+          <a:bodyPr rtlCol="0" anchor="ctr"/>
+          <a:lstStyle/>
+          <a:p>
+            <a:pPr algn="ctr"/>
+          </a:p>
+        </p:txBody>
+      </p:sp>
+      <p:sp>
+        <p:nvSpPr>
+          <p:cNvPr id="25" name="Rounded Rectangle 24"/>
+          <p:cNvSpPr/>
+          <p:nvPr/>
+        </p:nvSpPr>
+        <p:spPr>
+          <a:xfrm>
+            <a:off x="9326880" y="1783080"/>
+            <a:ext cx="2240280" cy="822960"/>
+          </a:xfrm>
+          <a:prstGeom prst="roundRect">
+            <a:avLst/>
+          </a:prstGeom>
+          <a:solidFill>
+            <a:srgbClr val="FFFFFF"/>
+          </a:solidFill>
+          <a:ln>
+            <a:solidFill>
+              <a:srgbClr val="EBEEF2"/>
+            </a:solidFill>
+          </a:ln>
+        </p:spPr>
+        <p:style>
+          <a:lnRef idx="1">
+            <a:schemeClr val="accent1"/>
+          </a:lnRef>
+          <a:fillRef idx="3">
+            <a:schemeClr val="accent1"/>
+          </a:fillRef>
+          <a:effectRef idx="2">
+            <a:schemeClr val="accent1"/>
+          </a:effectRef>
+          <a:fontRef idx="minor">
+            <a:schemeClr val="lt1"/>
+          </a:fontRef>
+        </p:style>
+        <p:txBody>
+          <a:bodyPr rtlCol="0" anchor="ctr"/>
+          <a:lstStyle/>
+          <a:p>
+            <a:pPr algn="ctr"/>
+          </a:p>
+        </p:txBody>
+      </p:sp>
+      <p:sp>
+        <p:nvSpPr>
+          <p:cNvPr id="26" name="TextBox 25"/>
+          <p:cNvSpPr txBox="1"/>
+          <p:nvPr/>
+        </p:nvSpPr>
+        <p:spPr>
+          <a:xfrm>
+            <a:off x="9400032" y="1856232"/>
+            <a:ext cx="2093976" cy="182880"/>
+          </a:xfrm>
+          <a:prstGeom prst="rect">
+            <a:avLst/>
+          </a:prstGeom>
+          <a:noFill/>
+          <a:ln>
+            <a:noFill/>
+          </a:ln>
+        </p:spPr>
+        <p:txBody>
+          <a:bodyPr wrap="square" lIns="45720" rIns="45720">
+            <a:spAutoFit/>
+          </a:bodyPr>
+          <a:lstStyle/>
+          <a:p>
+            <a:pPr algn="l">
+              <a:defRPr sz="1400" b="1">
+                <a:solidFill>
+                  <a:srgbClr val="B1192A"/>
+                </a:solidFill>
+              </a:defRPr>
+            </a:pPr>
+            <a:r>
+              <a:t>Random Search</a:t>
+            </a:r>
+          </a:p>
+        </p:txBody>
+      </p:sp>
+      <p:sp>
+        <p:nvSpPr>
+          <p:cNvPr id="27" name="TextBox 26"/>
+          <p:cNvSpPr txBox="1"/>
+          <p:nvPr/>
+        </p:nvSpPr>
+        <p:spPr>
+          <a:xfrm>
+            <a:off x="9400032" y="2103120"/>
+            <a:ext cx="2093976" cy="365760"/>
+          </a:xfrm>
+          <a:prstGeom prst="rect">
+            <a:avLst/>
+          </a:prstGeom>
+          <a:noFill/>
+          <a:ln>
+            <a:noFill/>
+          </a:ln>
+        </p:spPr>
+        <p:txBody>
+          <a:bodyPr wrap="square" lIns="45720" rIns="45720">
+            <a:spAutoFit/>
+          </a:bodyPr>
+          <a:lstStyle/>
+          <a:p>
+            <a:pPr algn="l">
+              <a:defRPr sz="1100" b="0">
+                <a:solidFill>
+                  <a:srgbClr val="5A5A5A"/>
+                </a:solidFill>
+              </a:defRPr>
+            </a:pPr>
+            <a:r>
+              <a:t>ParameterSampler sinh 30 cấu hình</a:t>
+            </a:r>
+          </a:p>
+        </p:txBody>
+      </p:sp>
+      <p:sp>
+        <p:nvSpPr>
+          <p:cNvPr id="28" name="Chevron 27"/>
+          <p:cNvSpPr/>
+          <p:nvPr/>
+        </p:nvSpPr>
+        <p:spPr>
+          <a:xfrm>
+            <a:off x="11612880" y="1984248"/>
+            <a:ext cx="320040" cy="411480"/>
+          </a:xfrm>
+          <a:prstGeom prst="chevron">
+            <a:avLst/>
+          </a:prstGeom>
+          <a:solidFill>
+            <a:srgbClr val="B1192A"/>
+          </a:solidFill>
+          <a:ln>
+            <a:noFill/>
+          </a:ln>
+        </p:spPr>
+        <p:style>
+          <a:lnRef idx="1">
+            <a:schemeClr val="accent1"/>
+          </a:lnRef>
+          <a:fillRef idx="3">
+            <a:schemeClr val="accent1"/>
+          </a:fillRef>
+          <a:effectRef idx="2">
+            <a:schemeClr val="accent1"/>
+          </a:effectRef>
+          <a:fontRef idx="minor">
+            <a:schemeClr val="lt1"/>
+          </a:fontRef>
+        </p:style>
+        <p:txBody>
+          <a:bodyPr rtlCol="0" anchor="ctr"/>
+          <a:lstStyle/>
+          <a:p>
+            <a:pPr algn="ctr"/>
+          </a:p>
+        </p:txBody>
+      </p:sp>
+      <p:sp>
+        <p:nvSpPr>
+          <p:cNvPr id="29" name="Rounded Rectangle 28"/>
+          <p:cNvSpPr/>
+          <p:nvPr/>
+        </p:nvSpPr>
+        <p:spPr>
+          <a:xfrm>
+            <a:off x="3840480" y="2926080"/>
+            <a:ext cx="2240280" cy="822960"/>
+          </a:xfrm>
+          <a:prstGeom prst="roundRect">
+            <a:avLst/>
+          </a:prstGeom>
+          <a:solidFill>
+            <a:srgbClr val="FFFFFF"/>
+          </a:solidFill>
+          <a:ln>
+            <a:solidFill>
+              <a:srgbClr val="EBEEF2"/>
+            </a:solidFill>
+          </a:ln>
+        </p:spPr>
+        <p:style>
+          <a:lnRef idx="1">
+            <a:schemeClr val="accent1"/>
+          </a:lnRef>
+          <a:fillRef idx="3">
+            <a:schemeClr val="accent1"/>
+          </a:fillRef>
+          <a:effectRef idx="2">
+            <a:schemeClr val="accent1"/>
+          </a:effectRef>
+          <a:fontRef idx="minor">
+            <a:schemeClr val="lt1"/>
+          </a:fontRef>
+        </p:style>
+        <p:txBody>
+          <a:bodyPr rtlCol="0" anchor="ctr"/>
+          <a:lstStyle/>
+          <a:p>
+            <a:pPr algn="ctr"/>
+          </a:p>
+        </p:txBody>
+      </p:sp>
+      <p:sp>
+        <p:nvSpPr>
+          <p:cNvPr id="30" name="TextBox 29"/>
+          <p:cNvSpPr txBox="1"/>
+          <p:nvPr/>
+        </p:nvSpPr>
+        <p:spPr>
+          <a:xfrm>
+            <a:off x="3913632" y="2999232"/>
+            <a:ext cx="2093976" cy="182880"/>
+          </a:xfrm>
+          <a:prstGeom prst="rect">
+            <a:avLst/>
+          </a:prstGeom>
+          <a:noFill/>
+          <a:ln>
+            <a:noFill/>
+          </a:ln>
+        </p:spPr>
+        <p:txBody>
+          <a:bodyPr wrap="square" lIns="45720" rIns="45720">
+            <a:spAutoFit/>
+          </a:bodyPr>
+          <a:lstStyle/>
+          <a:p>
+            <a:pPr algn="l">
+              <a:defRPr sz="1400" b="1">
+                <a:solidFill>
+                  <a:srgbClr val="B1192A"/>
+                </a:solidFill>
+              </a:defRPr>
+            </a:pPr>
+            <a:r>
+              <a:t>Cross-Validation</a:t>
+            </a:r>
+          </a:p>
+        </p:txBody>
+      </p:sp>
+      <p:sp>
+        <p:nvSpPr>
+          <p:cNvPr id="31" name="TextBox 30"/>
+          <p:cNvSpPr txBox="1"/>
+          <p:nvPr/>
+        </p:nvSpPr>
+        <p:spPr>
+          <a:xfrm>
+            <a:off x="3913632" y="3246120"/>
+            <a:ext cx="2093976" cy="365760"/>
+          </a:xfrm>
+          <a:prstGeom prst="rect">
+            <a:avLst/>
+          </a:prstGeom>
+          <a:noFill/>
+          <a:ln>
+            <a:noFill/>
+          </a:ln>
+        </p:spPr>
+        <p:txBody>
+          <a:bodyPr wrap="square" lIns="45720" rIns="45720">
+            <a:spAutoFit/>
+          </a:bodyPr>
+          <a:lstStyle/>
+          <a:p>
+            <a:pPr algn="l">
+              <a:defRPr sz="1100" b="0">
+                <a:solidFill>
+                  <a:srgbClr val="5A5A5A"/>
+                </a:solidFill>
+              </a:defRPr>
+            </a:pPr>
+            <a:r>
+              <a:t>5-fold stratified trên training set</a:t>
+            </a:r>
+          </a:p>
+        </p:txBody>
+      </p:sp>
+      <p:sp>
+        <p:nvSpPr>
+          <p:cNvPr id="32" name="Chevron 31"/>
+          <p:cNvSpPr/>
+          <p:nvPr/>
+        </p:nvSpPr>
+        <p:spPr>
+          <a:xfrm>
+            <a:off x="6126480" y="3127248"/>
+            <a:ext cx="320040" cy="411480"/>
+          </a:xfrm>
+          <a:prstGeom prst="chevron">
+            <a:avLst/>
+          </a:prstGeom>
+          <a:solidFill>
+            <a:srgbClr val="B1192A"/>
+          </a:solidFill>
+          <a:ln>
+            <a:noFill/>
+          </a:ln>
+        </p:spPr>
+        <p:style>
+          <a:lnRef idx="1">
+            <a:schemeClr val="accent1"/>
+          </a:lnRef>
+          <a:fillRef idx="3">
+            <a:schemeClr val="accent1"/>
+          </a:fillRef>
+          <a:effectRef idx="2">
+            <a:schemeClr val="accent1"/>
+          </a:effectRef>
+          <a:fontRef idx="minor">
+            <a:schemeClr val="lt1"/>
+          </a:fontRef>
+        </p:style>
+        <p:txBody>
+          <a:bodyPr rtlCol="0" anchor="ctr"/>
+          <a:lstStyle/>
+          <a:p>
+            <a:pPr algn="ctr"/>
+          </a:p>
+        </p:txBody>
+      </p:sp>
+      <p:sp>
+        <p:nvSpPr>
+          <p:cNvPr id="33" name="Rounded Rectangle 32"/>
+          <p:cNvSpPr/>
+          <p:nvPr/>
+        </p:nvSpPr>
+        <p:spPr>
+          <a:xfrm>
+            <a:off x="6583680" y="2926080"/>
+            <a:ext cx="2240280" cy="822960"/>
+          </a:xfrm>
+          <a:prstGeom prst="roundRect">
+            <a:avLst/>
+          </a:prstGeom>
+          <a:solidFill>
+            <a:srgbClr val="FFFFFF"/>
+          </a:solidFill>
+          <a:ln>
+            <a:solidFill>
+              <a:srgbClr val="EBEEF2"/>
+            </a:solidFill>
+          </a:ln>
+        </p:spPr>
+        <p:style>
+          <a:lnRef idx="1">
+            <a:schemeClr val="accent1"/>
+          </a:lnRef>
+          <a:fillRef idx="3">
+            <a:schemeClr val="accent1"/>
+          </a:fillRef>
+          <a:effectRef idx="2">
+            <a:schemeClr val="accent1"/>
+          </a:effectRef>
+          <a:fontRef idx="minor">
+            <a:schemeClr val="lt1"/>
+          </a:fontRef>
+        </p:style>
+        <p:txBody>
+          <a:bodyPr rtlCol="0" anchor="ctr"/>
+          <a:lstStyle/>
+          <a:p>
+            <a:pPr algn="ctr"/>
+          </a:p>
+        </p:txBody>
+      </p:sp>
+      <p:sp>
+        <p:nvSpPr>
+          <p:cNvPr id="34" name="TextBox 33"/>
+          <p:cNvSpPr txBox="1"/>
+          <p:nvPr/>
+        </p:nvSpPr>
+        <p:spPr>
+          <a:xfrm>
+            <a:off x="6656832" y="2999232"/>
+            <a:ext cx="2093976" cy="182880"/>
+          </a:xfrm>
+          <a:prstGeom prst="rect">
+            <a:avLst/>
+          </a:prstGeom>
+          <a:noFill/>
+          <a:ln>
+            <a:noFill/>
+          </a:ln>
+        </p:spPr>
+        <p:txBody>
+          <a:bodyPr wrap="square" lIns="45720" rIns="45720">
+            <a:spAutoFit/>
+          </a:bodyPr>
+          <a:lstStyle/>
+          <a:p>
+            <a:pPr algn="l">
+              <a:defRPr sz="1400" b="1">
+                <a:solidFill>
+                  <a:srgbClr val="B1192A"/>
+                </a:solidFill>
+              </a:defRPr>
+            </a:pPr>
+            <a:r>
+              <a:t>Chọn nghiệm tốt nhất</a:t>
+            </a:r>
+          </a:p>
+        </p:txBody>
+      </p:sp>
+      <p:sp>
+        <p:nvSpPr>
+          <p:cNvPr id="35" name="TextBox 34"/>
+          <p:cNvSpPr txBox="1"/>
+          <p:nvPr/>
+        </p:nvSpPr>
+        <p:spPr>
+          <a:xfrm>
+            <a:off x="6656832" y="3246120"/>
+            <a:ext cx="2093976" cy="365760"/>
+          </a:xfrm>
+          <a:prstGeom prst="rect">
+            <a:avLst/>
+          </a:prstGeom>
+          <a:noFill/>
+          <a:ln>
+            <a:noFill/>
+          </a:ln>
+        </p:spPr>
+        <p:txBody>
+          <a:bodyPr wrap="square" lIns="45720" rIns="45720">
+            <a:spAutoFit/>
+          </a:bodyPr>
+          <a:lstStyle/>
+          <a:p>
+            <a:pPr algn="l">
+              <a:defRPr sz="1100" b="0">
+                <a:solidFill>
+                  <a:srgbClr val="5A5A5A"/>
+                </a:solidFill>
+              </a:defRPr>
+            </a:pPr>
+            <a:r>
+              <a:t>Dựa trên mean CV Macro-F1</a:t>
+            </a:r>
+          </a:p>
+        </p:txBody>
+      </p:sp>
+      <p:sp>
+        <p:nvSpPr>
+          <p:cNvPr id="36" name="Chevron 35"/>
+          <p:cNvSpPr/>
+          <p:nvPr/>
+        </p:nvSpPr>
+        <p:spPr>
+          <a:xfrm>
+            <a:off x="8869680" y="3127248"/>
+            <a:ext cx="320040" cy="411480"/>
+          </a:xfrm>
+          <a:prstGeom prst="chevron">
+            <a:avLst/>
+          </a:prstGeom>
+          <a:solidFill>
+            <a:srgbClr val="B1192A"/>
+          </a:solidFill>
+          <a:ln>
+            <a:noFill/>
+          </a:ln>
+        </p:spPr>
+        <p:style>
+          <a:lnRef idx="1">
+            <a:schemeClr val="accent1"/>
+          </a:lnRef>
+          <a:fillRef idx="3">
+            <a:schemeClr val="accent1"/>
+          </a:fillRef>
+          <a:effectRef idx="2">
+            <a:schemeClr val="accent1"/>
+          </a:effectRef>
+          <a:fontRef idx="minor">
+            <a:schemeClr val="lt1"/>
+          </a:fontRef>
+        </p:style>
+        <p:txBody>
+          <a:bodyPr rtlCol="0" anchor="ctr"/>
+          <a:lstStyle/>
+          <a:p>
+            <a:pPr algn="ctr"/>
+          </a:p>
+        </p:txBody>
+      </p:sp>
+      <p:sp>
+        <p:nvSpPr>
+          <p:cNvPr id="37" name="Rounded Rectangle 36"/>
+          <p:cNvSpPr/>
+          <p:nvPr/>
+        </p:nvSpPr>
+        <p:spPr>
+          <a:xfrm>
+            <a:off x="9326880" y="2926080"/>
+            <a:ext cx="2240280" cy="822960"/>
+          </a:xfrm>
+          <a:prstGeom prst="roundRect">
+            <a:avLst/>
+          </a:prstGeom>
+          <a:solidFill>
+            <a:srgbClr val="FFFFFF"/>
+          </a:solidFill>
+          <a:ln>
+            <a:solidFill>
+              <a:srgbClr val="EBEEF2"/>
+            </a:solidFill>
+          </a:ln>
+        </p:spPr>
+        <p:style>
+          <a:lnRef idx="1">
+            <a:schemeClr val="accent1"/>
+          </a:lnRef>
+          <a:fillRef idx="3">
+            <a:schemeClr val="accent1"/>
+          </a:fillRef>
+          <a:effectRef idx="2">
+            <a:schemeClr val="accent1"/>
+          </a:effectRef>
+          <a:fontRef idx="minor">
+            <a:schemeClr val="lt1"/>
+          </a:fontRef>
+        </p:style>
+        <p:txBody>
+          <a:bodyPr rtlCol="0" anchor="ctr"/>
+          <a:lstStyle/>
+          <a:p>
+            <a:pPr algn="ctr"/>
+          </a:p>
+        </p:txBody>
+      </p:sp>
+      <p:sp>
+        <p:nvSpPr>
+          <p:cNvPr id="38" name="TextBox 37"/>
+          <p:cNvSpPr txBox="1"/>
+          <p:nvPr/>
+        </p:nvSpPr>
+        <p:spPr>
+          <a:xfrm>
+            <a:off x="9400032" y="2999232"/>
+            <a:ext cx="2093976" cy="182880"/>
+          </a:xfrm>
+          <a:prstGeom prst="rect">
+            <a:avLst/>
+          </a:prstGeom>
+          <a:noFill/>
+          <a:ln>
+            <a:noFill/>
+          </a:ln>
+        </p:spPr>
+        <p:txBody>
+          <a:bodyPr wrap="square" lIns="45720" rIns="45720">
+            <a:spAutoFit/>
+          </a:bodyPr>
+          <a:lstStyle/>
+          <a:p>
+            <a:pPr algn="l">
+              <a:defRPr sz="1400" b="1">
+                <a:solidFill>
+                  <a:srgbClr val="B1192A"/>
+                </a:solidFill>
+              </a:defRPr>
+            </a:pPr>
+            <a:r>
+              <a:t>Đánh giá cuối</a:t>
+            </a:r>
+          </a:p>
+        </p:txBody>
+      </p:sp>
+      <p:sp>
+        <p:nvSpPr>
+          <p:cNvPr id="39" name="TextBox 38"/>
+          <p:cNvSpPr txBox="1"/>
+          <p:nvPr/>
+        </p:nvSpPr>
+        <p:spPr>
+          <a:xfrm>
+            <a:off x="9400032" y="3246120"/>
+            <a:ext cx="2093976" cy="365760"/>
+          </a:xfrm>
+          <a:prstGeom prst="rect">
+            <a:avLst/>
+          </a:prstGeom>
+          <a:noFill/>
+          <a:ln>
+            <a:noFill/>
+          </a:ln>
+        </p:spPr>
+        <p:txBody>
+          <a:bodyPr wrap="square" lIns="45720" rIns="45720">
+            <a:spAutoFit/>
+          </a:bodyPr>
+          <a:lstStyle/>
+          <a:p>
+            <a:pPr algn="l">
+              <a:defRPr sz="1100" b="0">
+                <a:solidFill>
+                  <a:srgbClr val="5A5A5A"/>
+                </a:solidFill>
+              </a:defRPr>
+            </a:pPr>
+            <a:r>
+              <a:t>Fit lại trên train và test trên holdout</a:t>
             </a:r>
           </a:p>
         </p:txBody>
@@ -3624,14 +6618,6 @@
 <file path=ppt/slides/slide4.xml><?xml version="1.0" encoding="utf-8"?>
 <p:sld xmlns:a="http://schemas.openxmlformats.org/drawingml/2006/main" xmlns:p="http://schemas.openxmlformats.org/presentationml/2006/main" xmlns:r="http://schemas.openxmlformats.org/officeDocument/2006/relationships">
   <p:cSld>
-    <p:bg>
-      <p:bgPr>
-        <a:solidFill>
-          <a:srgbClr val="F7FAFC"/>
-        </a:solidFill>
-        <a:effectLst/>
-      </p:bgPr>
-    </p:bg>
     <p:spTree>
       <p:nvGrpSpPr>
         <p:cNvPr id="1" name=""/>
@@ -3641,14 +6627,176 @@
       <p:grpSpPr/>
       <p:sp>
         <p:nvSpPr>
-          <p:cNvPr id="2" name="TextBox 1"/>
+          <p:cNvPr id="2" name="Rectangle 1"/>
+          <p:cNvSpPr/>
+          <p:nvPr/>
+        </p:nvSpPr>
+        <p:spPr>
+          <a:xfrm>
+            <a:off x="0" y="0"/>
+            <a:ext cx="12191695" cy="6858000"/>
+          </a:xfrm>
+          <a:prstGeom prst="rect">
+            <a:avLst/>
+          </a:prstGeom>
+          <a:solidFill>
+            <a:srgbClr val="FFFFFF"/>
+          </a:solidFill>
+          <a:ln>
+            <a:noFill/>
+          </a:ln>
+        </p:spPr>
+        <p:style>
+          <a:lnRef idx="1">
+            <a:schemeClr val="accent1"/>
+          </a:lnRef>
+          <a:fillRef idx="3">
+            <a:schemeClr val="accent1"/>
+          </a:fillRef>
+          <a:effectRef idx="2">
+            <a:schemeClr val="accent1"/>
+          </a:effectRef>
+          <a:fontRef idx="minor">
+            <a:schemeClr val="lt1"/>
+          </a:fontRef>
+        </p:style>
+        <p:txBody>
+          <a:bodyPr rtlCol="0" anchor="ctr"/>
+          <a:lstStyle/>
+          <a:p>
+            <a:pPr algn="ctr"/>
+          </a:p>
+        </p:txBody>
+      </p:sp>
+      <p:sp>
+        <p:nvSpPr>
+          <p:cNvPr id="3" name="Rectangle 2"/>
+          <p:cNvSpPr/>
+          <p:nvPr/>
+        </p:nvSpPr>
+        <p:spPr>
+          <a:xfrm>
+            <a:off x="0" y="0"/>
+            <a:ext cx="12191695" cy="320040"/>
+          </a:xfrm>
+          <a:prstGeom prst="rect">
+            <a:avLst/>
+          </a:prstGeom>
+          <a:solidFill>
+            <a:srgbClr val="B1192A"/>
+          </a:solidFill>
+          <a:ln>
+            <a:noFill/>
+          </a:ln>
+        </p:spPr>
+        <p:style>
+          <a:lnRef idx="1">
+            <a:schemeClr val="accent1"/>
+          </a:lnRef>
+          <a:fillRef idx="3">
+            <a:schemeClr val="accent1"/>
+          </a:fillRef>
+          <a:effectRef idx="2">
+            <a:schemeClr val="accent1"/>
+          </a:effectRef>
+          <a:fontRef idx="minor">
+            <a:schemeClr val="lt1"/>
+          </a:fontRef>
+        </p:style>
+        <p:txBody>
+          <a:bodyPr rtlCol="0" anchor="ctr"/>
+          <a:lstStyle/>
+          <a:p>
+            <a:pPr algn="ctr"/>
+          </a:p>
+        </p:txBody>
+      </p:sp>
+      <p:pic>
+        <p:nvPicPr>
+          <p:cNvPr id="4" name="Picture 3" descr="image1.png"/>
+          <p:cNvPicPr>
+            <a:picLocks noChangeAspect="1"/>
+          </p:cNvPicPr>
+          <p:nvPr/>
+        </p:nvPicPr>
+        <p:blipFill>
+          <a:blip r:embed="rId2"/>
+          <a:stretch>
+            <a:fillRect/>
+          </a:stretch>
+        </p:blipFill>
+        <p:spPr>
+          <a:xfrm>
+            <a:off x="228600" y="411480"/>
+            <a:ext cx="384048" cy="457200"/>
+          </a:xfrm>
+          <a:prstGeom prst="rect">
+            <a:avLst/>
+          </a:prstGeom>
+        </p:spPr>
+      </p:pic>
+      <p:sp>
+        <p:nvSpPr>
+          <p:cNvPr id="5" name="Rectangle 4"/>
+          <p:cNvSpPr/>
+          <p:nvPr/>
+        </p:nvSpPr>
+        <p:spPr>
+          <a:xfrm>
+            <a:off x="0" y="6537960"/>
+            <a:ext cx="12191695" cy="320040"/>
+          </a:xfrm>
+          <a:prstGeom prst="rect">
+            <a:avLst/>
+          </a:prstGeom>
+          <a:solidFill>
+            <a:srgbClr val="B1192A"/>
+          </a:solidFill>
+          <a:ln>
+            <a:noFill/>
+          </a:ln>
+        </p:spPr>
+        <p:style>
+          <a:lnRef idx="1">
+            <a:schemeClr val="accent1"/>
+          </a:lnRef>
+          <a:fillRef idx="3">
+            <a:schemeClr val="accent1"/>
+          </a:fillRef>
+          <a:effectRef idx="2">
+            <a:schemeClr val="accent1"/>
+          </a:effectRef>
+          <a:fontRef idx="minor">
+            <a:schemeClr val="lt1"/>
+          </a:fontRef>
+        </p:style>
+        <p:txBody>
+          <a:bodyPr rtlCol="0" anchor="ctr"/>
+          <a:lstStyle/>
+          <a:p>
+            <a:pPr algn="ctr">
+              <a:defRPr sz="1200">
+                <a:solidFill>
+                  <a:srgbClr val="FFFFFF"/>
+                </a:solidFill>
+              </a:defRPr>
+            </a:pPr>
+            <a:r>
+              <a:t>Nhập môn Tối ưu hóa  •  Bài tập lớn cá nhân  •  Phạm Phú Vĩnh</a:t>
+            </a:r>
+          </a:p>
+        </p:txBody>
+      </p:sp>
+      <p:sp>
+        <p:nvSpPr>
+          <p:cNvPr id="6" name="TextBox 5"/>
           <p:cNvSpPr txBox="1"/>
           <p:nvPr/>
         </p:nvSpPr>
         <p:spPr>
           <a:xfrm>
-            <a:off x="548640" y="347472"/>
-            <a:ext cx="11247120" cy="640080"/>
+            <a:off x="822960" y="502920"/>
+            <a:ext cx="8686800" cy="502920"/>
           </a:xfrm>
           <a:prstGeom prst="rect">
             <a:avLst/>
@@ -3662,111 +6810,28 @@
           <a:lstStyle/>
           <a:p>
             <a:pPr>
-              <a:defRPr sz="3000" b="1">
-                <a:solidFill>
-                  <a:srgbClr val="0E5C67"/>
+              <a:defRPr sz="2400" b="1">
+                <a:solidFill>
+                  <a:srgbClr val="2B2B2B"/>
                 </a:solidFill>
               </a:defRPr>
             </a:pPr>
             <a:r>
-              <a:t>Thuật toán &amp; kiểm chứng</a:t>
-            </a:r>
-          </a:p>
-        </p:txBody>
-      </p:sp>
-      <p:sp>
-        <p:nvSpPr>
-          <p:cNvPr id="3" name="TextBox 2"/>
+              <a:t>3. Phương pháp thực hiện</a:t>
+            </a:r>
+          </a:p>
+        </p:txBody>
+      </p:sp>
+      <p:sp>
+        <p:nvSpPr>
+          <p:cNvPr id="7" name="TextBox 6"/>
           <p:cNvSpPr txBox="1"/>
           <p:nvPr/>
         </p:nvSpPr>
         <p:spPr>
           <a:xfrm>
-            <a:off x="731520" y="1234440"/>
-            <a:ext cx="10789920" cy="5120640"/>
-          </a:xfrm>
-          <a:prstGeom prst="rect">
-            <a:avLst/>
-          </a:prstGeom>
-          <a:noFill/>
-        </p:spPr>
-        <p:txBody>
-          <a:bodyPr wrap="square">
-            <a:spAutoFit/>
-          </a:bodyPr>
-          <a:lstStyle/>
-          <a:p>
-            <a:pPr>
-              <a:spcAft>
-                <a:spcPts val="1900"/>
-              </a:spcAft>
-              <a:defRPr sz="2200">
-                <a:solidFill>
-                  <a:srgbClr val="253744"/>
-                </a:solidFill>
-              </a:defRPr>
-            </a:pPr>
-            <a:r>
-              <a:t>ParameterSampler lấy 30 cấu hình hợp lệ</a:t>
-            </a:r>
-          </a:p>
-          <a:p>
-            <a:pPr>
-              <a:spcAft>
-                <a:spcPts val="1900"/>
-              </a:spcAft>
-              <a:defRPr sz="2200">
-                <a:solidFill>
-                  <a:srgbClr val="253744"/>
-                </a:solidFill>
-              </a:defRPr>
-            </a:pPr>
-            <a:r>
-              <a:t>CV macro-F1, std và runtime được lưu mỗi trial</a:t>
-            </a:r>
-          </a:p>
-          <a:p>
-            <a:pPr>
-              <a:spcAft>
-                <a:spcPts val="1900"/>
-              </a:spcAft>
-              <a:defRPr sz="2200">
-                <a:solidFill>
-                  <a:srgbClr val="253744"/>
-                </a:solidFill>
-              </a:defRPr>
-            </a:pPr>
-            <a:r>
-              <a:t>Best-so-far và cấu hình tốt nhất xuất JSON</a:t>
-            </a:r>
-          </a:p>
-          <a:p>
-            <a:pPr>
-              <a:spcAft>
-                <a:spcPts val="1900"/>
-              </a:spcAft>
-              <a:defRPr sz="2200">
-                <a:solidFill>
-                  <a:srgbClr val="253744"/>
-                </a:solidFill>
-              </a:defRPr>
-            </a:pPr>
-            <a:r>
-              <a:t>Sensitivity max_depth; estimator-seed stability</a:t>
-            </a:r>
-          </a:p>
-        </p:txBody>
-      </p:sp>
-      <p:sp>
-        <p:nvSpPr>
-          <p:cNvPr id="4" name="TextBox 3"/>
-          <p:cNvSpPr txBox="1"/>
-          <p:nvPr/>
-        </p:nvSpPr>
-        <p:spPr>
-          <a:xfrm>
-            <a:off x="548640" y="6464808"/>
-            <a:ext cx="11064240" cy="182880"/>
+            <a:off x="868680" y="941832"/>
+            <a:ext cx="8686800" cy="274320"/>
           </a:xfrm>
           <a:prstGeom prst="rect">
             <a:avLst/>
@@ -3780,14 +6845,896 @@
           <a:lstStyle/>
           <a:p>
             <a:pPr>
-              <a:defRPr sz="900">
-                <a:solidFill>
-                  <a:srgbClr val="647378"/>
+              <a:defRPr sz="1100">
+                <a:solidFill>
+                  <a:srgbClr val="5A5A5A"/>
                 </a:solidFill>
               </a:defRPr>
             </a:pPr>
             <a:r>
-              <a:t>Nhập môn Tối ưu hóa  •  GitHub Portfolio  •  Kết quả từ Python logs</a:t>
+              <a:t>So sánh baseline với Random Search và cách kiểm chứng</a:t>
+            </a:r>
+          </a:p>
+        </p:txBody>
+      </p:sp>
+      <p:sp>
+        <p:nvSpPr>
+          <p:cNvPr id="8" name="Rounded Rectangle 7"/>
+          <p:cNvSpPr/>
+          <p:nvPr/>
+        </p:nvSpPr>
+        <p:spPr>
+          <a:xfrm>
+            <a:off x="594360" y="1371600"/>
+            <a:ext cx="5303520" cy="2926080"/>
+          </a:xfrm>
+          <a:prstGeom prst="roundRect">
+            <a:avLst/>
+          </a:prstGeom>
+          <a:solidFill>
+            <a:srgbClr val="FFFFFF"/>
+          </a:solidFill>
+          <a:ln>
+            <a:solidFill>
+              <a:srgbClr val="EBEEF2"/>
+            </a:solidFill>
+          </a:ln>
+        </p:spPr>
+        <p:style>
+          <a:lnRef idx="1">
+            <a:schemeClr val="accent1"/>
+          </a:lnRef>
+          <a:fillRef idx="3">
+            <a:schemeClr val="accent1"/>
+          </a:fillRef>
+          <a:effectRef idx="2">
+            <a:schemeClr val="accent1"/>
+          </a:effectRef>
+          <a:fontRef idx="minor">
+            <a:schemeClr val="lt1"/>
+          </a:fontRef>
+        </p:style>
+        <p:txBody>
+          <a:bodyPr rtlCol="0" anchor="ctr"/>
+          <a:lstStyle/>
+          <a:p>
+            <a:pPr algn="ctr"/>
+          </a:p>
+        </p:txBody>
+      </p:sp>
+      <p:sp>
+        <p:nvSpPr>
+          <p:cNvPr id="9" name="Rectangle 8"/>
+          <p:cNvSpPr/>
+          <p:nvPr/>
+        </p:nvSpPr>
+        <p:spPr>
+          <a:xfrm>
+            <a:off x="594360" y="1371600"/>
+            <a:ext cx="109728" cy="2926080"/>
+          </a:xfrm>
+          <a:prstGeom prst="rect">
+            <a:avLst/>
+          </a:prstGeom>
+          <a:solidFill>
+            <a:srgbClr val="2C5D86"/>
+          </a:solidFill>
+          <a:ln>
+            <a:noFill/>
+          </a:ln>
+        </p:spPr>
+        <p:style>
+          <a:lnRef idx="1">
+            <a:schemeClr val="accent1"/>
+          </a:lnRef>
+          <a:fillRef idx="3">
+            <a:schemeClr val="accent1"/>
+          </a:fillRef>
+          <a:effectRef idx="2">
+            <a:schemeClr val="accent1"/>
+          </a:effectRef>
+          <a:fontRef idx="minor">
+            <a:schemeClr val="lt1"/>
+          </a:fontRef>
+        </p:style>
+        <p:txBody>
+          <a:bodyPr rtlCol="0" anchor="ctr"/>
+          <a:lstStyle/>
+          <a:p>
+            <a:pPr algn="ctr"/>
+          </a:p>
+        </p:txBody>
+      </p:sp>
+      <p:sp>
+        <p:nvSpPr>
+          <p:cNvPr id="10" name="TextBox 9"/>
+          <p:cNvSpPr txBox="1"/>
+          <p:nvPr/>
+        </p:nvSpPr>
+        <p:spPr>
+          <a:xfrm>
+            <a:off x="758952" y="1444752"/>
+            <a:ext cx="5074920" cy="228600"/>
+          </a:xfrm>
+          <a:prstGeom prst="rect">
+            <a:avLst/>
+          </a:prstGeom>
+          <a:noFill/>
+          <a:ln>
+            <a:noFill/>
+          </a:ln>
+        </p:spPr>
+        <p:txBody>
+          <a:bodyPr wrap="square" lIns="45720" rIns="45720">
+            <a:spAutoFit/>
+          </a:bodyPr>
+          <a:lstStyle/>
+          <a:p>
+            <a:pPr algn="l">
+              <a:defRPr sz="1600" b="1">
+                <a:solidFill>
+                  <a:srgbClr val="2B2B2B"/>
+                </a:solidFill>
+              </a:defRPr>
+            </a:pPr>
+            <a:r>
+              <a:t>Baseline Random Forest</a:t>
+            </a:r>
+          </a:p>
+        </p:txBody>
+      </p:sp>
+      <p:sp>
+        <p:nvSpPr>
+          <p:cNvPr id="11" name="TextBox 10"/>
+          <p:cNvSpPr txBox="1"/>
+          <p:nvPr/>
+        </p:nvSpPr>
+        <p:spPr>
+          <a:xfrm>
+            <a:off x="758952" y="1709928"/>
+            <a:ext cx="5047488" cy="2542032"/>
+          </a:xfrm>
+          <a:prstGeom prst="rect">
+            <a:avLst/>
+          </a:prstGeom>
+          <a:noFill/>
+          <a:ln>
+            <a:noFill/>
+          </a:ln>
+        </p:spPr>
+        <p:txBody>
+          <a:bodyPr wrap="square" lIns="45720" rIns="45720">
+            <a:spAutoFit/>
+          </a:bodyPr>
+          <a:lstStyle/>
+          <a:p>
+            <a:pPr algn="l">
+              <a:defRPr sz="1300" b="0">
+                <a:solidFill>
+                  <a:srgbClr val="5A5A5A"/>
+                </a:solidFill>
+              </a:defRPr>
+            </a:pPr>
+            <a:r>
+              <a:t>• Dùng RandomForestClassifier mặc định</a:t>
+            </a:r>
+            <a:br/>
+            <a:r>
+              <a:t>• random_state=42, n_jobs=1</a:t>
+            </a:r>
+            <a:br/>
+            <a:r>
+              <a:t>• Được đánh giá bằng cùng 5-fold CV</a:t>
+            </a:r>
+            <a:br/>
+            <a:r>
+              <a:t>• Là mốc đối chứng để so sánh với tối ưu hóa</a:t>
+            </a:r>
+          </a:p>
+        </p:txBody>
+      </p:sp>
+      <p:sp>
+        <p:nvSpPr>
+          <p:cNvPr id="12" name="Rounded Rectangle 11"/>
+          <p:cNvSpPr/>
+          <p:nvPr/>
+        </p:nvSpPr>
+        <p:spPr>
+          <a:xfrm>
+            <a:off x="6263640" y="1371600"/>
+            <a:ext cx="5303520" cy="2926080"/>
+          </a:xfrm>
+          <a:prstGeom prst="roundRect">
+            <a:avLst/>
+          </a:prstGeom>
+          <a:solidFill>
+            <a:srgbClr val="FFFFFF"/>
+          </a:solidFill>
+          <a:ln>
+            <a:solidFill>
+              <a:srgbClr val="EBEEF2"/>
+            </a:solidFill>
+          </a:ln>
+        </p:spPr>
+        <p:style>
+          <a:lnRef idx="1">
+            <a:schemeClr val="accent1"/>
+          </a:lnRef>
+          <a:fillRef idx="3">
+            <a:schemeClr val="accent1"/>
+          </a:fillRef>
+          <a:effectRef idx="2">
+            <a:schemeClr val="accent1"/>
+          </a:effectRef>
+          <a:fontRef idx="minor">
+            <a:schemeClr val="lt1"/>
+          </a:fontRef>
+        </p:style>
+        <p:txBody>
+          <a:bodyPr rtlCol="0" anchor="ctr"/>
+          <a:lstStyle/>
+          <a:p>
+            <a:pPr algn="ctr"/>
+          </a:p>
+        </p:txBody>
+      </p:sp>
+      <p:sp>
+        <p:nvSpPr>
+          <p:cNvPr id="13" name="Rectangle 12"/>
+          <p:cNvSpPr/>
+          <p:nvPr/>
+        </p:nvSpPr>
+        <p:spPr>
+          <a:xfrm>
+            <a:off x="6263640" y="1371600"/>
+            <a:ext cx="109728" cy="2926080"/>
+          </a:xfrm>
+          <a:prstGeom prst="rect">
+            <a:avLst/>
+          </a:prstGeom>
+          <a:solidFill>
+            <a:srgbClr val="B1192A"/>
+          </a:solidFill>
+          <a:ln>
+            <a:noFill/>
+          </a:ln>
+        </p:spPr>
+        <p:style>
+          <a:lnRef idx="1">
+            <a:schemeClr val="accent1"/>
+          </a:lnRef>
+          <a:fillRef idx="3">
+            <a:schemeClr val="accent1"/>
+          </a:fillRef>
+          <a:effectRef idx="2">
+            <a:schemeClr val="accent1"/>
+          </a:effectRef>
+          <a:fontRef idx="minor">
+            <a:schemeClr val="lt1"/>
+          </a:fontRef>
+        </p:style>
+        <p:txBody>
+          <a:bodyPr rtlCol="0" anchor="ctr"/>
+          <a:lstStyle/>
+          <a:p>
+            <a:pPr algn="ctr"/>
+          </a:p>
+        </p:txBody>
+      </p:sp>
+      <p:sp>
+        <p:nvSpPr>
+          <p:cNvPr id="14" name="TextBox 13"/>
+          <p:cNvSpPr txBox="1"/>
+          <p:nvPr/>
+        </p:nvSpPr>
+        <p:spPr>
+          <a:xfrm>
+            <a:off x="6428232" y="1444752"/>
+            <a:ext cx="5074920" cy="228600"/>
+          </a:xfrm>
+          <a:prstGeom prst="rect">
+            <a:avLst/>
+          </a:prstGeom>
+          <a:noFill/>
+          <a:ln>
+            <a:noFill/>
+          </a:ln>
+        </p:spPr>
+        <p:txBody>
+          <a:bodyPr wrap="square" lIns="45720" rIns="45720">
+            <a:spAutoFit/>
+          </a:bodyPr>
+          <a:lstStyle/>
+          <a:p>
+            <a:pPr algn="l">
+              <a:defRPr sz="1600" b="1">
+                <a:solidFill>
+                  <a:srgbClr val="2B2B2B"/>
+                </a:solidFill>
+              </a:defRPr>
+            </a:pPr>
+            <a:r>
+              <a:t>Random Search</a:t>
+            </a:r>
+          </a:p>
+        </p:txBody>
+      </p:sp>
+      <p:sp>
+        <p:nvSpPr>
+          <p:cNvPr id="15" name="TextBox 14"/>
+          <p:cNvSpPr txBox="1"/>
+          <p:nvPr/>
+        </p:nvSpPr>
+        <p:spPr>
+          <a:xfrm>
+            <a:off x="6428232" y="1709928"/>
+            <a:ext cx="5047488" cy="2542032"/>
+          </a:xfrm>
+          <a:prstGeom prst="rect">
+            <a:avLst/>
+          </a:prstGeom>
+          <a:noFill/>
+          <a:ln>
+            <a:noFill/>
+          </a:ln>
+        </p:spPr>
+        <p:txBody>
+          <a:bodyPr wrap="square" lIns="45720" rIns="45720">
+            <a:spAutoFit/>
+          </a:bodyPr>
+          <a:lstStyle/>
+          <a:p>
+            <a:pPr algn="l">
+              <a:defRPr sz="1300" b="0">
+                <a:solidFill>
+                  <a:srgbClr val="5A5A5A"/>
+                </a:solidFill>
+              </a:defRPr>
+            </a:pPr>
+            <a:r>
+              <a:t>• Dùng ParameterSampler với seed 42</a:t>
+            </a:r>
+            <a:br/>
+            <a:r>
+              <a:t>• Lấy 30 cấu hình hợp lệ trong miền Ω</a:t>
+            </a:r>
+            <a:br/>
+            <a:r>
+              <a:t>• Ghi mean/std CV Macro-F1 và runtime</a:t>
+            </a:r>
+            <a:br/>
+            <a:r>
+              <a:t>• Chọn cấu hình có CV Macro-F1 cao nhất</a:t>
+            </a:r>
+          </a:p>
+        </p:txBody>
+      </p:sp>
+      <p:sp>
+        <p:nvSpPr>
+          <p:cNvPr id="16" name="TextBox 15"/>
+          <p:cNvSpPr txBox="1"/>
+          <p:nvPr/>
+        </p:nvSpPr>
+        <p:spPr>
+          <a:xfrm>
+            <a:off x="640080" y="4526280"/>
+            <a:ext cx="10972800" cy="274320"/>
+          </a:xfrm>
+          <a:prstGeom prst="rect">
+            <a:avLst/>
+          </a:prstGeom>
+          <a:noFill/>
+          <a:ln>
+            <a:noFill/>
+          </a:ln>
+        </p:spPr>
+        <p:txBody>
+          <a:bodyPr wrap="square" lIns="45720" rIns="45720">
+            <a:spAutoFit/>
+          </a:bodyPr>
+          <a:lstStyle/>
+          <a:p>
+            <a:pPr algn="l">
+              <a:defRPr sz="1800" b="1">
+                <a:solidFill>
+                  <a:srgbClr val="2B2B2B"/>
+                </a:solidFill>
+              </a:defRPr>
+            </a:pPr>
+            <a:r>
+              <a:t>Các kiểm chứng bổ sung</a:t>
+            </a:r>
+          </a:p>
+        </p:txBody>
+      </p:sp>
+      <p:sp>
+        <p:nvSpPr>
+          <p:cNvPr id="17" name="Rounded Rectangle 16"/>
+          <p:cNvSpPr/>
+          <p:nvPr/>
+        </p:nvSpPr>
+        <p:spPr>
+          <a:xfrm>
+            <a:off x="594360" y="4800600"/>
+            <a:ext cx="3611880" cy="1097280"/>
+          </a:xfrm>
+          <a:prstGeom prst="roundRect">
+            <a:avLst/>
+          </a:prstGeom>
+          <a:solidFill>
+            <a:srgbClr val="FFFFFF"/>
+          </a:solidFill>
+          <a:ln>
+            <a:solidFill>
+              <a:srgbClr val="EBEEF2"/>
+            </a:solidFill>
+          </a:ln>
+        </p:spPr>
+        <p:style>
+          <a:lnRef idx="1">
+            <a:schemeClr val="accent1"/>
+          </a:lnRef>
+          <a:fillRef idx="3">
+            <a:schemeClr val="accent1"/>
+          </a:fillRef>
+          <a:effectRef idx="2">
+            <a:schemeClr val="accent1"/>
+          </a:effectRef>
+          <a:fontRef idx="minor">
+            <a:schemeClr val="lt1"/>
+          </a:fontRef>
+        </p:style>
+        <p:txBody>
+          <a:bodyPr rtlCol="0" anchor="ctr"/>
+          <a:lstStyle/>
+          <a:p>
+            <a:pPr algn="ctr"/>
+          </a:p>
+        </p:txBody>
+      </p:sp>
+      <p:sp>
+        <p:nvSpPr>
+          <p:cNvPr id="18" name="Rectangle 17"/>
+          <p:cNvSpPr/>
+          <p:nvPr/>
+        </p:nvSpPr>
+        <p:spPr>
+          <a:xfrm>
+            <a:off x="594360" y="4800600"/>
+            <a:ext cx="109728" cy="1097280"/>
+          </a:xfrm>
+          <a:prstGeom prst="rect">
+            <a:avLst/>
+          </a:prstGeom>
+          <a:solidFill>
+            <a:srgbClr val="3A8A5E"/>
+          </a:solidFill>
+          <a:ln>
+            <a:noFill/>
+          </a:ln>
+        </p:spPr>
+        <p:style>
+          <a:lnRef idx="1">
+            <a:schemeClr val="accent1"/>
+          </a:lnRef>
+          <a:fillRef idx="3">
+            <a:schemeClr val="accent1"/>
+          </a:fillRef>
+          <a:effectRef idx="2">
+            <a:schemeClr val="accent1"/>
+          </a:effectRef>
+          <a:fontRef idx="minor">
+            <a:schemeClr val="lt1"/>
+          </a:fontRef>
+        </p:style>
+        <p:txBody>
+          <a:bodyPr rtlCol="0" anchor="ctr"/>
+          <a:lstStyle/>
+          <a:p>
+            <a:pPr algn="ctr"/>
+          </a:p>
+        </p:txBody>
+      </p:sp>
+      <p:sp>
+        <p:nvSpPr>
+          <p:cNvPr id="19" name="TextBox 18"/>
+          <p:cNvSpPr txBox="1"/>
+          <p:nvPr/>
+        </p:nvSpPr>
+        <p:spPr>
+          <a:xfrm>
+            <a:off x="758952" y="4873752"/>
+            <a:ext cx="3383280" cy="228600"/>
+          </a:xfrm>
+          <a:prstGeom prst="rect">
+            <a:avLst/>
+          </a:prstGeom>
+          <a:noFill/>
+          <a:ln>
+            <a:noFill/>
+          </a:ln>
+        </p:spPr>
+        <p:txBody>
+          <a:bodyPr wrap="square" lIns="45720" rIns="45720">
+            <a:spAutoFit/>
+          </a:bodyPr>
+          <a:lstStyle/>
+          <a:p>
+            <a:pPr algn="l">
+              <a:defRPr sz="1600" b="1">
+                <a:solidFill>
+                  <a:srgbClr val="2B2B2B"/>
+                </a:solidFill>
+              </a:defRPr>
+            </a:pPr>
+            <a:r>
+              <a:t>Search history</a:t>
+            </a:r>
+          </a:p>
+        </p:txBody>
+      </p:sp>
+      <p:sp>
+        <p:nvSpPr>
+          <p:cNvPr id="20" name="TextBox 19"/>
+          <p:cNvSpPr txBox="1"/>
+          <p:nvPr/>
+        </p:nvSpPr>
+        <p:spPr>
+          <a:xfrm>
+            <a:off x="758952" y="5138928"/>
+            <a:ext cx="3355848" cy="713232"/>
+          </a:xfrm>
+          <a:prstGeom prst="rect">
+            <a:avLst/>
+          </a:prstGeom>
+          <a:noFill/>
+          <a:ln>
+            <a:noFill/>
+          </a:ln>
+        </p:spPr>
+        <p:txBody>
+          <a:bodyPr wrap="square" lIns="45720" rIns="45720">
+            <a:spAutoFit/>
+          </a:bodyPr>
+          <a:lstStyle/>
+          <a:p>
+            <a:pPr algn="l">
+              <a:defRPr sz="1300" b="0">
+                <a:solidFill>
+                  <a:srgbClr val="5A5A5A"/>
+                </a:solidFill>
+              </a:defRPr>
+            </a:pPr>
+            <a:r>
+              <a:t>Lưu lại trial_history.csv để theo dõi sự hội tụ của nghiệm tốt nhất.</a:t>
+            </a:r>
+          </a:p>
+        </p:txBody>
+      </p:sp>
+      <p:sp>
+        <p:nvSpPr>
+          <p:cNvPr id="21" name="Rounded Rectangle 20"/>
+          <p:cNvSpPr/>
+          <p:nvPr/>
+        </p:nvSpPr>
+        <p:spPr>
+          <a:xfrm>
+            <a:off x="4297680" y="4800600"/>
+            <a:ext cx="3611880" cy="1097280"/>
+          </a:xfrm>
+          <a:prstGeom prst="roundRect">
+            <a:avLst/>
+          </a:prstGeom>
+          <a:solidFill>
+            <a:srgbClr val="FFFFFF"/>
+          </a:solidFill>
+          <a:ln>
+            <a:solidFill>
+              <a:srgbClr val="EBEEF2"/>
+            </a:solidFill>
+          </a:ln>
+        </p:spPr>
+        <p:style>
+          <a:lnRef idx="1">
+            <a:schemeClr val="accent1"/>
+          </a:lnRef>
+          <a:fillRef idx="3">
+            <a:schemeClr val="accent1"/>
+          </a:fillRef>
+          <a:effectRef idx="2">
+            <a:schemeClr val="accent1"/>
+          </a:effectRef>
+          <a:fontRef idx="minor">
+            <a:schemeClr val="lt1"/>
+          </a:fontRef>
+        </p:style>
+        <p:txBody>
+          <a:bodyPr rtlCol="0" anchor="ctr"/>
+          <a:lstStyle/>
+          <a:p>
+            <a:pPr algn="ctr"/>
+          </a:p>
+        </p:txBody>
+      </p:sp>
+      <p:sp>
+        <p:nvSpPr>
+          <p:cNvPr id="22" name="Rectangle 21"/>
+          <p:cNvSpPr/>
+          <p:nvPr/>
+        </p:nvSpPr>
+        <p:spPr>
+          <a:xfrm>
+            <a:off x="4297680" y="4800600"/>
+            <a:ext cx="109728" cy="1097280"/>
+          </a:xfrm>
+          <a:prstGeom prst="rect">
+            <a:avLst/>
+          </a:prstGeom>
+          <a:solidFill>
+            <a:srgbClr val="2C5D86"/>
+          </a:solidFill>
+          <a:ln>
+            <a:noFill/>
+          </a:ln>
+        </p:spPr>
+        <p:style>
+          <a:lnRef idx="1">
+            <a:schemeClr val="accent1"/>
+          </a:lnRef>
+          <a:fillRef idx="3">
+            <a:schemeClr val="accent1"/>
+          </a:fillRef>
+          <a:effectRef idx="2">
+            <a:schemeClr val="accent1"/>
+          </a:effectRef>
+          <a:fontRef idx="minor">
+            <a:schemeClr val="lt1"/>
+          </a:fontRef>
+        </p:style>
+        <p:txBody>
+          <a:bodyPr rtlCol="0" anchor="ctr"/>
+          <a:lstStyle/>
+          <a:p>
+            <a:pPr algn="ctr"/>
+          </a:p>
+        </p:txBody>
+      </p:sp>
+      <p:sp>
+        <p:nvSpPr>
+          <p:cNvPr id="23" name="TextBox 22"/>
+          <p:cNvSpPr txBox="1"/>
+          <p:nvPr/>
+        </p:nvSpPr>
+        <p:spPr>
+          <a:xfrm>
+            <a:off x="4462272" y="4873752"/>
+            <a:ext cx="3383280" cy="228600"/>
+          </a:xfrm>
+          <a:prstGeom prst="rect">
+            <a:avLst/>
+          </a:prstGeom>
+          <a:noFill/>
+          <a:ln>
+            <a:noFill/>
+          </a:ln>
+        </p:spPr>
+        <p:txBody>
+          <a:bodyPr wrap="square" lIns="45720" rIns="45720">
+            <a:spAutoFit/>
+          </a:bodyPr>
+          <a:lstStyle/>
+          <a:p>
+            <a:pPr algn="l">
+              <a:defRPr sz="1600" b="1">
+                <a:solidFill>
+                  <a:srgbClr val="2B2B2B"/>
+                </a:solidFill>
+              </a:defRPr>
+            </a:pPr>
+            <a:r>
+              <a:t>Sensitivity</a:t>
+            </a:r>
+          </a:p>
+        </p:txBody>
+      </p:sp>
+      <p:sp>
+        <p:nvSpPr>
+          <p:cNvPr id="24" name="TextBox 23"/>
+          <p:cNvSpPr txBox="1"/>
+          <p:nvPr/>
+        </p:nvSpPr>
+        <p:spPr>
+          <a:xfrm>
+            <a:off x="4462272" y="5138928"/>
+            <a:ext cx="3355848" cy="713232"/>
+          </a:xfrm>
+          <a:prstGeom prst="rect">
+            <a:avLst/>
+          </a:prstGeom>
+          <a:noFill/>
+          <a:ln>
+            <a:noFill/>
+          </a:ln>
+        </p:spPr>
+        <p:txBody>
+          <a:bodyPr wrap="square" lIns="45720" rIns="45720">
+            <a:spAutoFit/>
+          </a:bodyPr>
+          <a:lstStyle/>
+          <a:p>
+            <a:pPr algn="l">
+              <a:defRPr sz="1300" b="0">
+                <a:solidFill>
+                  <a:srgbClr val="5A5A5A"/>
+                </a:solidFill>
+              </a:defRPr>
+            </a:pPr>
+            <a:r>
+              <a:t>Thay đổi max_depth quanh cấu hình tốt nhất để xem độ nhạy.</a:t>
+            </a:r>
+          </a:p>
+        </p:txBody>
+      </p:sp>
+      <p:sp>
+        <p:nvSpPr>
+          <p:cNvPr id="25" name="Rounded Rectangle 24"/>
+          <p:cNvSpPr/>
+          <p:nvPr/>
+        </p:nvSpPr>
+        <p:spPr>
+          <a:xfrm>
+            <a:off x="8001000" y="4800600"/>
+            <a:ext cx="3611880" cy="1097280"/>
+          </a:xfrm>
+          <a:prstGeom prst="roundRect">
+            <a:avLst/>
+          </a:prstGeom>
+          <a:solidFill>
+            <a:srgbClr val="FFFFFF"/>
+          </a:solidFill>
+          <a:ln>
+            <a:solidFill>
+              <a:srgbClr val="EBEEF2"/>
+            </a:solidFill>
+          </a:ln>
+        </p:spPr>
+        <p:style>
+          <a:lnRef idx="1">
+            <a:schemeClr val="accent1"/>
+          </a:lnRef>
+          <a:fillRef idx="3">
+            <a:schemeClr val="accent1"/>
+          </a:fillRef>
+          <a:effectRef idx="2">
+            <a:schemeClr val="accent1"/>
+          </a:effectRef>
+          <a:fontRef idx="minor">
+            <a:schemeClr val="lt1"/>
+          </a:fontRef>
+        </p:style>
+        <p:txBody>
+          <a:bodyPr rtlCol="0" anchor="ctr"/>
+          <a:lstStyle/>
+          <a:p>
+            <a:pPr algn="ctr"/>
+          </a:p>
+        </p:txBody>
+      </p:sp>
+      <p:sp>
+        <p:nvSpPr>
+          <p:cNvPr id="26" name="Rectangle 25"/>
+          <p:cNvSpPr/>
+          <p:nvPr/>
+        </p:nvSpPr>
+        <p:spPr>
+          <a:xfrm>
+            <a:off x="8001000" y="4800600"/>
+            <a:ext cx="109728" cy="1097280"/>
+          </a:xfrm>
+          <a:prstGeom prst="rect">
+            <a:avLst/>
+          </a:prstGeom>
+          <a:solidFill>
+            <a:srgbClr val="B1192A"/>
+          </a:solidFill>
+          <a:ln>
+            <a:noFill/>
+          </a:ln>
+        </p:spPr>
+        <p:style>
+          <a:lnRef idx="1">
+            <a:schemeClr val="accent1"/>
+          </a:lnRef>
+          <a:fillRef idx="3">
+            <a:schemeClr val="accent1"/>
+          </a:fillRef>
+          <a:effectRef idx="2">
+            <a:schemeClr val="accent1"/>
+          </a:effectRef>
+          <a:fontRef idx="minor">
+            <a:schemeClr val="lt1"/>
+          </a:fontRef>
+        </p:style>
+        <p:txBody>
+          <a:bodyPr rtlCol="0" anchor="ctr"/>
+          <a:lstStyle/>
+          <a:p>
+            <a:pPr algn="ctr"/>
+          </a:p>
+        </p:txBody>
+      </p:sp>
+      <p:sp>
+        <p:nvSpPr>
+          <p:cNvPr id="27" name="TextBox 26"/>
+          <p:cNvSpPr txBox="1"/>
+          <p:nvPr/>
+        </p:nvSpPr>
+        <p:spPr>
+          <a:xfrm>
+            <a:off x="8165592" y="4873752"/>
+            <a:ext cx="3383280" cy="228600"/>
+          </a:xfrm>
+          <a:prstGeom prst="rect">
+            <a:avLst/>
+          </a:prstGeom>
+          <a:noFill/>
+          <a:ln>
+            <a:noFill/>
+          </a:ln>
+        </p:spPr>
+        <p:txBody>
+          <a:bodyPr wrap="square" lIns="45720" rIns="45720">
+            <a:spAutoFit/>
+          </a:bodyPr>
+          <a:lstStyle/>
+          <a:p>
+            <a:pPr algn="l">
+              <a:defRPr sz="1600" b="1">
+                <a:solidFill>
+                  <a:srgbClr val="2B2B2B"/>
+                </a:solidFill>
+              </a:defRPr>
+            </a:pPr>
+            <a:r>
+              <a:t>Stability</a:t>
+            </a:r>
+          </a:p>
+        </p:txBody>
+      </p:sp>
+      <p:sp>
+        <p:nvSpPr>
+          <p:cNvPr id="28" name="TextBox 27"/>
+          <p:cNvSpPr txBox="1"/>
+          <p:nvPr/>
+        </p:nvSpPr>
+        <p:spPr>
+          <a:xfrm>
+            <a:off x="8165592" y="5138928"/>
+            <a:ext cx="3355848" cy="713232"/>
+          </a:xfrm>
+          <a:prstGeom prst="rect">
+            <a:avLst/>
+          </a:prstGeom>
+          <a:noFill/>
+          <a:ln>
+            <a:noFill/>
+          </a:ln>
+        </p:spPr>
+        <p:txBody>
+          <a:bodyPr wrap="square" lIns="45720" rIns="45720">
+            <a:spAutoFit/>
+          </a:bodyPr>
+          <a:lstStyle/>
+          <a:p>
+            <a:pPr algn="l">
+              <a:defRPr sz="1300" b="0">
+                <a:solidFill>
+                  <a:srgbClr val="5A5A5A"/>
+                </a:solidFill>
+              </a:defRPr>
+            </a:pPr>
+            <a:r>
+              <a:t>Thử các estimator seed 11, 23, 42 để xem độ ổn định tương đối.</a:t>
             </a:r>
           </a:p>
         </p:txBody>
@@ -3803,14 +7750,6 @@
 <file path=ppt/slides/slide5.xml><?xml version="1.0" encoding="utf-8"?>
 <p:sld xmlns:a="http://schemas.openxmlformats.org/drawingml/2006/main" xmlns:p="http://schemas.openxmlformats.org/presentationml/2006/main" xmlns:r="http://schemas.openxmlformats.org/officeDocument/2006/relationships">
   <p:cSld>
-    <p:bg>
-      <p:bgPr>
-        <a:solidFill>
-          <a:srgbClr val="F7FAFC"/>
-        </a:solidFill>
-        <a:effectLst/>
-      </p:bgPr>
-    </p:bg>
     <p:spTree>
       <p:nvGrpSpPr>
         <p:cNvPr id="1" name=""/>
@@ -3820,42 +7759,93 @@
       <p:grpSpPr/>
       <p:sp>
         <p:nvSpPr>
-          <p:cNvPr id="2" name="TextBox 1"/>
-          <p:cNvSpPr txBox="1"/>
-          <p:nvPr/>
-        </p:nvSpPr>
-        <p:spPr>
-          <a:xfrm>
-            <a:off x="548640" y="347472"/>
-            <a:ext cx="11247120" cy="640080"/>
-          </a:xfrm>
-          <a:prstGeom prst="rect">
-            <a:avLst/>
-          </a:prstGeom>
-          <a:noFill/>
-        </p:spPr>
-        <p:txBody>
-          <a:bodyPr wrap="none">
-            <a:spAutoFit/>
-          </a:bodyPr>
-          <a:lstStyle/>
-          <a:p>
-            <a:pPr>
-              <a:defRPr sz="3000" b="1">
-                <a:solidFill>
-                  <a:srgbClr val="0E5C67"/>
-                </a:solidFill>
-              </a:defRPr>
-            </a:pPr>
-            <a:r>
-              <a:t>Biểu đồ hội tụ</a:t>
-            </a:r>
+          <p:cNvPr id="2" name="Rectangle 1"/>
+          <p:cNvSpPr/>
+          <p:nvPr/>
+        </p:nvSpPr>
+        <p:spPr>
+          <a:xfrm>
+            <a:off x="0" y="0"/>
+            <a:ext cx="12191695" cy="6858000"/>
+          </a:xfrm>
+          <a:prstGeom prst="rect">
+            <a:avLst/>
+          </a:prstGeom>
+          <a:solidFill>
+            <a:srgbClr val="FFFFFF"/>
+          </a:solidFill>
+          <a:ln>
+            <a:noFill/>
+          </a:ln>
+        </p:spPr>
+        <p:style>
+          <a:lnRef idx="1">
+            <a:schemeClr val="accent1"/>
+          </a:lnRef>
+          <a:fillRef idx="3">
+            <a:schemeClr val="accent1"/>
+          </a:fillRef>
+          <a:effectRef idx="2">
+            <a:schemeClr val="accent1"/>
+          </a:effectRef>
+          <a:fontRef idx="minor">
+            <a:schemeClr val="lt1"/>
+          </a:fontRef>
+        </p:style>
+        <p:txBody>
+          <a:bodyPr rtlCol="0" anchor="ctr"/>
+          <a:lstStyle/>
+          <a:p>
+            <a:pPr algn="ctr"/>
+          </a:p>
+        </p:txBody>
+      </p:sp>
+      <p:sp>
+        <p:nvSpPr>
+          <p:cNvPr id="3" name="Rectangle 2"/>
+          <p:cNvSpPr/>
+          <p:nvPr/>
+        </p:nvSpPr>
+        <p:spPr>
+          <a:xfrm>
+            <a:off x="0" y="0"/>
+            <a:ext cx="12191695" cy="320040"/>
+          </a:xfrm>
+          <a:prstGeom prst="rect">
+            <a:avLst/>
+          </a:prstGeom>
+          <a:solidFill>
+            <a:srgbClr val="B1192A"/>
+          </a:solidFill>
+          <a:ln>
+            <a:noFill/>
+          </a:ln>
+        </p:spPr>
+        <p:style>
+          <a:lnRef idx="1">
+            <a:schemeClr val="accent1"/>
+          </a:lnRef>
+          <a:fillRef idx="3">
+            <a:schemeClr val="accent1"/>
+          </a:fillRef>
+          <a:effectRef idx="2">
+            <a:schemeClr val="accent1"/>
+          </a:effectRef>
+          <a:fontRef idx="minor">
+            <a:schemeClr val="lt1"/>
+          </a:fontRef>
+        </p:style>
+        <p:txBody>
+          <a:bodyPr rtlCol="0" anchor="ctr"/>
+          <a:lstStyle/>
+          <a:p>
+            <a:pPr algn="ctr"/>
           </a:p>
         </p:txBody>
       </p:sp>
       <p:pic>
         <p:nvPicPr>
-          <p:cNvPr id="3" name="Picture 2" descr="convergence.png"/>
+          <p:cNvPr id="4" name="Picture 3" descr="image1.png"/>
           <p:cNvPicPr>
             <a:picLocks noChangeAspect="1"/>
           </p:cNvPicPr>
@@ -3869,8 +7859,8 @@
         </p:blipFill>
         <p:spPr>
           <a:xfrm>
-            <a:off x="3246120" y="1188720"/>
-            <a:ext cx="6217920" cy="3575304"/>
+            <a:off x="228600" y="411480"/>
+            <a:ext cx="384048" cy="457200"/>
           </a:xfrm>
           <a:prstGeom prst="rect">
             <a:avLst/>
@@ -3879,14 +7869,66 @@
       </p:pic>
       <p:sp>
         <p:nvSpPr>
-          <p:cNvPr id="4" name="TextBox 3"/>
+          <p:cNvPr id="5" name="Rectangle 4"/>
+          <p:cNvSpPr/>
+          <p:nvPr/>
+        </p:nvSpPr>
+        <p:spPr>
+          <a:xfrm>
+            <a:off x="0" y="6537960"/>
+            <a:ext cx="12191695" cy="320040"/>
+          </a:xfrm>
+          <a:prstGeom prst="rect">
+            <a:avLst/>
+          </a:prstGeom>
+          <a:solidFill>
+            <a:srgbClr val="B1192A"/>
+          </a:solidFill>
+          <a:ln>
+            <a:noFill/>
+          </a:ln>
+        </p:spPr>
+        <p:style>
+          <a:lnRef idx="1">
+            <a:schemeClr val="accent1"/>
+          </a:lnRef>
+          <a:fillRef idx="3">
+            <a:schemeClr val="accent1"/>
+          </a:fillRef>
+          <a:effectRef idx="2">
+            <a:schemeClr val="accent1"/>
+          </a:effectRef>
+          <a:fontRef idx="minor">
+            <a:schemeClr val="lt1"/>
+          </a:fontRef>
+        </p:style>
+        <p:txBody>
+          <a:bodyPr rtlCol="0" anchor="ctr"/>
+          <a:lstStyle/>
+          <a:p>
+            <a:pPr algn="ctr">
+              <a:defRPr sz="1200">
+                <a:solidFill>
+                  <a:srgbClr val="FFFFFF"/>
+                </a:solidFill>
+              </a:defRPr>
+            </a:pPr>
+            <a:r>
+              <a:t>Nhập môn Tối ưu hóa  •  Bài tập lớn cá nhân  •  Phạm Phú Vĩnh</a:t>
+            </a:r>
+          </a:p>
+        </p:txBody>
+      </p:sp>
+      <p:sp>
+        <p:nvSpPr>
+          <p:cNvPr id="6" name="TextBox 5"/>
           <p:cNvSpPr txBox="1"/>
           <p:nvPr/>
         </p:nvSpPr>
         <p:spPr>
           <a:xfrm>
-            <a:off x="548640" y="6464808"/>
-            <a:ext cx="11064240" cy="182880"/>
+            <a:off x="822960" y="502920"/>
+            <a:ext cx="8686800" cy="502920"/>
           </a:xfrm>
           <a:prstGeom prst="rect">
             <a:avLst/>
@@ -3900,14 +7942,1695 @@
           <a:lstStyle/>
           <a:p>
             <a:pPr>
-              <a:defRPr sz="900">
-                <a:solidFill>
-                  <a:srgbClr val="647378"/>
+              <a:defRPr sz="2400" b="1">
+                <a:solidFill>
+                  <a:srgbClr val="2B2B2B"/>
                 </a:solidFill>
               </a:defRPr>
             </a:pPr>
             <a:r>
-              <a:t>Nhập môn Tối ưu hóa  •  GitHub Portfolio  •  Kết quả từ Python logs</a:t>
+              <a:t>4. Kết quả chính</a:t>
+            </a:r>
+          </a:p>
+        </p:txBody>
+      </p:sp>
+      <p:sp>
+        <p:nvSpPr>
+          <p:cNvPr id="7" name="TextBox 6"/>
+          <p:cNvSpPr txBox="1"/>
+          <p:nvPr/>
+        </p:nvSpPr>
+        <p:spPr>
+          <a:xfrm>
+            <a:off x="868680" y="941832"/>
+            <a:ext cx="8686800" cy="274320"/>
+          </a:xfrm>
+          <a:prstGeom prst="rect">
+            <a:avLst/>
+          </a:prstGeom>
+          <a:noFill/>
+        </p:spPr>
+        <p:txBody>
+          <a:bodyPr wrap="none">
+            <a:spAutoFit/>
+          </a:bodyPr>
+          <a:lstStyle/>
+          <a:p>
+            <a:pPr>
+              <a:defRPr sz="1100">
+                <a:solidFill>
+                  <a:srgbClr val="5A5A5A"/>
+                </a:solidFill>
+              </a:defRPr>
+            </a:pPr>
+            <a:r>
+              <a:t>Bảng so sánh kết quả giữa mô hình mặc định và mô hình tối ưu</a:t>
+            </a:r>
+          </a:p>
+        </p:txBody>
+      </p:sp>
+      <p:sp>
+        <p:nvSpPr>
+          <p:cNvPr id="8" name="Rectangle 7"/>
+          <p:cNvSpPr/>
+          <p:nvPr/>
+        </p:nvSpPr>
+        <p:spPr>
+          <a:xfrm>
+            <a:off x="594360" y="1417320"/>
+            <a:ext cx="2834640" cy="502920"/>
+          </a:xfrm>
+          <a:prstGeom prst="rect">
+            <a:avLst/>
+          </a:prstGeom>
+          <a:solidFill>
+            <a:srgbClr val="B1192A"/>
+          </a:solidFill>
+          <a:ln>
+            <a:solidFill>
+              <a:srgbClr val="CDCDCD"/>
+            </a:solidFill>
+          </a:ln>
+        </p:spPr>
+        <p:style>
+          <a:lnRef idx="1">
+            <a:schemeClr val="accent1"/>
+          </a:lnRef>
+          <a:fillRef idx="3">
+            <a:schemeClr val="accent1"/>
+          </a:fillRef>
+          <a:effectRef idx="2">
+            <a:schemeClr val="accent1"/>
+          </a:effectRef>
+          <a:fontRef idx="minor">
+            <a:schemeClr val="lt1"/>
+          </a:fontRef>
+        </p:style>
+        <p:txBody>
+          <a:bodyPr rtlCol="0" anchor="ctr"/>
+          <a:lstStyle/>
+          <a:p>
+            <a:pPr algn="ctr">
+              <a:defRPr sz="1300" b="1">
+                <a:solidFill>
+                  <a:srgbClr val="FFFFFF"/>
+                </a:solidFill>
+              </a:defRPr>
+            </a:pPr>
+            <a:r>
+              <a:t>Chỉ số</a:t>
+            </a:r>
+          </a:p>
+        </p:txBody>
+      </p:sp>
+      <p:sp>
+        <p:nvSpPr>
+          <p:cNvPr id="9" name="Rectangle 8"/>
+          <p:cNvSpPr/>
+          <p:nvPr/>
+        </p:nvSpPr>
+        <p:spPr>
+          <a:xfrm>
+            <a:off x="3429000" y="1417320"/>
+            <a:ext cx="1828800" cy="502920"/>
+          </a:xfrm>
+          <a:prstGeom prst="rect">
+            <a:avLst/>
+          </a:prstGeom>
+          <a:solidFill>
+            <a:srgbClr val="B1192A"/>
+          </a:solidFill>
+          <a:ln>
+            <a:solidFill>
+              <a:srgbClr val="CDCDCD"/>
+            </a:solidFill>
+          </a:ln>
+        </p:spPr>
+        <p:style>
+          <a:lnRef idx="1">
+            <a:schemeClr val="accent1"/>
+          </a:lnRef>
+          <a:fillRef idx="3">
+            <a:schemeClr val="accent1"/>
+          </a:fillRef>
+          <a:effectRef idx="2">
+            <a:schemeClr val="accent1"/>
+          </a:effectRef>
+          <a:fontRef idx="minor">
+            <a:schemeClr val="lt1"/>
+          </a:fontRef>
+        </p:style>
+        <p:txBody>
+          <a:bodyPr rtlCol="0" anchor="ctr"/>
+          <a:lstStyle/>
+          <a:p>
+            <a:pPr algn="ctr">
+              <a:defRPr sz="1300" b="1">
+                <a:solidFill>
+                  <a:srgbClr val="FFFFFF"/>
+                </a:solidFill>
+              </a:defRPr>
+            </a:pPr>
+            <a:r>
+              <a:t>Default RF</a:t>
+            </a:r>
+          </a:p>
+        </p:txBody>
+      </p:sp>
+      <p:sp>
+        <p:nvSpPr>
+          <p:cNvPr id="10" name="Rectangle 9"/>
+          <p:cNvSpPr/>
+          <p:nvPr/>
+        </p:nvSpPr>
+        <p:spPr>
+          <a:xfrm>
+            <a:off x="5257800" y="1417320"/>
+            <a:ext cx="1828800" cy="502920"/>
+          </a:xfrm>
+          <a:prstGeom prst="rect">
+            <a:avLst/>
+          </a:prstGeom>
+          <a:solidFill>
+            <a:srgbClr val="B1192A"/>
+          </a:solidFill>
+          <a:ln>
+            <a:solidFill>
+              <a:srgbClr val="CDCDCD"/>
+            </a:solidFill>
+          </a:ln>
+        </p:spPr>
+        <p:style>
+          <a:lnRef idx="1">
+            <a:schemeClr val="accent1"/>
+          </a:lnRef>
+          <a:fillRef idx="3">
+            <a:schemeClr val="accent1"/>
+          </a:fillRef>
+          <a:effectRef idx="2">
+            <a:schemeClr val="accent1"/>
+          </a:effectRef>
+          <a:fontRef idx="minor">
+            <a:schemeClr val="lt1"/>
+          </a:fontRef>
+        </p:style>
+        <p:txBody>
+          <a:bodyPr rtlCol="0" anchor="ctr"/>
+          <a:lstStyle/>
+          <a:p>
+            <a:pPr algn="ctr">
+              <a:defRPr sz="1300" b="1">
+                <a:solidFill>
+                  <a:srgbClr val="FFFFFF"/>
+                </a:solidFill>
+              </a:defRPr>
+            </a:pPr>
+            <a:r>
+              <a:t>Random Search</a:t>
+            </a:r>
+          </a:p>
+        </p:txBody>
+      </p:sp>
+      <p:sp>
+        <p:nvSpPr>
+          <p:cNvPr id="11" name="Rectangle 10"/>
+          <p:cNvSpPr/>
+          <p:nvPr/>
+        </p:nvSpPr>
+        <p:spPr>
+          <a:xfrm>
+            <a:off x="594360" y="1920240"/>
+            <a:ext cx="2834640" cy="502920"/>
+          </a:xfrm>
+          <a:prstGeom prst="rect">
+            <a:avLst/>
+          </a:prstGeom>
+          <a:solidFill>
+            <a:srgbClr val="EBEEF2"/>
+          </a:solidFill>
+          <a:ln>
+            <a:solidFill>
+              <a:srgbClr val="CDCDCD"/>
+            </a:solidFill>
+          </a:ln>
+        </p:spPr>
+        <p:style>
+          <a:lnRef idx="1">
+            <a:schemeClr val="accent1"/>
+          </a:lnRef>
+          <a:fillRef idx="3">
+            <a:schemeClr val="accent1"/>
+          </a:fillRef>
+          <a:effectRef idx="2">
+            <a:schemeClr val="accent1"/>
+          </a:effectRef>
+          <a:fontRef idx="minor">
+            <a:schemeClr val="lt1"/>
+          </a:fontRef>
+        </p:style>
+        <p:txBody>
+          <a:bodyPr rtlCol="0" anchor="ctr"/>
+          <a:lstStyle/>
+          <a:p>
+            <a:pPr algn="ctr">
+              <a:defRPr sz="1300" b="0">
+                <a:solidFill>
+                  <a:srgbClr val="2B2B2B"/>
+                </a:solidFill>
+              </a:defRPr>
+            </a:pPr>
+            <a:r>
+              <a:t>CV Macro-F1</a:t>
+            </a:r>
+          </a:p>
+        </p:txBody>
+      </p:sp>
+      <p:sp>
+        <p:nvSpPr>
+          <p:cNvPr id="12" name="Rectangle 11"/>
+          <p:cNvSpPr/>
+          <p:nvPr/>
+        </p:nvSpPr>
+        <p:spPr>
+          <a:xfrm>
+            <a:off x="3429000" y="1920240"/>
+            <a:ext cx="1828800" cy="502920"/>
+          </a:xfrm>
+          <a:prstGeom prst="rect">
+            <a:avLst/>
+          </a:prstGeom>
+          <a:solidFill>
+            <a:srgbClr val="EBEEF2"/>
+          </a:solidFill>
+          <a:ln>
+            <a:solidFill>
+              <a:srgbClr val="CDCDCD"/>
+            </a:solidFill>
+          </a:ln>
+        </p:spPr>
+        <p:style>
+          <a:lnRef idx="1">
+            <a:schemeClr val="accent1"/>
+          </a:lnRef>
+          <a:fillRef idx="3">
+            <a:schemeClr val="accent1"/>
+          </a:fillRef>
+          <a:effectRef idx="2">
+            <a:schemeClr val="accent1"/>
+          </a:effectRef>
+          <a:fontRef idx="minor">
+            <a:schemeClr val="lt1"/>
+          </a:fontRef>
+        </p:style>
+        <p:txBody>
+          <a:bodyPr rtlCol="0" anchor="ctr"/>
+          <a:lstStyle/>
+          <a:p>
+            <a:pPr algn="ctr">
+              <a:defRPr sz="1300" b="0">
+                <a:solidFill>
+                  <a:srgbClr val="2B2B2B"/>
+                </a:solidFill>
+              </a:defRPr>
+            </a:pPr>
+            <a:r>
+              <a:t>0.9603</a:t>
+            </a:r>
+          </a:p>
+        </p:txBody>
+      </p:sp>
+      <p:sp>
+        <p:nvSpPr>
+          <p:cNvPr id="13" name="Rectangle 12"/>
+          <p:cNvSpPr/>
+          <p:nvPr/>
+        </p:nvSpPr>
+        <p:spPr>
+          <a:xfrm>
+            <a:off x="5257800" y="1920240"/>
+            <a:ext cx="1828800" cy="502920"/>
+          </a:xfrm>
+          <a:prstGeom prst="rect">
+            <a:avLst/>
+          </a:prstGeom>
+          <a:solidFill>
+            <a:srgbClr val="EBEEF2"/>
+          </a:solidFill>
+          <a:ln>
+            <a:solidFill>
+              <a:srgbClr val="CDCDCD"/>
+            </a:solidFill>
+          </a:ln>
+        </p:spPr>
+        <p:style>
+          <a:lnRef idx="1">
+            <a:schemeClr val="accent1"/>
+          </a:lnRef>
+          <a:fillRef idx="3">
+            <a:schemeClr val="accent1"/>
+          </a:fillRef>
+          <a:effectRef idx="2">
+            <a:schemeClr val="accent1"/>
+          </a:effectRef>
+          <a:fontRef idx="minor">
+            <a:schemeClr val="lt1"/>
+          </a:fontRef>
+        </p:style>
+        <p:txBody>
+          <a:bodyPr rtlCol="0" anchor="ctr"/>
+          <a:lstStyle/>
+          <a:p>
+            <a:pPr algn="ctr">
+              <a:defRPr sz="1300" b="0">
+                <a:solidFill>
+                  <a:srgbClr val="2B2B2B"/>
+                </a:solidFill>
+              </a:defRPr>
+            </a:pPr>
+            <a:r>
+              <a:t>0.9576</a:t>
+            </a:r>
+          </a:p>
+        </p:txBody>
+      </p:sp>
+      <p:sp>
+        <p:nvSpPr>
+          <p:cNvPr id="14" name="Rectangle 13"/>
+          <p:cNvSpPr/>
+          <p:nvPr/>
+        </p:nvSpPr>
+        <p:spPr>
+          <a:xfrm>
+            <a:off x="594360" y="2423160"/>
+            <a:ext cx="2834640" cy="502920"/>
+          </a:xfrm>
+          <a:prstGeom prst="rect">
+            <a:avLst/>
+          </a:prstGeom>
+          <a:solidFill>
+            <a:srgbClr val="FFFFFF"/>
+          </a:solidFill>
+          <a:ln>
+            <a:solidFill>
+              <a:srgbClr val="CDCDCD"/>
+            </a:solidFill>
+          </a:ln>
+        </p:spPr>
+        <p:style>
+          <a:lnRef idx="1">
+            <a:schemeClr val="accent1"/>
+          </a:lnRef>
+          <a:fillRef idx="3">
+            <a:schemeClr val="accent1"/>
+          </a:fillRef>
+          <a:effectRef idx="2">
+            <a:schemeClr val="accent1"/>
+          </a:effectRef>
+          <a:fontRef idx="minor">
+            <a:schemeClr val="lt1"/>
+          </a:fontRef>
+        </p:style>
+        <p:txBody>
+          <a:bodyPr rtlCol="0" anchor="ctr"/>
+          <a:lstStyle/>
+          <a:p>
+            <a:pPr algn="ctr">
+              <a:defRPr sz="1300" b="0">
+                <a:solidFill>
+                  <a:srgbClr val="2B2B2B"/>
+                </a:solidFill>
+              </a:defRPr>
+            </a:pPr>
+            <a:r>
+              <a:t>CV std</a:t>
+            </a:r>
+          </a:p>
+        </p:txBody>
+      </p:sp>
+      <p:sp>
+        <p:nvSpPr>
+          <p:cNvPr id="15" name="Rectangle 14"/>
+          <p:cNvSpPr/>
+          <p:nvPr/>
+        </p:nvSpPr>
+        <p:spPr>
+          <a:xfrm>
+            <a:off x="3429000" y="2423160"/>
+            <a:ext cx="1828800" cy="502920"/>
+          </a:xfrm>
+          <a:prstGeom prst="rect">
+            <a:avLst/>
+          </a:prstGeom>
+          <a:solidFill>
+            <a:srgbClr val="FFFFFF"/>
+          </a:solidFill>
+          <a:ln>
+            <a:solidFill>
+              <a:srgbClr val="CDCDCD"/>
+            </a:solidFill>
+          </a:ln>
+        </p:spPr>
+        <p:style>
+          <a:lnRef idx="1">
+            <a:schemeClr val="accent1"/>
+          </a:lnRef>
+          <a:fillRef idx="3">
+            <a:schemeClr val="accent1"/>
+          </a:fillRef>
+          <a:effectRef idx="2">
+            <a:schemeClr val="accent1"/>
+          </a:effectRef>
+          <a:fontRef idx="minor">
+            <a:schemeClr val="lt1"/>
+          </a:fontRef>
+        </p:style>
+        <p:txBody>
+          <a:bodyPr rtlCol="0" anchor="ctr"/>
+          <a:lstStyle/>
+          <a:p>
+            <a:pPr algn="ctr">
+              <a:defRPr sz="1300" b="0">
+                <a:solidFill>
+                  <a:srgbClr val="2B2B2B"/>
+                </a:solidFill>
+              </a:defRPr>
+            </a:pPr>
+            <a:r>
+              <a:t>0.0188</a:t>
+            </a:r>
+          </a:p>
+        </p:txBody>
+      </p:sp>
+      <p:sp>
+        <p:nvSpPr>
+          <p:cNvPr id="16" name="Rectangle 15"/>
+          <p:cNvSpPr/>
+          <p:nvPr/>
+        </p:nvSpPr>
+        <p:spPr>
+          <a:xfrm>
+            <a:off x="5257800" y="2423160"/>
+            <a:ext cx="1828800" cy="502920"/>
+          </a:xfrm>
+          <a:prstGeom prst="rect">
+            <a:avLst/>
+          </a:prstGeom>
+          <a:solidFill>
+            <a:srgbClr val="FFFFFF"/>
+          </a:solidFill>
+          <a:ln>
+            <a:solidFill>
+              <a:srgbClr val="CDCDCD"/>
+            </a:solidFill>
+          </a:ln>
+        </p:spPr>
+        <p:style>
+          <a:lnRef idx="1">
+            <a:schemeClr val="accent1"/>
+          </a:lnRef>
+          <a:fillRef idx="3">
+            <a:schemeClr val="accent1"/>
+          </a:fillRef>
+          <a:effectRef idx="2">
+            <a:schemeClr val="accent1"/>
+          </a:effectRef>
+          <a:fontRef idx="minor">
+            <a:schemeClr val="lt1"/>
+          </a:fontRef>
+        </p:style>
+        <p:txBody>
+          <a:bodyPr rtlCol="0" anchor="ctr"/>
+          <a:lstStyle/>
+          <a:p>
+            <a:pPr algn="ctr">
+              <a:defRPr sz="1300" b="0">
+                <a:solidFill>
+                  <a:srgbClr val="2B2B2B"/>
+                </a:solidFill>
+              </a:defRPr>
+            </a:pPr>
+            <a:r>
+              <a:t>0.0190</a:t>
+            </a:r>
+          </a:p>
+        </p:txBody>
+      </p:sp>
+      <p:sp>
+        <p:nvSpPr>
+          <p:cNvPr id="17" name="Rectangle 16"/>
+          <p:cNvSpPr/>
+          <p:nvPr/>
+        </p:nvSpPr>
+        <p:spPr>
+          <a:xfrm>
+            <a:off x="594360" y="2926080"/>
+            <a:ext cx="2834640" cy="502920"/>
+          </a:xfrm>
+          <a:prstGeom prst="rect">
+            <a:avLst/>
+          </a:prstGeom>
+          <a:solidFill>
+            <a:srgbClr val="EBEEF2"/>
+          </a:solidFill>
+          <a:ln>
+            <a:solidFill>
+              <a:srgbClr val="CDCDCD"/>
+            </a:solidFill>
+          </a:ln>
+        </p:spPr>
+        <p:style>
+          <a:lnRef idx="1">
+            <a:schemeClr val="accent1"/>
+          </a:lnRef>
+          <a:fillRef idx="3">
+            <a:schemeClr val="accent1"/>
+          </a:fillRef>
+          <a:effectRef idx="2">
+            <a:schemeClr val="accent1"/>
+          </a:effectRef>
+          <a:fontRef idx="minor">
+            <a:schemeClr val="lt1"/>
+          </a:fontRef>
+        </p:style>
+        <p:txBody>
+          <a:bodyPr rtlCol="0" anchor="ctr"/>
+          <a:lstStyle/>
+          <a:p>
+            <a:pPr algn="ctr">
+              <a:defRPr sz="1300" b="0">
+                <a:solidFill>
+                  <a:srgbClr val="2B2B2B"/>
+                </a:solidFill>
+              </a:defRPr>
+            </a:pPr>
+            <a:r>
+              <a:t>Test Macro-F1</a:t>
+            </a:r>
+          </a:p>
+        </p:txBody>
+      </p:sp>
+      <p:sp>
+        <p:nvSpPr>
+          <p:cNvPr id="18" name="Rectangle 17"/>
+          <p:cNvSpPr/>
+          <p:nvPr/>
+        </p:nvSpPr>
+        <p:spPr>
+          <a:xfrm>
+            <a:off x="3429000" y="2926080"/>
+            <a:ext cx="1828800" cy="502920"/>
+          </a:xfrm>
+          <a:prstGeom prst="rect">
+            <a:avLst/>
+          </a:prstGeom>
+          <a:solidFill>
+            <a:srgbClr val="EBEEF2"/>
+          </a:solidFill>
+          <a:ln>
+            <a:solidFill>
+              <a:srgbClr val="CDCDCD"/>
+            </a:solidFill>
+          </a:ln>
+        </p:spPr>
+        <p:style>
+          <a:lnRef idx="1">
+            <a:schemeClr val="accent1"/>
+          </a:lnRef>
+          <a:fillRef idx="3">
+            <a:schemeClr val="accent1"/>
+          </a:fillRef>
+          <a:effectRef idx="2">
+            <a:schemeClr val="accent1"/>
+          </a:effectRef>
+          <a:fontRef idx="minor">
+            <a:schemeClr val="lt1"/>
+          </a:fontRef>
+        </p:style>
+        <p:txBody>
+          <a:bodyPr rtlCol="0" anchor="ctr"/>
+          <a:lstStyle/>
+          <a:p>
+            <a:pPr algn="ctr">
+              <a:defRPr sz="1300" b="0">
+                <a:solidFill>
+                  <a:srgbClr val="2B2B2B"/>
+                </a:solidFill>
+              </a:defRPr>
+            </a:pPr>
+            <a:r>
+              <a:t>0.9526</a:t>
+            </a:r>
+          </a:p>
+        </p:txBody>
+      </p:sp>
+      <p:sp>
+        <p:nvSpPr>
+          <p:cNvPr id="19" name="Rectangle 18"/>
+          <p:cNvSpPr/>
+          <p:nvPr/>
+        </p:nvSpPr>
+        <p:spPr>
+          <a:xfrm>
+            <a:off x="5257800" y="2926080"/>
+            <a:ext cx="1828800" cy="502920"/>
+          </a:xfrm>
+          <a:prstGeom prst="rect">
+            <a:avLst/>
+          </a:prstGeom>
+          <a:solidFill>
+            <a:srgbClr val="EBEEF2"/>
+          </a:solidFill>
+          <a:ln>
+            <a:solidFill>
+              <a:srgbClr val="CDCDCD"/>
+            </a:solidFill>
+          </a:ln>
+        </p:spPr>
+        <p:style>
+          <a:lnRef idx="1">
+            <a:schemeClr val="accent1"/>
+          </a:lnRef>
+          <a:fillRef idx="3">
+            <a:schemeClr val="accent1"/>
+          </a:fillRef>
+          <a:effectRef idx="2">
+            <a:schemeClr val="accent1"/>
+          </a:effectRef>
+          <a:fontRef idx="minor">
+            <a:schemeClr val="lt1"/>
+          </a:fontRef>
+        </p:style>
+        <p:txBody>
+          <a:bodyPr rtlCol="0" anchor="ctr"/>
+          <a:lstStyle/>
+          <a:p>
+            <a:pPr algn="ctr">
+              <a:defRPr sz="1300" b="0">
+                <a:solidFill>
+                  <a:srgbClr val="2B2B2B"/>
+                </a:solidFill>
+              </a:defRPr>
+            </a:pPr>
+            <a:r>
+              <a:t>0.9526</a:t>
+            </a:r>
+          </a:p>
+        </p:txBody>
+      </p:sp>
+      <p:sp>
+        <p:nvSpPr>
+          <p:cNvPr id="20" name="Rectangle 19"/>
+          <p:cNvSpPr/>
+          <p:nvPr/>
+        </p:nvSpPr>
+        <p:spPr>
+          <a:xfrm>
+            <a:off x="594360" y="3429000"/>
+            <a:ext cx="2834640" cy="502920"/>
+          </a:xfrm>
+          <a:prstGeom prst="rect">
+            <a:avLst/>
+          </a:prstGeom>
+          <a:solidFill>
+            <a:srgbClr val="FFFFFF"/>
+          </a:solidFill>
+          <a:ln>
+            <a:solidFill>
+              <a:srgbClr val="CDCDCD"/>
+            </a:solidFill>
+          </a:ln>
+        </p:spPr>
+        <p:style>
+          <a:lnRef idx="1">
+            <a:schemeClr val="accent1"/>
+          </a:lnRef>
+          <a:fillRef idx="3">
+            <a:schemeClr val="accent1"/>
+          </a:fillRef>
+          <a:effectRef idx="2">
+            <a:schemeClr val="accent1"/>
+          </a:effectRef>
+          <a:fontRef idx="minor">
+            <a:schemeClr val="lt1"/>
+          </a:fontRef>
+        </p:style>
+        <p:txBody>
+          <a:bodyPr rtlCol="0" anchor="ctr"/>
+          <a:lstStyle/>
+          <a:p>
+            <a:pPr algn="ctr">
+              <a:defRPr sz="1300" b="0">
+                <a:solidFill>
+                  <a:srgbClr val="2B2B2B"/>
+                </a:solidFill>
+              </a:defRPr>
+            </a:pPr>
+            <a:r>
+              <a:t>Test Accuracy</a:t>
+            </a:r>
+          </a:p>
+        </p:txBody>
+      </p:sp>
+      <p:sp>
+        <p:nvSpPr>
+          <p:cNvPr id="21" name="Rectangle 20"/>
+          <p:cNvSpPr/>
+          <p:nvPr/>
+        </p:nvSpPr>
+        <p:spPr>
+          <a:xfrm>
+            <a:off x="3429000" y="3429000"/>
+            <a:ext cx="1828800" cy="502920"/>
+          </a:xfrm>
+          <a:prstGeom prst="rect">
+            <a:avLst/>
+          </a:prstGeom>
+          <a:solidFill>
+            <a:srgbClr val="FFFFFF"/>
+          </a:solidFill>
+          <a:ln>
+            <a:solidFill>
+              <a:srgbClr val="CDCDCD"/>
+            </a:solidFill>
+          </a:ln>
+        </p:spPr>
+        <p:style>
+          <a:lnRef idx="1">
+            <a:schemeClr val="accent1"/>
+          </a:lnRef>
+          <a:fillRef idx="3">
+            <a:schemeClr val="accent1"/>
+          </a:fillRef>
+          <a:effectRef idx="2">
+            <a:schemeClr val="accent1"/>
+          </a:effectRef>
+          <a:fontRef idx="minor">
+            <a:schemeClr val="lt1"/>
+          </a:fontRef>
+        </p:style>
+        <p:txBody>
+          <a:bodyPr rtlCol="0" anchor="ctr"/>
+          <a:lstStyle/>
+          <a:p>
+            <a:pPr algn="ctr">
+              <a:defRPr sz="1300" b="0">
+                <a:solidFill>
+                  <a:srgbClr val="2B2B2B"/>
+                </a:solidFill>
+              </a:defRPr>
+            </a:pPr>
+            <a:r>
+              <a:t>0.9561</a:t>
+            </a:r>
+          </a:p>
+        </p:txBody>
+      </p:sp>
+      <p:sp>
+        <p:nvSpPr>
+          <p:cNvPr id="22" name="Rectangle 21"/>
+          <p:cNvSpPr/>
+          <p:nvPr/>
+        </p:nvSpPr>
+        <p:spPr>
+          <a:xfrm>
+            <a:off x="5257800" y="3429000"/>
+            <a:ext cx="1828800" cy="502920"/>
+          </a:xfrm>
+          <a:prstGeom prst="rect">
+            <a:avLst/>
+          </a:prstGeom>
+          <a:solidFill>
+            <a:srgbClr val="FFFFFF"/>
+          </a:solidFill>
+          <a:ln>
+            <a:solidFill>
+              <a:srgbClr val="CDCDCD"/>
+            </a:solidFill>
+          </a:ln>
+        </p:spPr>
+        <p:style>
+          <a:lnRef idx="1">
+            <a:schemeClr val="accent1"/>
+          </a:lnRef>
+          <a:fillRef idx="3">
+            <a:schemeClr val="accent1"/>
+          </a:fillRef>
+          <a:effectRef idx="2">
+            <a:schemeClr val="accent1"/>
+          </a:effectRef>
+          <a:fontRef idx="minor">
+            <a:schemeClr val="lt1"/>
+          </a:fontRef>
+        </p:style>
+        <p:txBody>
+          <a:bodyPr rtlCol="0" anchor="ctr"/>
+          <a:lstStyle/>
+          <a:p>
+            <a:pPr algn="ctr">
+              <a:defRPr sz="1300" b="0">
+                <a:solidFill>
+                  <a:srgbClr val="2B2B2B"/>
+                </a:solidFill>
+              </a:defRPr>
+            </a:pPr>
+            <a:r>
+              <a:t>0.9561</a:t>
+            </a:r>
+          </a:p>
+        </p:txBody>
+      </p:sp>
+      <p:sp>
+        <p:nvSpPr>
+          <p:cNvPr id="23" name="Rectangle 22"/>
+          <p:cNvSpPr/>
+          <p:nvPr/>
+        </p:nvSpPr>
+        <p:spPr>
+          <a:xfrm>
+            <a:off x="594360" y="3931920"/>
+            <a:ext cx="2834640" cy="502920"/>
+          </a:xfrm>
+          <a:prstGeom prst="rect">
+            <a:avLst/>
+          </a:prstGeom>
+          <a:solidFill>
+            <a:srgbClr val="EBEEF2"/>
+          </a:solidFill>
+          <a:ln>
+            <a:solidFill>
+              <a:srgbClr val="CDCDCD"/>
+            </a:solidFill>
+          </a:ln>
+        </p:spPr>
+        <p:style>
+          <a:lnRef idx="1">
+            <a:schemeClr val="accent1"/>
+          </a:lnRef>
+          <a:fillRef idx="3">
+            <a:schemeClr val="accent1"/>
+          </a:fillRef>
+          <a:effectRef idx="2">
+            <a:schemeClr val="accent1"/>
+          </a:effectRef>
+          <a:fontRef idx="minor">
+            <a:schemeClr val="lt1"/>
+          </a:fontRef>
+        </p:style>
+        <p:txBody>
+          <a:bodyPr rtlCol="0" anchor="ctr"/>
+          <a:lstStyle/>
+          <a:p>
+            <a:pPr algn="ctr">
+              <a:defRPr sz="1300" b="0">
+                <a:solidFill>
+                  <a:srgbClr val="2B2B2B"/>
+                </a:solidFill>
+              </a:defRPr>
+            </a:pPr>
+            <a:r>
+              <a:t>CV evaluation cost</a:t>
+            </a:r>
+          </a:p>
+        </p:txBody>
+      </p:sp>
+      <p:sp>
+        <p:nvSpPr>
+          <p:cNvPr id="24" name="Rectangle 23"/>
+          <p:cNvSpPr/>
+          <p:nvPr/>
+        </p:nvSpPr>
+        <p:spPr>
+          <a:xfrm>
+            <a:off x="3429000" y="3931920"/>
+            <a:ext cx="1828800" cy="502920"/>
+          </a:xfrm>
+          <a:prstGeom prst="rect">
+            <a:avLst/>
+          </a:prstGeom>
+          <a:solidFill>
+            <a:srgbClr val="EBEEF2"/>
+          </a:solidFill>
+          <a:ln>
+            <a:solidFill>
+              <a:srgbClr val="CDCDCD"/>
+            </a:solidFill>
+          </a:ln>
+        </p:spPr>
+        <p:style>
+          <a:lnRef idx="1">
+            <a:schemeClr val="accent1"/>
+          </a:lnRef>
+          <a:fillRef idx="3">
+            <a:schemeClr val="accent1"/>
+          </a:fillRef>
+          <a:effectRef idx="2">
+            <a:schemeClr val="accent1"/>
+          </a:effectRef>
+          <a:fontRef idx="minor">
+            <a:schemeClr val="lt1"/>
+          </a:fontRef>
+        </p:style>
+        <p:txBody>
+          <a:bodyPr rtlCol="0" anchor="ctr"/>
+          <a:lstStyle/>
+          <a:p>
+            <a:pPr algn="ctr">
+              <a:defRPr sz="1300" b="0">
+                <a:solidFill>
+                  <a:srgbClr val="2B2B2B"/>
+                </a:solidFill>
+              </a:defRPr>
+            </a:pPr>
+            <a:r>
+              <a:t>0.98s</a:t>
+            </a:r>
+          </a:p>
+        </p:txBody>
+      </p:sp>
+      <p:sp>
+        <p:nvSpPr>
+          <p:cNvPr id="25" name="Rectangle 24"/>
+          <p:cNvSpPr/>
+          <p:nvPr/>
+        </p:nvSpPr>
+        <p:spPr>
+          <a:xfrm>
+            <a:off x="5257800" y="3931920"/>
+            <a:ext cx="1828800" cy="502920"/>
+          </a:xfrm>
+          <a:prstGeom prst="rect">
+            <a:avLst/>
+          </a:prstGeom>
+          <a:solidFill>
+            <a:srgbClr val="EBEEF2"/>
+          </a:solidFill>
+          <a:ln>
+            <a:solidFill>
+              <a:srgbClr val="CDCDCD"/>
+            </a:solidFill>
+          </a:ln>
+        </p:spPr>
+        <p:style>
+          <a:lnRef idx="1">
+            <a:schemeClr val="accent1"/>
+          </a:lnRef>
+          <a:fillRef idx="3">
+            <a:schemeClr val="accent1"/>
+          </a:fillRef>
+          <a:effectRef idx="2">
+            <a:schemeClr val="accent1"/>
+          </a:effectRef>
+          <a:fontRef idx="minor">
+            <a:schemeClr val="lt1"/>
+          </a:fontRef>
+        </p:style>
+        <p:txBody>
+          <a:bodyPr rtlCol="0" anchor="ctr"/>
+          <a:lstStyle/>
+          <a:p>
+            <a:pPr algn="ctr">
+              <a:defRPr sz="1300" b="0">
+                <a:solidFill>
+                  <a:srgbClr val="2B2B2B"/>
+                </a:solidFill>
+              </a:defRPr>
+            </a:pPr>
+            <a:r>
+              <a:t>14.96s</a:t>
+            </a:r>
+          </a:p>
+        </p:txBody>
+      </p:sp>
+      <p:sp>
+        <p:nvSpPr>
+          <p:cNvPr id="26" name="Rectangle 25"/>
+          <p:cNvSpPr/>
+          <p:nvPr/>
+        </p:nvSpPr>
+        <p:spPr>
+          <a:xfrm>
+            <a:off x="594360" y="4434840"/>
+            <a:ext cx="2834640" cy="502920"/>
+          </a:xfrm>
+          <a:prstGeom prst="rect">
+            <a:avLst/>
+          </a:prstGeom>
+          <a:solidFill>
+            <a:srgbClr val="FFFFFF"/>
+          </a:solidFill>
+          <a:ln>
+            <a:solidFill>
+              <a:srgbClr val="CDCDCD"/>
+            </a:solidFill>
+          </a:ln>
+        </p:spPr>
+        <p:style>
+          <a:lnRef idx="1">
+            <a:schemeClr val="accent1"/>
+          </a:lnRef>
+          <a:fillRef idx="3">
+            <a:schemeClr val="accent1"/>
+          </a:fillRef>
+          <a:effectRef idx="2">
+            <a:schemeClr val="accent1"/>
+          </a:effectRef>
+          <a:fontRef idx="minor">
+            <a:schemeClr val="lt1"/>
+          </a:fontRef>
+        </p:style>
+        <p:txBody>
+          <a:bodyPr rtlCol="0" anchor="ctr"/>
+          <a:lstStyle/>
+          <a:p>
+            <a:pPr algn="ctr">
+              <a:defRPr sz="1300" b="0">
+                <a:solidFill>
+                  <a:srgbClr val="2B2B2B"/>
+                </a:solidFill>
+              </a:defRPr>
+            </a:pPr>
+            <a:r>
+              <a:t>Final fit time</a:t>
+            </a:r>
+          </a:p>
+        </p:txBody>
+      </p:sp>
+      <p:sp>
+        <p:nvSpPr>
+          <p:cNvPr id="27" name="Rectangle 26"/>
+          <p:cNvSpPr/>
+          <p:nvPr/>
+        </p:nvSpPr>
+        <p:spPr>
+          <a:xfrm>
+            <a:off x="3429000" y="4434840"/>
+            <a:ext cx="1828800" cy="502920"/>
+          </a:xfrm>
+          <a:prstGeom prst="rect">
+            <a:avLst/>
+          </a:prstGeom>
+          <a:solidFill>
+            <a:srgbClr val="FFFFFF"/>
+          </a:solidFill>
+          <a:ln>
+            <a:solidFill>
+              <a:srgbClr val="CDCDCD"/>
+            </a:solidFill>
+          </a:ln>
+        </p:spPr>
+        <p:style>
+          <a:lnRef idx="1">
+            <a:schemeClr val="accent1"/>
+          </a:lnRef>
+          <a:fillRef idx="3">
+            <a:schemeClr val="accent1"/>
+          </a:fillRef>
+          <a:effectRef idx="2">
+            <a:schemeClr val="accent1"/>
+          </a:effectRef>
+          <a:fontRef idx="minor">
+            <a:schemeClr val="lt1"/>
+          </a:fontRef>
+        </p:style>
+        <p:txBody>
+          <a:bodyPr rtlCol="0" anchor="ctr"/>
+          <a:lstStyle/>
+          <a:p>
+            <a:pPr algn="ctr">
+              <a:defRPr sz="1300" b="0">
+                <a:solidFill>
+                  <a:srgbClr val="2B2B2B"/>
+                </a:solidFill>
+              </a:defRPr>
+            </a:pPr>
+            <a:r>
+              <a:t>0.171s</a:t>
+            </a:r>
+          </a:p>
+        </p:txBody>
+      </p:sp>
+      <p:sp>
+        <p:nvSpPr>
+          <p:cNvPr id="28" name="Rectangle 27"/>
+          <p:cNvSpPr/>
+          <p:nvPr/>
+        </p:nvSpPr>
+        <p:spPr>
+          <a:xfrm>
+            <a:off x="5257800" y="4434840"/>
+            <a:ext cx="1828800" cy="502920"/>
+          </a:xfrm>
+          <a:prstGeom prst="rect">
+            <a:avLst/>
+          </a:prstGeom>
+          <a:solidFill>
+            <a:srgbClr val="FFFFFF"/>
+          </a:solidFill>
+          <a:ln>
+            <a:solidFill>
+              <a:srgbClr val="CDCDCD"/>
+            </a:solidFill>
+          </a:ln>
+        </p:spPr>
+        <p:style>
+          <a:lnRef idx="1">
+            <a:schemeClr val="accent1"/>
+          </a:lnRef>
+          <a:fillRef idx="3">
+            <a:schemeClr val="accent1"/>
+          </a:fillRef>
+          <a:effectRef idx="2">
+            <a:schemeClr val="accent1"/>
+          </a:effectRef>
+          <a:fontRef idx="minor">
+            <a:schemeClr val="lt1"/>
+          </a:fontRef>
+        </p:style>
+        <p:txBody>
+          <a:bodyPr rtlCol="0" anchor="ctr"/>
+          <a:lstStyle/>
+          <a:p>
+            <a:pPr algn="ctr">
+              <a:defRPr sz="1300" b="0">
+                <a:solidFill>
+                  <a:srgbClr val="2B2B2B"/>
+                </a:solidFill>
+              </a:defRPr>
+            </a:pPr>
+            <a:r>
+              <a:t>0.135s</a:t>
+            </a:r>
+          </a:p>
+        </p:txBody>
+      </p:sp>
+      <p:sp>
+        <p:nvSpPr>
+          <p:cNvPr id="29" name="Rounded Rectangle 28"/>
+          <p:cNvSpPr/>
+          <p:nvPr/>
+        </p:nvSpPr>
+        <p:spPr>
+          <a:xfrm>
+            <a:off x="7726679" y="1417320"/>
+            <a:ext cx="3840480" cy="1463040"/>
+          </a:xfrm>
+          <a:prstGeom prst="roundRect">
+            <a:avLst/>
+          </a:prstGeom>
+          <a:solidFill>
+            <a:srgbClr val="FFFFFF"/>
+          </a:solidFill>
+          <a:ln>
+            <a:solidFill>
+              <a:srgbClr val="EBEEF2"/>
+            </a:solidFill>
+          </a:ln>
+        </p:spPr>
+        <p:style>
+          <a:lnRef idx="1">
+            <a:schemeClr val="accent1"/>
+          </a:lnRef>
+          <a:fillRef idx="3">
+            <a:schemeClr val="accent1"/>
+          </a:fillRef>
+          <a:effectRef idx="2">
+            <a:schemeClr val="accent1"/>
+          </a:effectRef>
+          <a:fontRef idx="minor">
+            <a:schemeClr val="lt1"/>
+          </a:fontRef>
+        </p:style>
+        <p:txBody>
+          <a:bodyPr rtlCol="0" anchor="ctr"/>
+          <a:lstStyle/>
+          <a:p>
+            <a:pPr algn="ctr"/>
+          </a:p>
+        </p:txBody>
+      </p:sp>
+      <p:sp>
+        <p:nvSpPr>
+          <p:cNvPr id="30" name="Rectangle 29"/>
+          <p:cNvSpPr/>
+          <p:nvPr/>
+        </p:nvSpPr>
+        <p:spPr>
+          <a:xfrm>
+            <a:off x="7726679" y="1417320"/>
+            <a:ext cx="109728" cy="1463040"/>
+          </a:xfrm>
+          <a:prstGeom prst="rect">
+            <a:avLst/>
+          </a:prstGeom>
+          <a:solidFill>
+            <a:srgbClr val="3A8A5E"/>
+          </a:solidFill>
+          <a:ln>
+            <a:noFill/>
+          </a:ln>
+        </p:spPr>
+        <p:style>
+          <a:lnRef idx="1">
+            <a:schemeClr val="accent1"/>
+          </a:lnRef>
+          <a:fillRef idx="3">
+            <a:schemeClr val="accent1"/>
+          </a:fillRef>
+          <a:effectRef idx="2">
+            <a:schemeClr val="accent1"/>
+          </a:effectRef>
+          <a:fontRef idx="minor">
+            <a:schemeClr val="lt1"/>
+          </a:fontRef>
+        </p:style>
+        <p:txBody>
+          <a:bodyPr rtlCol="0" anchor="ctr"/>
+          <a:lstStyle/>
+          <a:p>
+            <a:pPr algn="ctr"/>
+          </a:p>
+        </p:txBody>
+      </p:sp>
+      <p:sp>
+        <p:nvSpPr>
+          <p:cNvPr id="31" name="TextBox 30"/>
+          <p:cNvSpPr txBox="1"/>
+          <p:nvPr/>
+        </p:nvSpPr>
+        <p:spPr>
+          <a:xfrm>
+            <a:off x="7891271" y="1490472"/>
+            <a:ext cx="3611880" cy="228600"/>
+          </a:xfrm>
+          <a:prstGeom prst="rect">
+            <a:avLst/>
+          </a:prstGeom>
+          <a:noFill/>
+          <a:ln>
+            <a:noFill/>
+          </a:ln>
+        </p:spPr>
+        <p:txBody>
+          <a:bodyPr wrap="square" lIns="45720" rIns="45720">
+            <a:spAutoFit/>
+          </a:bodyPr>
+          <a:lstStyle/>
+          <a:p>
+            <a:pPr algn="l">
+              <a:defRPr sz="1600" b="1">
+                <a:solidFill>
+                  <a:srgbClr val="2B2B2B"/>
+                </a:solidFill>
+              </a:defRPr>
+            </a:pPr>
+            <a:r>
+              <a:t>Cấu hình tốt nhất</a:t>
+            </a:r>
+          </a:p>
+        </p:txBody>
+      </p:sp>
+      <p:sp>
+        <p:nvSpPr>
+          <p:cNvPr id="32" name="TextBox 31"/>
+          <p:cNvSpPr txBox="1"/>
+          <p:nvPr/>
+        </p:nvSpPr>
+        <p:spPr>
+          <a:xfrm>
+            <a:off x="7891271" y="1755648"/>
+            <a:ext cx="3584448" cy="1078992"/>
+          </a:xfrm>
+          <a:prstGeom prst="rect">
+            <a:avLst/>
+          </a:prstGeom>
+          <a:noFill/>
+          <a:ln>
+            <a:noFill/>
+          </a:ln>
+        </p:spPr>
+        <p:txBody>
+          <a:bodyPr wrap="square" lIns="45720" rIns="45720">
+            <a:spAutoFit/>
+          </a:bodyPr>
+          <a:lstStyle/>
+          <a:p>
+            <a:pPr algn="l">
+              <a:defRPr sz="1300" b="0">
+                <a:solidFill>
+                  <a:srgbClr val="5A5A5A"/>
+                </a:solidFill>
+              </a:defRPr>
+            </a:pPr>
+            <a:r>
+              <a:t>n_estimators = 80</a:t>
+            </a:r>
+            <a:br/>
+            <a:r>
+              <a:t>max_depth = 5</a:t>
+            </a:r>
+            <a:br/>
+            <a:r>
+              <a:t>min_samples_split = 4</a:t>
+            </a:r>
+            <a:br/>
+            <a:r>
+              <a:t>min_samples_leaf = 2</a:t>
+            </a:r>
+          </a:p>
+        </p:txBody>
+      </p:sp>
+      <p:sp>
+        <p:nvSpPr>
+          <p:cNvPr id="33" name="Rounded Rectangle 32"/>
+          <p:cNvSpPr/>
+          <p:nvPr/>
+        </p:nvSpPr>
+        <p:spPr>
+          <a:xfrm>
+            <a:off x="7726679" y="3108960"/>
+            <a:ext cx="3840480" cy="1554480"/>
+          </a:xfrm>
+          <a:prstGeom prst="roundRect">
+            <a:avLst/>
+          </a:prstGeom>
+          <a:solidFill>
+            <a:srgbClr val="FFFFFF"/>
+          </a:solidFill>
+          <a:ln>
+            <a:solidFill>
+              <a:srgbClr val="EBEEF2"/>
+            </a:solidFill>
+          </a:ln>
+        </p:spPr>
+        <p:style>
+          <a:lnRef idx="1">
+            <a:schemeClr val="accent1"/>
+          </a:lnRef>
+          <a:fillRef idx="3">
+            <a:schemeClr val="accent1"/>
+          </a:fillRef>
+          <a:effectRef idx="2">
+            <a:schemeClr val="accent1"/>
+          </a:effectRef>
+          <a:fontRef idx="minor">
+            <a:schemeClr val="lt1"/>
+          </a:fontRef>
+        </p:style>
+        <p:txBody>
+          <a:bodyPr rtlCol="0" anchor="ctr"/>
+          <a:lstStyle/>
+          <a:p>
+            <a:pPr algn="ctr"/>
+          </a:p>
+        </p:txBody>
+      </p:sp>
+      <p:sp>
+        <p:nvSpPr>
+          <p:cNvPr id="34" name="Rectangle 33"/>
+          <p:cNvSpPr/>
+          <p:nvPr/>
+        </p:nvSpPr>
+        <p:spPr>
+          <a:xfrm>
+            <a:off x="7726679" y="3108960"/>
+            <a:ext cx="109728" cy="1554480"/>
+          </a:xfrm>
+          <a:prstGeom prst="rect">
+            <a:avLst/>
+          </a:prstGeom>
+          <a:solidFill>
+            <a:srgbClr val="B1192A"/>
+          </a:solidFill>
+          <a:ln>
+            <a:noFill/>
+          </a:ln>
+        </p:spPr>
+        <p:style>
+          <a:lnRef idx="1">
+            <a:schemeClr val="accent1"/>
+          </a:lnRef>
+          <a:fillRef idx="3">
+            <a:schemeClr val="accent1"/>
+          </a:fillRef>
+          <a:effectRef idx="2">
+            <a:schemeClr val="accent1"/>
+          </a:effectRef>
+          <a:fontRef idx="minor">
+            <a:schemeClr val="lt1"/>
+          </a:fontRef>
+        </p:style>
+        <p:txBody>
+          <a:bodyPr rtlCol="0" anchor="ctr"/>
+          <a:lstStyle/>
+          <a:p>
+            <a:pPr algn="ctr"/>
+          </a:p>
+        </p:txBody>
+      </p:sp>
+      <p:sp>
+        <p:nvSpPr>
+          <p:cNvPr id="35" name="TextBox 34"/>
+          <p:cNvSpPr txBox="1"/>
+          <p:nvPr/>
+        </p:nvSpPr>
+        <p:spPr>
+          <a:xfrm>
+            <a:off x="7891271" y="3182112"/>
+            <a:ext cx="3611880" cy="228600"/>
+          </a:xfrm>
+          <a:prstGeom prst="rect">
+            <a:avLst/>
+          </a:prstGeom>
+          <a:noFill/>
+          <a:ln>
+            <a:noFill/>
+          </a:ln>
+        </p:spPr>
+        <p:txBody>
+          <a:bodyPr wrap="square" lIns="45720" rIns="45720">
+            <a:spAutoFit/>
+          </a:bodyPr>
+          <a:lstStyle/>
+          <a:p>
+            <a:pPr algn="l">
+              <a:defRPr sz="1600" b="1">
+                <a:solidFill>
+                  <a:srgbClr val="2B2B2B"/>
+                </a:solidFill>
+              </a:defRPr>
+            </a:pPr>
+            <a:r>
+              <a:t>Nhận xét nhanh</a:t>
+            </a:r>
+          </a:p>
+        </p:txBody>
+      </p:sp>
+      <p:sp>
+        <p:nvSpPr>
+          <p:cNvPr id="36" name="TextBox 35"/>
+          <p:cNvSpPr txBox="1"/>
+          <p:nvPr/>
+        </p:nvSpPr>
+        <p:spPr>
+          <a:xfrm>
+            <a:off x="7891271" y="3447288"/>
+            <a:ext cx="3584448" cy="1170432"/>
+          </a:xfrm>
+          <a:prstGeom prst="rect">
+            <a:avLst/>
+          </a:prstGeom>
+          <a:noFill/>
+          <a:ln>
+            <a:noFill/>
+          </a:ln>
+        </p:spPr>
+        <p:txBody>
+          <a:bodyPr wrap="square" lIns="45720" rIns="45720">
+            <a:spAutoFit/>
+          </a:bodyPr>
+          <a:lstStyle/>
+          <a:p>
+            <a:pPr algn="l">
+              <a:defRPr sz="1300" b="0">
+                <a:solidFill>
+                  <a:srgbClr val="5A5A5A"/>
+                </a:solidFill>
+              </a:defRPr>
+            </a:pPr>
+            <a:r>
+              <a:t>• Baseline có CV Macro-F1 cao hơn 0.0027</a:t>
+            </a:r>
+            <a:br/>
+            <a:r>
+              <a:t>• Test Macro-F1 của hai mô hình bằng nhau</a:t>
+            </a:r>
+            <a:br/>
+            <a:r>
+              <a:t>• Search tốn thêm khoảng 14.96 giây</a:t>
+            </a:r>
+          </a:p>
+        </p:txBody>
+      </p:sp>
+      <p:sp>
+        <p:nvSpPr>
+          <p:cNvPr id="37" name="Rounded Rectangle 36"/>
+          <p:cNvSpPr/>
+          <p:nvPr/>
+        </p:nvSpPr>
+        <p:spPr>
+          <a:xfrm>
+            <a:off x="7726679" y="4892040"/>
+            <a:ext cx="3840480" cy="868680"/>
+          </a:xfrm>
+          <a:prstGeom prst="roundRect">
+            <a:avLst/>
+          </a:prstGeom>
+          <a:solidFill>
+            <a:srgbClr val="FFFFFF"/>
+          </a:solidFill>
+          <a:ln>
+            <a:solidFill>
+              <a:srgbClr val="EBEEF2"/>
+            </a:solidFill>
+          </a:ln>
+        </p:spPr>
+        <p:style>
+          <a:lnRef idx="1">
+            <a:schemeClr val="accent1"/>
+          </a:lnRef>
+          <a:fillRef idx="3">
+            <a:schemeClr val="accent1"/>
+          </a:fillRef>
+          <a:effectRef idx="2">
+            <a:schemeClr val="accent1"/>
+          </a:effectRef>
+          <a:fontRef idx="minor">
+            <a:schemeClr val="lt1"/>
+          </a:fontRef>
+        </p:style>
+        <p:txBody>
+          <a:bodyPr rtlCol="0" anchor="ctr"/>
+          <a:lstStyle/>
+          <a:p>
+            <a:pPr algn="ctr"/>
+          </a:p>
+        </p:txBody>
+      </p:sp>
+      <p:sp>
+        <p:nvSpPr>
+          <p:cNvPr id="38" name="Rectangle 37"/>
+          <p:cNvSpPr/>
+          <p:nvPr/>
+        </p:nvSpPr>
+        <p:spPr>
+          <a:xfrm>
+            <a:off x="7726679" y="4892040"/>
+            <a:ext cx="109728" cy="868680"/>
+          </a:xfrm>
+          <a:prstGeom prst="rect">
+            <a:avLst/>
+          </a:prstGeom>
+          <a:solidFill>
+            <a:srgbClr val="2C5D86"/>
+          </a:solidFill>
+          <a:ln>
+            <a:noFill/>
+          </a:ln>
+        </p:spPr>
+        <p:style>
+          <a:lnRef idx="1">
+            <a:schemeClr val="accent1"/>
+          </a:lnRef>
+          <a:fillRef idx="3">
+            <a:schemeClr val="accent1"/>
+          </a:fillRef>
+          <a:effectRef idx="2">
+            <a:schemeClr val="accent1"/>
+          </a:effectRef>
+          <a:fontRef idx="minor">
+            <a:schemeClr val="lt1"/>
+          </a:fontRef>
+        </p:style>
+        <p:txBody>
+          <a:bodyPr rtlCol="0" anchor="ctr"/>
+          <a:lstStyle/>
+          <a:p>
+            <a:pPr algn="ctr"/>
+          </a:p>
+        </p:txBody>
+      </p:sp>
+      <p:sp>
+        <p:nvSpPr>
+          <p:cNvPr id="39" name="TextBox 38"/>
+          <p:cNvSpPr txBox="1"/>
+          <p:nvPr/>
+        </p:nvSpPr>
+        <p:spPr>
+          <a:xfrm>
+            <a:off x="7891271" y="4965192"/>
+            <a:ext cx="3611880" cy="228600"/>
+          </a:xfrm>
+          <a:prstGeom prst="rect">
+            <a:avLst/>
+          </a:prstGeom>
+          <a:noFill/>
+          <a:ln>
+            <a:noFill/>
+          </a:ln>
+        </p:spPr>
+        <p:txBody>
+          <a:bodyPr wrap="square" lIns="45720" rIns="45720">
+            <a:spAutoFit/>
+          </a:bodyPr>
+          <a:lstStyle/>
+          <a:p>
+            <a:pPr algn="l">
+              <a:defRPr sz="1600" b="1">
+                <a:solidFill>
+                  <a:srgbClr val="2B2B2B"/>
+                </a:solidFill>
+              </a:defRPr>
+            </a:pPr>
+            <a:r>
+              <a:t>Quyết định</a:t>
+            </a:r>
+          </a:p>
+        </p:txBody>
+      </p:sp>
+      <p:sp>
+        <p:nvSpPr>
+          <p:cNvPr id="40" name="TextBox 39"/>
+          <p:cNvSpPr txBox="1"/>
+          <p:nvPr/>
+        </p:nvSpPr>
+        <p:spPr>
+          <a:xfrm>
+            <a:off x="7891271" y="5230368"/>
+            <a:ext cx="3584448" cy="484632"/>
+          </a:xfrm>
+          <a:prstGeom prst="rect">
+            <a:avLst/>
+          </a:prstGeom>
+          <a:noFill/>
+          <a:ln>
+            <a:noFill/>
+          </a:ln>
+        </p:spPr>
+        <p:txBody>
+          <a:bodyPr wrap="square" lIns="45720" rIns="45720">
+            <a:spAutoFit/>
+          </a:bodyPr>
+          <a:lstStyle/>
+          <a:p>
+            <a:pPr algn="l">
+              <a:defRPr sz="1300" b="0">
+                <a:solidFill>
+                  <a:srgbClr val="5A5A5A"/>
+                </a:solidFill>
+              </a:defRPr>
+            </a:pPr>
+            <a:r>
+              <a:t>Giữ Random Forest mặc định cho benchmark này.</a:t>
             </a:r>
           </a:p>
         </p:txBody>
@@ -3923,14 +9646,6 @@
 <file path=ppt/slides/slide6.xml><?xml version="1.0" encoding="utf-8"?>
 <p:sld xmlns:a="http://schemas.openxmlformats.org/drawingml/2006/main" xmlns:p="http://schemas.openxmlformats.org/presentationml/2006/main" xmlns:r="http://schemas.openxmlformats.org/officeDocument/2006/relationships">
   <p:cSld>
-    <p:bg>
-      <p:bgPr>
-        <a:solidFill>
-          <a:srgbClr val="F7FAFC"/>
-        </a:solidFill>
-        <a:effectLst/>
-      </p:bgPr>
-    </p:bg>
     <p:spTree>
       <p:nvGrpSpPr>
         <p:cNvPr id="1" name=""/>
@@ -3940,42 +9655,93 @@
       <p:grpSpPr/>
       <p:sp>
         <p:nvSpPr>
-          <p:cNvPr id="2" name="TextBox 1"/>
-          <p:cNvSpPr txBox="1"/>
-          <p:nvPr/>
-        </p:nvSpPr>
-        <p:spPr>
-          <a:xfrm>
-            <a:off x="548640" y="347472"/>
-            <a:ext cx="11247120" cy="640080"/>
-          </a:xfrm>
-          <a:prstGeom prst="rect">
-            <a:avLst/>
-          </a:prstGeom>
-          <a:noFill/>
-        </p:spPr>
-        <p:txBody>
-          <a:bodyPr wrap="none">
-            <a:spAutoFit/>
-          </a:bodyPr>
-          <a:lstStyle/>
-          <a:p>
-            <a:pPr>
-              <a:defRPr sz="3000" b="1">
-                <a:solidFill>
-                  <a:srgbClr val="0E5C67"/>
-                </a:solidFill>
-              </a:defRPr>
-            </a:pPr>
-            <a:r>
-              <a:t>So sánh chất lượng</a:t>
-            </a:r>
+          <p:cNvPr id="2" name="Rectangle 1"/>
+          <p:cNvSpPr/>
+          <p:nvPr/>
+        </p:nvSpPr>
+        <p:spPr>
+          <a:xfrm>
+            <a:off x="0" y="0"/>
+            <a:ext cx="12191695" cy="6858000"/>
+          </a:xfrm>
+          <a:prstGeom prst="rect">
+            <a:avLst/>
+          </a:prstGeom>
+          <a:solidFill>
+            <a:srgbClr val="FFFFFF"/>
+          </a:solidFill>
+          <a:ln>
+            <a:noFill/>
+          </a:ln>
+        </p:spPr>
+        <p:style>
+          <a:lnRef idx="1">
+            <a:schemeClr val="accent1"/>
+          </a:lnRef>
+          <a:fillRef idx="3">
+            <a:schemeClr val="accent1"/>
+          </a:fillRef>
+          <a:effectRef idx="2">
+            <a:schemeClr val="accent1"/>
+          </a:effectRef>
+          <a:fontRef idx="minor">
+            <a:schemeClr val="lt1"/>
+          </a:fontRef>
+        </p:style>
+        <p:txBody>
+          <a:bodyPr rtlCol="0" anchor="ctr"/>
+          <a:lstStyle/>
+          <a:p>
+            <a:pPr algn="ctr"/>
+          </a:p>
+        </p:txBody>
+      </p:sp>
+      <p:sp>
+        <p:nvSpPr>
+          <p:cNvPr id="3" name="Rectangle 2"/>
+          <p:cNvSpPr/>
+          <p:nvPr/>
+        </p:nvSpPr>
+        <p:spPr>
+          <a:xfrm>
+            <a:off x="0" y="0"/>
+            <a:ext cx="12191695" cy="320040"/>
+          </a:xfrm>
+          <a:prstGeom prst="rect">
+            <a:avLst/>
+          </a:prstGeom>
+          <a:solidFill>
+            <a:srgbClr val="B1192A"/>
+          </a:solidFill>
+          <a:ln>
+            <a:noFill/>
+          </a:ln>
+        </p:spPr>
+        <p:style>
+          <a:lnRef idx="1">
+            <a:schemeClr val="accent1"/>
+          </a:lnRef>
+          <a:fillRef idx="3">
+            <a:schemeClr val="accent1"/>
+          </a:fillRef>
+          <a:effectRef idx="2">
+            <a:schemeClr val="accent1"/>
+          </a:effectRef>
+          <a:fontRef idx="minor">
+            <a:schemeClr val="lt1"/>
+          </a:fontRef>
+        </p:style>
+        <p:txBody>
+          <a:bodyPr rtlCol="0" anchor="ctr"/>
+          <a:lstStyle/>
+          <a:p>
+            <a:pPr algn="ctr"/>
           </a:p>
         </p:txBody>
       </p:sp>
       <p:pic>
         <p:nvPicPr>
-          <p:cNvPr id="3" name="Picture 2" descr="comparison.png"/>
+          <p:cNvPr id="4" name="Picture 3" descr="image1.png"/>
           <p:cNvPicPr>
             <a:picLocks noChangeAspect="1"/>
           </p:cNvPicPr>
@@ -3989,8 +9755,8 @@
         </p:blipFill>
         <p:spPr>
           <a:xfrm>
-            <a:off x="3246120" y="1188720"/>
-            <a:ext cx="6217920" cy="3813658"/>
+            <a:off x="228600" y="411480"/>
+            <a:ext cx="384048" cy="457200"/>
           </a:xfrm>
           <a:prstGeom prst="rect">
             <a:avLst/>
@@ -3999,14 +9765,66 @@
       </p:pic>
       <p:sp>
         <p:nvSpPr>
-          <p:cNvPr id="4" name="TextBox 3"/>
+          <p:cNvPr id="5" name="Rectangle 4"/>
+          <p:cNvSpPr/>
+          <p:nvPr/>
+        </p:nvSpPr>
+        <p:spPr>
+          <a:xfrm>
+            <a:off x="0" y="6537960"/>
+            <a:ext cx="12191695" cy="320040"/>
+          </a:xfrm>
+          <a:prstGeom prst="rect">
+            <a:avLst/>
+          </a:prstGeom>
+          <a:solidFill>
+            <a:srgbClr val="B1192A"/>
+          </a:solidFill>
+          <a:ln>
+            <a:noFill/>
+          </a:ln>
+        </p:spPr>
+        <p:style>
+          <a:lnRef idx="1">
+            <a:schemeClr val="accent1"/>
+          </a:lnRef>
+          <a:fillRef idx="3">
+            <a:schemeClr val="accent1"/>
+          </a:fillRef>
+          <a:effectRef idx="2">
+            <a:schemeClr val="accent1"/>
+          </a:effectRef>
+          <a:fontRef idx="minor">
+            <a:schemeClr val="lt1"/>
+          </a:fontRef>
+        </p:style>
+        <p:txBody>
+          <a:bodyPr rtlCol="0" anchor="ctr"/>
+          <a:lstStyle/>
+          <a:p>
+            <a:pPr algn="ctr">
+              <a:defRPr sz="1200">
+                <a:solidFill>
+                  <a:srgbClr val="FFFFFF"/>
+                </a:solidFill>
+              </a:defRPr>
+            </a:pPr>
+            <a:r>
+              <a:t>Nhập môn Tối ưu hóa  •  Bài tập lớn cá nhân  •  Phạm Phú Vĩnh</a:t>
+            </a:r>
+          </a:p>
+        </p:txBody>
+      </p:sp>
+      <p:sp>
+        <p:nvSpPr>
+          <p:cNvPr id="6" name="TextBox 5"/>
           <p:cNvSpPr txBox="1"/>
           <p:nvPr/>
         </p:nvSpPr>
         <p:spPr>
           <a:xfrm>
-            <a:off x="548640" y="6464808"/>
-            <a:ext cx="11064240" cy="182880"/>
+            <a:off x="822960" y="502920"/>
+            <a:ext cx="8686800" cy="502920"/>
           </a:xfrm>
           <a:prstGeom prst="rect">
             <a:avLst/>
@@ -4020,14 +9838,569 @@
           <a:lstStyle/>
           <a:p>
             <a:pPr>
-              <a:defRPr sz="900">
-                <a:solidFill>
-                  <a:srgbClr val="647378"/>
+              <a:defRPr sz="2400" b="1">
+                <a:solidFill>
+                  <a:srgbClr val="2B2B2B"/>
                 </a:solidFill>
               </a:defRPr>
             </a:pPr>
             <a:r>
-              <a:t>Nhập môn Tối ưu hóa  •  GitHub Portfolio  •  Kết quả từ Python logs</a:t>
+              <a:t>5. Biểu đồ hội tụ</a:t>
+            </a:r>
+          </a:p>
+        </p:txBody>
+      </p:sp>
+      <p:sp>
+        <p:nvSpPr>
+          <p:cNvPr id="7" name="TextBox 6"/>
+          <p:cNvSpPr txBox="1"/>
+          <p:nvPr/>
+        </p:nvSpPr>
+        <p:spPr>
+          <a:xfrm>
+            <a:off x="868680" y="941832"/>
+            <a:ext cx="8686800" cy="274320"/>
+          </a:xfrm>
+          <a:prstGeom prst="rect">
+            <a:avLst/>
+          </a:prstGeom>
+          <a:noFill/>
+        </p:spPr>
+        <p:txBody>
+          <a:bodyPr wrap="none">
+            <a:spAutoFit/>
+          </a:bodyPr>
+          <a:lstStyle/>
+          <a:p>
+            <a:pPr>
+              <a:defRPr sz="1100">
+                <a:solidFill>
+                  <a:srgbClr val="5A5A5A"/>
+                </a:solidFill>
+              </a:defRPr>
+            </a:pPr>
+            <a:r>
+              <a:t>Search history cho thấy cách nghiệm tốt nhất được cải thiện qua 30 lần thử</a:t>
+            </a:r>
+          </a:p>
+        </p:txBody>
+      </p:sp>
+      <p:pic>
+        <p:nvPicPr>
+          <p:cNvPr id="8" name="Picture 7" descr="convergence.png"/>
+          <p:cNvPicPr>
+            <a:picLocks noChangeAspect="1"/>
+          </p:cNvPicPr>
+          <p:nvPr/>
+        </p:nvPicPr>
+        <p:blipFill>
+          <a:blip r:embed="rId3"/>
+          <a:stretch>
+            <a:fillRect/>
+          </a:stretch>
+        </p:blipFill>
+        <p:spPr>
+          <a:xfrm>
+            <a:off x="731520" y="1325880"/>
+            <a:ext cx="7132320" cy="4389120"/>
+          </a:xfrm>
+          <a:prstGeom prst="rect">
+            <a:avLst/>
+          </a:prstGeom>
+        </p:spPr>
+      </p:pic>
+      <p:sp>
+        <p:nvSpPr>
+          <p:cNvPr id="9" name="Rounded Rectangle 8"/>
+          <p:cNvSpPr/>
+          <p:nvPr/>
+        </p:nvSpPr>
+        <p:spPr>
+          <a:xfrm>
+            <a:off x="8138160" y="1554480"/>
+            <a:ext cx="3383280" cy="1188720"/>
+          </a:xfrm>
+          <a:prstGeom prst="roundRect">
+            <a:avLst/>
+          </a:prstGeom>
+          <a:solidFill>
+            <a:srgbClr val="FFFFFF"/>
+          </a:solidFill>
+          <a:ln>
+            <a:solidFill>
+              <a:srgbClr val="EBEEF2"/>
+            </a:solidFill>
+          </a:ln>
+        </p:spPr>
+        <p:style>
+          <a:lnRef idx="1">
+            <a:schemeClr val="accent1"/>
+          </a:lnRef>
+          <a:fillRef idx="3">
+            <a:schemeClr val="accent1"/>
+          </a:fillRef>
+          <a:effectRef idx="2">
+            <a:schemeClr val="accent1"/>
+          </a:effectRef>
+          <a:fontRef idx="minor">
+            <a:schemeClr val="lt1"/>
+          </a:fontRef>
+        </p:style>
+        <p:txBody>
+          <a:bodyPr rtlCol="0" anchor="ctr"/>
+          <a:lstStyle/>
+          <a:p>
+            <a:pPr algn="ctr"/>
+          </a:p>
+        </p:txBody>
+      </p:sp>
+      <p:sp>
+        <p:nvSpPr>
+          <p:cNvPr id="10" name="Rectangle 9"/>
+          <p:cNvSpPr/>
+          <p:nvPr/>
+        </p:nvSpPr>
+        <p:spPr>
+          <a:xfrm>
+            <a:off x="8138160" y="1554480"/>
+            <a:ext cx="109728" cy="1188720"/>
+          </a:xfrm>
+          <a:prstGeom prst="rect">
+            <a:avLst/>
+          </a:prstGeom>
+          <a:solidFill>
+            <a:srgbClr val="2C5D86"/>
+          </a:solidFill>
+          <a:ln>
+            <a:noFill/>
+          </a:ln>
+        </p:spPr>
+        <p:style>
+          <a:lnRef idx="1">
+            <a:schemeClr val="accent1"/>
+          </a:lnRef>
+          <a:fillRef idx="3">
+            <a:schemeClr val="accent1"/>
+          </a:fillRef>
+          <a:effectRef idx="2">
+            <a:schemeClr val="accent1"/>
+          </a:effectRef>
+          <a:fontRef idx="minor">
+            <a:schemeClr val="lt1"/>
+          </a:fontRef>
+        </p:style>
+        <p:txBody>
+          <a:bodyPr rtlCol="0" anchor="ctr"/>
+          <a:lstStyle/>
+          <a:p>
+            <a:pPr algn="ctr"/>
+          </a:p>
+        </p:txBody>
+      </p:sp>
+      <p:sp>
+        <p:nvSpPr>
+          <p:cNvPr id="11" name="TextBox 10"/>
+          <p:cNvSpPr txBox="1"/>
+          <p:nvPr/>
+        </p:nvSpPr>
+        <p:spPr>
+          <a:xfrm>
+            <a:off x="8302752" y="1627632"/>
+            <a:ext cx="3154680" cy="228600"/>
+          </a:xfrm>
+          <a:prstGeom prst="rect">
+            <a:avLst/>
+          </a:prstGeom>
+          <a:noFill/>
+          <a:ln>
+            <a:noFill/>
+          </a:ln>
+        </p:spPr>
+        <p:txBody>
+          <a:bodyPr wrap="square" lIns="45720" rIns="45720">
+            <a:spAutoFit/>
+          </a:bodyPr>
+          <a:lstStyle/>
+          <a:p>
+            <a:pPr algn="l">
+              <a:defRPr sz="1600" b="1">
+                <a:solidFill>
+                  <a:srgbClr val="2B2B2B"/>
+                </a:solidFill>
+              </a:defRPr>
+            </a:pPr>
+            <a:r>
+              <a:t>Ý nghĩa biểu đồ</a:t>
+            </a:r>
+          </a:p>
+        </p:txBody>
+      </p:sp>
+      <p:sp>
+        <p:nvSpPr>
+          <p:cNvPr id="12" name="TextBox 11"/>
+          <p:cNvSpPr txBox="1"/>
+          <p:nvPr/>
+        </p:nvSpPr>
+        <p:spPr>
+          <a:xfrm>
+            <a:off x="8302752" y="1892808"/>
+            <a:ext cx="3127248" cy="804672"/>
+          </a:xfrm>
+          <a:prstGeom prst="rect">
+            <a:avLst/>
+          </a:prstGeom>
+          <a:noFill/>
+          <a:ln>
+            <a:noFill/>
+          </a:ln>
+        </p:spPr>
+        <p:txBody>
+          <a:bodyPr wrap="square" lIns="45720" rIns="45720">
+            <a:spAutoFit/>
+          </a:bodyPr>
+          <a:lstStyle/>
+          <a:p>
+            <a:pPr algn="l">
+              <a:defRPr sz="1300" b="0">
+                <a:solidFill>
+                  <a:srgbClr val="5A5A5A"/>
+                </a:solidFill>
+              </a:defRPr>
+            </a:pPr>
+            <a:r>
+              <a:t>• Mỗi chấm là CV Macro-F1 của một trial</a:t>
+            </a:r>
+            <a:br/>
+            <a:r>
+              <a:t>• Đường xanh đậm là best-so-far</a:t>
+            </a:r>
+          </a:p>
+        </p:txBody>
+      </p:sp>
+      <p:sp>
+        <p:nvSpPr>
+          <p:cNvPr id="13" name="Rounded Rectangle 12"/>
+          <p:cNvSpPr/>
+          <p:nvPr/>
+        </p:nvSpPr>
+        <p:spPr>
+          <a:xfrm>
+            <a:off x="8138160" y="2926080"/>
+            <a:ext cx="3383280" cy="1143000"/>
+          </a:xfrm>
+          <a:prstGeom prst="roundRect">
+            <a:avLst/>
+          </a:prstGeom>
+          <a:solidFill>
+            <a:srgbClr val="FFFFFF"/>
+          </a:solidFill>
+          <a:ln>
+            <a:solidFill>
+              <a:srgbClr val="EBEEF2"/>
+            </a:solidFill>
+          </a:ln>
+        </p:spPr>
+        <p:style>
+          <a:lnRef idx="1">
+            <a:schemeClr val="accent1"/>
+          </a:lnRef>
+          <a:fillRef idx="3">
+            <a:schemeClr val="accent1"/>
+          </a:fillRef>
+          <a:effectRef idx="2">
+            <a:schemeClr val="accent1"/>
+          </a:effectRef>
+          <a:fontRef idx="minor">
+            <a:schemeClr val="lt1"/>
+          </a:fontRef>
+        </p:style>
+        <p:txBody>
+          <a:bodyPr rtlCol="0" anchor="ctr"/>
+          <a:lstStyle/>
+          <a:p>
+            <a:pPr algn="ctr"/>
+          </a:p>
+        </p:txBody>
+      </p:sp>
+      <p:sp>
+        <p:nvSpPr>
+          <p:cNvPr id="14" name="Rectangle 13"/>
+          <p:cNvSpPr/>
+          <p:nvPr/>
+        </p:nvSpPr>
+        <p:spPr>
+          <a:xfrm>
+            <a:off x="8138160" y="2926080"/>
+            <a:ext cx="109728" cy="1143000"/>
+          </a:xfrm>
+          <a:prstGeom prst="rect">
+            <a:avLst/>
+          </a:prstGeom>
+          <a:solidFill>
+            <a:srgbClr val="B1192A"/>
+          </a:solidFill>
+          <a:ln>
+            <a:noFill/>
+          </a:ln>
+        </p:spPr>
+        <p:style>
+          <a:lnRef idx="1">
+            <a:schemeClr val="accent1"/>
+          </a:lnRef>
+          <a:fillRef idx="3">
+            <a:schemeClr val="accent1"/>
+          </a:fillRef>
+          <a:effectRef idx="2">
+            <a:schemeClr val="accent1"/>
+          </a:effectRef>
+          <a:fontRef idx="minor">
+            <a:schemeClr val="lt1"/>
+          </a:fontRef>
+        </p:style>
+        <p:txBody>
+          <a:bodyPr rtlCol="0" anchor="ctr"/>
+          <a:lstStyle/>
+          <a:p>
+            <a:pPr algn="ctr"/>
+          </a:p>
+        </p:txBody>
+      </p:sp>
+      <p:sp>
+        <p:nvSpPr>
+          <p:cNvPr id="15" name="TextBox 14"/>
+          <p:cNvSpPr txBox="1"/>
+          <p:nvPr/>
+        </p:nvSpPr>
+        <p:spPr>
+          <a:xfrm>
+            <a:off x="8302752" y="2999232"/>
+            <a:ext cx="3154680" cy="228600"/>
+          </a:xfrm>
+          <a:prstGeom prst="rect">
+            <a:avLst/>
+          </a:prstGeom>
+          <a:noFill/>
+          <a:ln>
+            <a:noFill/>
+          </a:ln>
+        </p:spPr>
+        <p:txBody>
+          <a:bodyPr wrap="square" lIns="45720" rIns="45720">
+            <a:spAutoFit/>
+          </a:bodyPr>
+          <a:lstStyle/>
+          <a:p>
+            <a:pPr algn="l">
+              <a:defRPr sz="1600" b="1">
+                <a:solidFill>
+                  <a:srgbClr val="2B2B2B"/>
+                </a:solidFill>
+              </a:defRPr>
+            </a:pPr>
+            <a:r>
+              <a:t>Quan sát</a:t>
+            </a:r>
+          </a:p>
+        </p:txBody>
+      </p:sp>
+      <p:sp>
+        <p:nvSpPr>
+          <p:cNvPr id="16" name="TextBox 15"/>
+          <p:cNvSpPr txBox="1"/>
+          <p:nvPr/>
+        </p:nvSpPr>
+        <p:spPr>
+          <a:xfrm>
+            <a:off x="8302752" y="3264408"/>
+            <a:ext cx="3127248" cy="758952"/>
+          </a:xfrm>
+          <a:prstGeom prst="rect">
+            <a:avLst/>
+          </a:prstGeom>
+          <a:noFill/>
+          <a:ln>
+            <a:noFill/>
+          </a:ln>
+        </p:spPr>
+        <p:txBody>
+          <a:bodyPr wrap="square" lIns="45720" rIns="45720">
+            <a:spAutoFit/>
+          </a:bodyPr>
+          <a:lstStyle/>
+          <a:p>
+            <a:pPr algn="l">
+              <a:defRPr sz="1300" b="0">
+                <a:solidFill>
+                  <a:srgbClr val="5A5A5A"/>
+                </a:solidFill>
+              </a:defRPr>
+            </a:pPr>
+            <a:r>
+              <a:t>Điểm tốt nhất tăng dần và đạt cực đại khoảng mức 0.9576 trong ngân sách 30 trials.</a:t>
+            </a:r>
+          </a:p>
+        </p:txBody>
+      </p:sp>
+      <p:sp>
+        <p:nvSpPr>
+          <p:cNvPr id="17" name="Rounded Rectangle 16"/>
+          <p:cNvSpPr/>
+          <p:nvPr/>
+        </p:nvSpPr>
+        <p:spPr>
+          <a:xfrm>
+            <a:off x="8138160" y="4297680"/>
+            <a:ext cx="3383280" cy="1143000"/>
+          </a:xfrm>
+          <a:prstGeom prst="roundRect">
+            <a:avLst/>
+          </a:prstGeom>
+          <a:solidFill>
+            <a:srgbClr val="FFFFFF"/>
+          </a:solidFill>
+          <a:ln>
+            <a:solidFill>
+              <a:srgbClr val="EBEEF2"/>
+            </a:solidFill>
+          </a:ln>
+        </p:spPr>
+        <p:style>
+          <a:lnRef idx="1">
+            <a:schemeClr val="accent1"/>
+          </a:lnRef>
+          <a:fillRef idx="3">
+            <a:schemeClr val="accent1"/>
+          </a:fillRef>
+          <a:effectRef idx="2">
+            <a:schemeClr val="accent1"/>
+          </a:effectRef>
+          <a:fontRef idx="minor">
+            <a:schemeClr val="lt1"/>
+          </a:fontRef>
+        </p:style>
+        <p:txBody>
+          <a:bodyPr rtlCol="0" anchor="ctr"/>
+          <a:lstStyle/>
+          <a:p>
+            <a:pPr algn="ctr"/>
+          </a:p>
+        </p:txBody>
+      </p:sp>
+      <p:sp>
+        <p:nvSpPr>
+          <p:cNvPr id="18" name="Rectangle 17"/>
+          <p:cNvSpPr/>
+          <p:nvPr/>
+        </p:nvSpPr>
+        <p:spPr>
+          <a:xfrm>
+            <a:off x="8138160" y="4297680"/>
+            <a:ext cx="109728" cy="1143000"/>
+          </a:xfrm>
+          <a:prstGeom prst="rect">
+            <a:avLst/>
+          </a:prstGeom>
+          <a:solidFill>
+            <a:srgbClr val="3A8A5E"/>
+          </a:solidFill>
+          <a:ln>
+            <a:noFill/>
+          </a:ln>
+        </p:spPr>
+        <p:style>
+          <a:lnRef idx="1">
+            <a:schemeClr val="accent1"/>
+          </a:lnRef>
+          <a:fillRef idx="3">
+            <a:schemeClr val="accent1"/>
+          </a:fillRef>
+          <a:effectRef idx="2">
+            <a:schemeClr val="accent1"/>
+          </a:effectRef>
+          <a:fontRef idx="minor">
+            <a:schemeClr val="lt1"/>
+          </a:fontRef>
+        </p:style>
+        <p:txBody>
+          <a:bodyPr rtlCol="0" anchor="ctr"/>
+          <a:lstStyle/>
+          <a:p>
+            <a:pPr algn="ctr"/>
+          </a:p>
+        </p:txBody>
+      </p:sp>
+      <p:sp>
+        <p:nvSpPr>
+          <p:cNvPr id="19" name="TextBox 18"/>
+          <p:cNvSpPr txBox="1"/>
+          <p:nvPr/>
+        </p:nvSpPr>
+        <p:spPr>
+          <a:xfrm>
+            <a:off x="8302752" y="4370832"/>
+            <a:ext cx="3154680" cy="228600"/>
+          </a:xfrm>
+          <a:prstGeom prst="rect">
+            <a:avLst/>
+          </a:prstGeom>
+          <a:noFill/>
+          <a:ln>
+            <a:noFill/>
+          </a:ln>
+        </p:spPr>
+        <p:txBody>
+          <a:bodyPr wrap="square" lIns="45720" rIns="45720">
+            <a:spAutoFit/>
+          </a:bodyPr>
+          <a:lstStyle/>
+          <a:p>
+            <a:pPr algn="l">
+              <a:defRPr sz="1600" b="1">
+                <a:solidFill>
+                  <a:srgbClr val="2B2B2B"/>
+                </a:solidFill>
+              </a:defRPr>
+            </a:pPr>
+            <a:r>
+              <a:t>Kết luận</a:t>
+            </a:r>
+          </a:p>
+        </p:txBody>
+      </p:sp>
+      <p:sp>
+        <p:nvSpPr>
+          <p:cNvPr id="20" name="TextBox 19"/>
+          <p:cNvSpPr txBox="1"/>
+          <p:nvPr/>
+        </p:nvSpPr>
+        <p:spPr>
+          <a:xfrm>
+            <a:off x="8302752" y="4636008"/>
+            <a:ext cx="3127248" cy="758952"/>
+          </a:xfrm>
+          <a:prstGeom prst="rect">
+            <a:avLst/>
+          </a:prstGeom>
+          <a:noFill/>
+          <a:ln>
+            <a:noFill/>
+          </a:ln>
+        </p:spPr>
+        <p:txBody>
+          <a:bodyPr wrap="square" lIns="45720" rIns="45720">
+            <a:spAutoFit/>
+          </a:bodyPr>
+          <a:lstStyle/>
+          <a:p>
+            <a:pPr algn="l">
+              <a:defRPr sz="1300" b="0">
+                <a:solidFill>
+                  <a:srgbClr val="5A5A5A"/>
+                </a:solidFill>
+              </a:defRPr>
+            </a:pPr>
+            <a:r>
+              <a:t>Random Search có tìm được cấu hình tốt, nhưng vẫn chưa vượt baseline.</a:t>
             </a:r>
           </a:p>
         </p:txBody>
@@ -4043,14 +10416,6 @@
 <file path=ppt/slides/slide7.xml><?xml version="1.0" encoding="utf-8"?>
 <p:sld xmlns:a="http://schemas.openxmlformats.org/drawingml/2006/main" xmlns:p="http://schemas.openxmlformats.org/presentationml/2006/main" xmlns:r="http://schemas.openxmlformats.org/officeDocument/2006/relationships">
   <p:cSld>
-    <p:bg>
-      <p:bgPr>
-        <a:solidFill>
-          <a:srgbClr val="F7FAFC"/>
-        </a:solidFill>
-        <a:effectLst/>
-      </p:bgPr>
-    </p:bg>
     <p:spTree>
       <p:nvGrpSpPr>
         <p:cNvPr id="1" name=""/>
@@ -4060,14 +10425,176 @@
       <p:grpSpPr/>
       <p:sp>
         <p:nvSpPr>
-          <p:cNvPr id="2" name="TextBox 1"/>
+          <p:cNvPr id="2" name="Rectangle 1"/>
+          <p:cNvSpPr/>
+          <p:nvPr/>
+        </p:nvSpPr>
+        <p:spPr>
+          <a:xfrm>
+            <a:off x="0" y="0"/>
+            <a:ext cx="12191695" cy="6858000"/>
+          </a:xfrm>
+          <a:prstGeom prst="rect">
+            <a:avLst/>
+          </a:prstGeom>
+          <a:solidFill>
+            <a:srgbClr val="FFFFFF"/>
+          </a:solidFill>
+          <a:ln>
+            <a:noFill/>
+          </a:ln>
+        </p:spPr>
+        <p:style>
+          <a:lnRef idx="1">
+            <a:schemeClr val="accent1"/>
+          </a:lnRef>
+          <a:fillRef idx="3">
+            <a:schemeClr val="accent1"/>
+          </a:fillRef>
+          <a:effectRef idx="2">
+            <a:schemeClr val="accent1"/>
+          </a:effectRef>
+          <a:fontRef idx="minor">
+            <a:schemeClr val="lt1"/>
+          </a:fontRef>
+        </p:style>
+        <p:txBody>
+          <a:bodyPr rtlCol="0" anchor="ctr"/>
+          <a:lstStyle/>
+          <a:p>
+            <a:pPr algn="ctr"/>
+          </a:p>
+        </p:txBody>
+      </p:sp>
+      <p:sp>
+        <p:nvSpPr>
+          <p:cNvPr id="3" name="Rectangle 2"/>
+          <p:cNvSpPr/>
+          <p:nvPr/>
+        </p:nvSpPr>
+        <p:spPr>
+          <a:xfrm>
+            <a:off x="0" y="0"/>
+            <a:ext cx="12191695" cy="320040"/>
+          </a:xfrm>
+          <a:prstGeom prst="rect">
+            <a:avLst/>
+          </a:prstGeom>
+          <a:solidFill>
+            <a:srgbClr val="B1192A"/>
+          </a:solidFill>
+          <a:ln>
+            <a:noFill/>
+          </a:ln>
+        </p:spPr>
+        <p:style>
+          <a:lnRef idx="1">
+            <a:schemeClr val="accent1"/>
+          </a:lnRef>
+          <a:fillRef idx="3">
+            <a:schemeClr val="accent1"/>
+          </a:fillRef>
+          <a:effectRef idx="2">
+            <a:schemeClr val="accent1"/>
+          </a:effectRef>
+          <a:fontRef idx="minor">
+            <a:schemeClr val="lt1"/>
+          </a:fontRef>
+        </p:style>
+        <p:txBody>
+          <a:bodyPr rtlCol="0" anchor="ctr"/>
+          <a:lstStyle/>
+          <a:p>
+            <a:pPr algn="ctr"/>
+          </a:p>
+        </p:txBody>
+      </p:sp>
+      <p:pic>
+        <p:nvPicPr>
+          <p:cNvPr id="4" name="Picture 3" descr="image1.png"/>
+          <p:cNvPicPr>
+            <a:picLocks noChangeAspect="1"/>
+          </p:cNvPicPr>
+          <p:nvPr/>
+        </p:nvPicPr>
+        <p:blipFill>
+          <a:blip r:embed="rId2"/>
+          <a:stretch>
+            <a:fillRect/>
+          </a:stretch>
+        </p:blipFill>
+        <p:spPr>
+          <a:xfrm>
+            <a:off x="228600" y="411480"/>
+            <a:ext cx="384048" cy="457200"/>
+          </a:xfrm>
+          <a:prstGeom prst="rect">
+            <a:avLst/>
+          </a:prstGeom>
+        </p:spPr>
+      </p:pic>
+      <p:sp>
+        <p:nvSpPr>
+          <p:cNvPr id="5" name="Rectangle 4"/>
+          <p:cNvSpPr/>
+          <p:nvPr/>
+        </p:nvSpPr>
+        <p:spPr>
+          <a:xfrm>
+            <a:off x="0" y="6537960"/>
+            <a:ext cx="12191695" cy="320040"/>
+          </a:xfrm>
+          <a:prstGeom prst="rect">
+            <a:avLst/>
+          </a:prstGeom>
+          <a:solidFill>
+            <a:srgbClr val="B1192A"/>
+          </a:solidFill>
+          <a:ln>
+            <a:noFill/>
+          </a:ln>
+        </p:spPr>
+        <p:style>
+          <a:lnRef idx="1">
+            <a:schemeClr val="accent1"/>
+          </a:lnRef>
+          <a:fillRef idx="3">
+            <a:schemeClr val="accent1"/>
+          </a:fillRef>
+          <a:effectRef idx="2">
+            <a:schemeClr val="accent1"/>
+          </a:effectRef>
+          <a:fontRef idx="minor">
+            <a:schemeClr val="lt1"/>
+          </a:fontRef>
+        </p:style>
+        <p:txBody>
+          <a:bodyPr rtlCol="0" anchor="ctr"/>
+          <a:lstStyle/>
+          <a:p>
+            <a:pPr algn="ctr">
+              <a:defRPr sz="1200">
+                <a:solidFill>
+                  <a:srgbClr val="FFFFFF"/>
+                </a:solidFill>
+              </a:defRPr>
+            </a:pPr>
+            <a:r>
+              <a:t>Nhập môn Tối ưu hóa  •  Bài tập lớn cá nhân  •  Phạm Phú Vĩnh</a:t>
+            </a:r>
+          </a:p>
+        </p:txBody>
+      </p:sp>
+      <p:sp>
+        <p:nvSpPr>
+          <p:cNvPr id="6" name="TextBox 5"/>
           <p:cNvSpPr txBox="1"/>
           <p:nvPr/>
         </p:nvSpPr>
         <p:spPr>
           <a:xfrm>
-            <a:off x="548640" y="347472"/>
-            <a:ext cx="11247120" cy="640080"/>
+            <a:off x="822960" y="502920"/>
+            <a:ext cx="8686800" cy="502920"/>
           </a:xfrm>
           <a:prstGeom prst="rect">
             <a:avLst/>
@@ -4081,126 +10608,28 @@
           <a:lstStyle/>
           <a:p>
             <a:pPr>
-              <a:defRPr sz="3000" b="1">
-                <a:solidFill>
-                  <a:srgbClr val="0E5C67"/>
+              <a:defRPr sz="2400" b="1">
+                <a:solidFill>
+                  <a:srgbClr val="2B2B2B"/>
                 </a:solidFill>
               </a:defRPr>
             </a:pPr>
             <a:r>
-              <a:t>Kết luận &amp; Demo</a:t>
-            </a:r>
-          </a:p>
-        </p:txBody>
-      </p:sp>
-      <p:sp>
-        <p:nvSpPr>
-          <p:cNvPr id="3" name="TextBox 2"/>
+              <a:t>6. So sánh kết quả &amp; kết luận</a:t>
+            </a:r>
+          </a:p>
+        </p:txBody>
+      </p:sp>
+      <p:sp>
+        <p:nvSpPr>
+          <p:cNvPr id="7" name="TextBox 6"/>
           <p:cNvSpPr txBox="1"/>
           <p:nvPr/>
         </p:nvSpPr>
         <p:spPr>
           <a:xfrm>
-            <a:off x="731520" y="1234440"/>
-            <a:ext cx="10789920" cy="5120640"/>
-          </a:xfrm>
-          <a:prstGeom prst="rect">
-            <a:avLst/>
-          </a:prstGeom>
-          <a:noFill/>
-        </p:spPr>
-        <p:txBody>
-          <a:bodyPr wrap="square">
-            <a:spAutoFit/>
-          </a:bodyPr>
-          <a:lstStyle/>
-          <a:p>
-            <a:pPr>
-              <a:spcAft>
-                <a:spcPts val="1900"/>
-              </a:spcAft>
-              <a:defRPr sz="2200">
-                <a:solidFill>
-                  <a:srgbClr val="253744"/>
-                </a:solidFill>
-              </a:defRPr>
-            </a:pPr>
-            <a:r>
-              <a:t>CV macro-F1: Default 0.9603 vs Search 0.9576</a:t>
-            </a:r>
-          </a:p>
-          <a:p>
-            <a:pPr>
-              <a:spcAft>
-                <a:spcPts val="1900"/>
-              </a:spcAft>
-              <a:defRPr sz="2200">
-                <a:solidFill>
-                  <a:srgbClr val="253744"/>
-                </a:solidFill>
-              </a:defRPr>
-            </a:pPr>
-            <a:r>
-              <a:t>Test macro-F1: hai mô hình đều 0.9526</a:t>
-            </a:r>
-          </a:p>
-          <a:p>
-            <a:pPr>
-              <a:spcAft>
-                <a:spcPts val="1900"/>
-              </a:spcAft>
-              <a:defRPr sz="2200">
-                <a:solidFill>
-                  <a:srgbClr val="253744"/>
-                </a:solidFill>
-              </a:defRPr>
-            </a:pPr>
-            <a:r>
-              <a:t>Chi phí tìm kiếm: 14.9s cho 30 trials</a:t>
-            </a:r>
-          </a:p>
-          <a:p>
-            <a:pPr>
-              <a:spcAft>
-                <a:spcPts val="1900"/>
-              </a:spcAft>
-              <a:defRPr sz="2200">
-                <a:solidFill>
-                  <a:srgbClr val="253744"/>
-                </a:solidFill>
-              </a:defRPr>
-            </a:pPr>
-            <a:r>
-              <a:t>Quyết định: giữ cấu hình mặc định trong phạm vi thử nghiệm</a:t>
-            </a:r>
-          </a:p>
-          <a:p>
-            <a:pPr>
-              <a:spcAft>
-                <a:spcPts val="1900"/>
-              </a:spcAft>
-              <a:defRPr sz="2200">
-                <a:solidFill>
-                  <a:srgbClr val="253744"/>
-                </a:solidFill>
-              </a:defRPr>
-            </a:pPr>
-            <a:r>
-              <a:t>Demo: run_experiments.py → CSV → figures → README</a:t>
-            </a:r>
-          </a:p>
-        </p:txBody>
-      </p:sp>
-      <p:sp>
-        <p:nvSpPr>
-          <p:cNvPr id="4" name="TextBox 3"/>
-          <p:cNvSpPr txBox="1"/>
-          <p:nvPr/>
-        </p:nvSpPr>
-        <p:spPr>
-          <a:xfrm>
-            <a:off x="548640" y="6464808"/>
-            <a:ext cx="11064240" cy="182880"/>
+            <a:off x="868680" y="941832"/>
+            <a:ext cx="8686800" cy="274320"/>
           </a:xfrm>
           <a:prstGeom prst="rect">
             <a:avLst/>
@@ -4214,14 +10643,276 @@
           <a:lstStyle/>
           <a:p>
             <a:pPr>
-              <a:defRPr sz="900">
-                <a:solidFill>
-                  <a:srgbClr val="647378"/>
+              <a:defRPr sz="1100">
+                <a:solidFill>
+                  <a:srgbClr val="5A5A5A"/>
                 </a:solidFill>
               </a:defRPr>
             </a:pPr>
             <a:r>
-              <a:t>Nhập môn Tối ưu hóa  •  GitHub Portfolio  •  Kết quả từ Python logs</a:t>
+              <a:t>So sánh trực quan và thông điệp chính cần trình bày khi bảo vệ</a:t>
+            </a:r>
+          </a:p>
+        </p:txBody>
+      </p:sp>
+      <p:pic>
+        <p:nvPicPr>
+          <p:cNvPr id="8" name="Picture 7" descr="comparison.png"/>
+          <p:cNvPicPr>
+            <a:picLocks noChangeAspect="1"/>
+          </p:cNvPicPr>
+          <p:nvPr/>
+        </p:nvPicPr>
+        <p:blipFill>
+          <a:blip r:embed="rId3"/>
+          <a:stretch>
+            <a:fillRect/>
+          </a:stretch>
+        </p:blipFill>
+        <p:spPr>
+          <a:xfrm>
+            <a:off x="502920" y="1325880"/>
+            <a:ext cx="5486400" cy="2423160"/>
+          </a:xfrm>
+          <a:prstGeom prst="rect">
+            <a:avLst/>
+          </a:prstGeom>
+        </p:spPr>
+      </p:pic>
+      <p:pic>
+        <p:nvPicPr>
+          <p:cNvPr id="9" name="Picture 8" descr="tradeoff.png"/>
+          <p:cNvPicPr>
+            <a:picLocks noChangeAspect="1"/>
+          </p:cNvPicPr>
+          <p:nvPr/>
+        </p:nvPicPr>
+        <p:blipFill>
+          <a:blip r:embed="rId4"/>
+          <a:stretch>
+            <a:fillRect/>
+          </a:stretch>
+        </p:blipFill>
+        <p:spPr>
+          <a:xfrm>
+            <a:off x="6217920" y="1325880"/>
+            <a:ext cx="5440680" cy="2423160"/>
+          </a:xfrm>
+          <a:prstGeom prst="rect">
+            <a:avLst/>
+          </a:prstGeom>
+        </p:spPr>
+      </p:pic>
+      <p:sp>
+        <p:nvSpPr>
+          <p:cNvPr id="10" name="Rounded Rectangle 9"/>
+          <p:cNvSpPr/>
+          <p:nvPr/>
+        </p:nvSpPr>
+        <p:spPr>
+          <a:xfrm>
+            <a:off x="548640" y="3977639"/>
+            <a:ext cx="11064240" cy="1508760"/>
+          </a:xfrm>
+          <a:prstGeom prst="roundRect">
+            <a:avLst/>
+          </a:prstGeom>
+          <a:solidFill>
+            <a:srgbClr val="FFFFFF"/>
+          </a:solidFill>
+          <a:ln>
+            <a:solidFill>
+              <a:srgbClr val="EBEEF2"/>
+            </a:solidFill>
+          </a:ln>
+        </p:spPr>
+        <p:style>
+          <a:lnRef idx="1">
+            <a:schemeClr val="accent1"/>
+          </a:lnRef>
+          <a:fillRef idx="3">
+            <a:schemeClr val="accent1"/>
+          </a:fillRef>
+          <a:effectRef idx="2">
+            <a:schemeClr val="accent1"/>
+          </a:effectRef>
+          <a:fontRef idx="minor">
+            <a:schemeClr val="lt1"/>
+          </a:fontRef>
+        </p:style>
+        <p:txBody>
+          <a:bodyPr rtlCol="0" anchor="ctr"/>
+          <a:lstStyle/>
+          <a:p>
+            <a:pPr algn="ctr"/>
+          </a:p>
+        </p:txBody>
+      </p:sp>
+      <p:sp>
+        <p:nvSpPr>
+          <p:cNvPr id="11" name="Rectangle 10"/>
+          <p:cNvSpPr/>
+          <p:nvPr/>
+        </p:nvSpPr>
+        <p:spPr>
+          <a:xfrm>
+            <a:off x="548640" y="3977639"/>
+            <a:ext cx="109728" cy="1508760"/>
+          </a:xfrm>
+          <a:prstGeom prst="rect">
+            <a:avLst/>
+          </a:prstGeom>
+          <a:solidFill>
+            <a:srgbClr val="B1192A"/>
+          </a:solidFill>
+          <a:ln>
+            <a:noFill/>
+          </a:ln>
+        </p:spPr>
+        <p:style>
+          <a:lnRef idx="1">
+            <a:schemeClr val="accent1"/>
+          </a:lnRef>
+          <a:fillRef idx="3">
+            <a:schemeClr val="accent1"/>
+          </a:fillRef>
+          <a:effectRef idx="2">
+            <a:schemeClr val="accent1"/>
+          </a:effectRef>
+          <a:fontRef idx="minor">
+            <a:schemeClr val="lt1"/>
+          </a:fontRef>
+        </p:style>
+        <p:txBody>
+          <a:bodyPr rtlCol="0" anchor="ctr"/>
+          <a:lstStyle/>
+          <a:p>
+            <a:pPr algn="ctr"/>
+          </a:p>
+        </p:txBody>
+      </p:sp>
+      <p:sp>
+        <p:nvSpPr>
+          <p:cNvPr id="12" name="TextBox 11"/>
+          <p:cNvSpPr txBox="1"/>
+          <p:nvPr/>
+        </p:nvSpPr>
+        <p:spPr>
+          <a:xfrm>
+            <a:off x="713232" y="4050791"/>
+            <a:ext cx="10835640" cy="228600"/>
+          </a:xfrm>
+          <a:prstGeom prst="rect">
+            <a:avLst/>
+          </a:prstGeom>
+          <a:noFill/>
+          <a:ln>
+            <a:noFill/>
+          </a:ln>
+        </p:spPr>
+        <p:txBody>
+          <a:bodyPr wrap="square" lIns="45720" rIns="45720">
+            <a:spAutoFit/>
+          </a:bodyPr>
+          <a:lstStyle/>
+          <a:p>
+            <a:pPr algn="l">
+              <a:defRPr sz="1600" b="1">
+                <a:solidFill>
+                  <a:srgbClr val="2B2B2B"/>
+                </a:solidFill>
+              </a:defRPr>
+            </a:pPr>
+            <a:r>
+              <a:t>Kết luận cuối cùng</a:t>
+            </a:r>
+          </a:p>
+        </p:txBody>
+      </p:sp>
+      <p:sp>
+        <p:nvSpPr>
+          <p:cNvPr id="13" name="TextBox 12"/>
+          <p:cNvSpPr txBox="1"/>
+          <p:nvPr/>
+        </p:nvSpPr>
+        <p:spPr>
+          <a:xfrm>
+            <a:off x="713232" y="4315967"/>
+            <a:ext cx="10808208" cy="1124712"/>
+          </a:xfrm>
+          <a:prstGeom prst="rect">
+            <a:avLst/>
+          </a:prstGeom>
+          <a:noFill/>
+          <a:ln>
+            <a:noFill/>
+          </a:ln>
+        </p:spPr>
+        <p:txBody>
+          <a:bodyPr wrap="square" lIns="45720" rIns="45720">
+            <a:spAutoFit/>
+          </a:bodyPr>
+          <a:lstStyle/>
+          <a:p>
+            <a:pPr algn="l">
+              <a:defRPr sz="1300" b="0">
+                <a:solidFill>
+                  <a:srgbClr val="5A5A5A"/>
+                </a:solidFill>
+              </a:defRPr>
+            </a:pPr>
+            <a:r>
+              <a:t>• Default RF: CV Macro-F1 = 0.9603; Random Search = 0.9576</a:t>
+            </a:r>
+            <a:br/>
+            <a:r>
+              <a:t>• Held-out test Macro-F1 của hai mô hình đều là 0.9526</a:t>
+            </a:r>
+            <a:br/>
+            <a:r>
+              <a:t>• Search cost khoảng 14.96 giây cho 30 trials</a:t>
+            </a:r>
+            <a:br/>
+            <a:r>
+              <a:t>• Trong phạm vi thí nghiệm này, giữ cấu hình mặc định là lựa chọn hợp lý hơn.</a:t>
+            </a:r>
+          </a:p>
+        </p:txBody>
+      </p:sp>
+      <p:sp>
+        <p:nvSpPr>
+          <p:cNvPr id="14" name="TextBox 13"/>
+          <p:cNvSpPr txBox="1"/>
+          <p:nvPr/>
+        </p:nvSpPr>
+        <p:spPr>
+          <a:xfrm>
+            <a:off x="685800" y="5669280"/>
+            <a:ext cx="10972800" cy="320040"/>
+          </a:xfrm>
+          <a:prstGeom prst="rect">
+            <a:avLst/>
+          </a:prstGeom>
+          <a:noFill/>
+          <a:ln>
+            <a:noFill/>
+          </a:ln>
+        </p:spPr>
+        <p:txBody>
+          <a:bodyPr wrap="square" lIns="45720" rIns="45720">
+            <a:spAutoFit/>
+          </a:bodyPr>
+          <a:lstStyle/>
+          <a:p>
+            <a:pPr algn="l">
+              <a:defRPr sz="1200" b="0">
+                <a:solidFill>
+                  <a:srgbClr val="5A5A5A"/>
+                </a:solidFill>
+              </a:defRPr>
+            </a:pPr>
+            <a:r>
+              <a:t>Demo gợi ý khi thuyết trình: mở GitHub → results/analysis.md → báo cáo PDF → giải thích vì sao chọn baseline.</a:t>
             </a:r>
           </a:p>
         </p:txBody>
